--- a/Fix_It_Marketplace_Defense_Presentation.pptx
+++ b/Fix_It_Marketplace_Defense_Presentation.pptx
@@ -24,6 +24,8 @@
     <p:sldId id="272" r:id="rId23"/>
     <p:sldId id="273" r:id="rId24"/>
     <p:sldId id="274" r:id="rId25"/>
+    <p:sldId id="275" r:id="rId26"/>
+    <p:sldId id="276" r:id="rId27"/>
   </p:sldIdLst>
   <p:sldSz cx="12191695" cy="6858000" type="screen4x3"/>
   <p:notesSz cx="6858000" cy="9144000"/>
@@ -3165,7 +3167,7 @@
         </p:nvSpPr>
         <p:spPr>
           <a:xfrm>
-            <a:off x="914400" y="1097280"/>
+            <a:off x="914400" y="731520"/>
             <a:ext cx="10362895" cy="365760"/>
           </a:xfrm>
           <a:prstGeom prst="rect">
@@ -3180,7 +3182,7 @@
           <a:lstStyle/>
           <a:p>
             <a:r>
-              <a:rPr sz="1300" b="1">
+              <a:rPr sz="1200" b="1">
                 <a:solidFill>
                   <a:srgbClr val="059669"/>
                 </a:solidFill>
@@ -3199,7 +3201,7 @@
         </p:nvSpPr>
         <p:spPr>
           <a:xfrm>
-            <a:off x="914400" y="1645920"/>
+            <a:off x="914400" y="1188720"/>
             <a:ext cx="10362895" cy="2011680"/>
           </a:xfrm>
           <a:prstGeom prst="rect">
@@ -3214,13 +3216,14 @@
           <a:lstStyle/>
           <a:p>
             <a:r>
-              <a:rPr sz="3600" b="1">
+              <a:rPr sz="3000" b="1">
                 <a:solidFill>
                   <a:srgbClr val="FFFFFF"/>
                 </a:solidFill>
                 <a:latin typeface="Segoe UI"/>
               </a:rPr>
-              <a:t>Development of a Trust-Driven Local On-Demand Artisan &amp; Service Marketplace for Ghana</a:t>
+              <a:t>DEVELOPMENT OF A TRUST-DRIVEN LOCAL ON-DEMAND ARTISAN AND SERVICE MARKETPLACE FOR GHANA
+(FIX IT MARKETPLACE)</a:t>
             </a:r>
           </a:p>
         </p:txBody>
@@ -3233,7 +3236,7 @@
         </p:nvSpPr>
         <p:spPr>
           <a:xfrm>
-            <a:off x="914400" y="3840480"/>
+            <a:off x="914400" y="3566160"/>
             <a:ext cx="10362895" cy="548640"/>
           </a:xfrm>
           <a:prstGeom prst="rect">
@@ -3248,13 +3251,13 @@
           <a:lstStyle/>
           <a:p>
             <a:r>
-              <a:rPr sz="1800">
+              <a:rPr sz="1600">
                 <a:solidFill>
                   <a:srgbClr val="C7D2FE"/>
                 </a:solidFill>
                 <a:latin typeface="Segoe UI"/>
               </a:rPr>
-              <a:t>BSc. Computer Science Senior Design Thesis Defense | Fix It Marketplace</a:t>
+              <a:t>A Thesis Defense Submitted in Partial Fulfilment of the Requirements for BSc. Computer Science</a:t>
             </a:r>
           </a:p>
         </p:txBody>
@@ -3267,8 +3270,8 @@
         </p:nvSpPr>
         <p:spPr>
           <a:xfrm>
-            <a:off x="914400" y="4754880"/>
-            <a:ext cx="10362895" cy="1371600"/>
+            <a:off x="914400" y="4389120"/>
+            <a:ext cx="10362895" cy="1737360"/>
           </a:xfrm>
           <a:prstGeom prst="roundRect">
             <a:avLst/>
@@ -3312,8 +3315,8 @@
         </p:nvSpPr>
         <p:spPr>
           <a:xfrm>
-            <a:off x="1188720" y="4892040"/>
-            <a:ext cx="9784080" cy="1097280"/>
+            <a:off x="1188720" y="4572000"/>
+            <a:ext cx="9784080" cy="1371600"/>
           </a:xfrm>
           <a:prstGeom prst="rect">
             <a:avLst/>
@@ -3333,7 +3336,7 @@
                 </a:solidFill>
                 <a:latin typeface="Segoe UI"/>
               </a:rPr>
-              <a:t>Candidate: Emmanuel Opoku Nyame  (ID: 20220912)
+              <a:t>Candidate: Emmanuel Opoku Nyame  (Index No: 20220912)
 </a:t>
             </a:r>
             <a:r>
@@ -3343,7 +3346,9 @@
                 </a:solidFill>
                 <a:latin typeface="Segoe UI"/>
               </a:rPr>
-              <a:t>Supervisor: Dr. K. A. Boateng | Head of Department: Prof. J. K. Panford | Date: September 2026</a:t>
+              <a:t>Supervisor: Dr. K. A. Boateng
+Head of Department: Prof. J. K. Panford
+Date of Presentation: September 2026</a:t>
             </a:r>
           </a:p>
         </p:txBody>
@@ -3403,7 +3408,7 @@
                 </a:solidFill>
                 <a:latin typeface="Segoe UI"/>
               </a:rPr>
-              <a:t>CHAPTER IV: USER JOURNEY</a:t>
+              <a:t>CHAPTER III: SYSTEM DESIGN</a:t>
             </a:r>
           </a:p>
         </p:txBody>
@@ -3417,7 +3422,7 @@
         <p:spPr>
           <a:xfrm>
             <a:off x="731520" y="658368"/>
-            <a:ext cx="10698480" cy="548640"/>
+            <a:ext cx="10698480" cy="502920"/>
           </a:xfrm>
           <a:prstGeom prst="rect">
             <a:avLst/>
@@ -3431,13 +3436,13 @@
           <a:lstStyle/>
           <a:p>
             <a:r>
-              <a:rPr sz="2200" b="1">
+              <a:rPr sz="2100" b="1">
                 <a:solidFill>
                   <a:srgbClr val="0F172A"/>
                 </a:solidFill>
                 <a:latin typeface="Segoe UI"/>
               </a:rPr>
-              <a:t>Dual-Persona Onboarding Gateway &amp; Customer Welcome Hub</a:t>
+              <a:t>3.3 Module Design: Concept of Each Architectural Block</a:t>
             </a:r>
           </a:p>
         </p:txBody>
@@ -3450,7 +3455,7 @@
         </p:nvSpPr>
         <p:spPr>
           <a:xfrm>
-            <a:off x="731520" y="1234440"/>
+            <a:off x="731520" y="1207008"/>
             <a:ext cx="10728655" cy="18288"/>
           </a:xfrm>
           <a:prstGeom prst="rect">
@@ -3496,7 +3501,7 @@
         <p:spPr>
           <a:xfrm>
             <a:off x="731520" y="1463040"/>
-            <a:ext cx="5212080" cy="4846320"/>
+            <a:ext cx="4114800" cy="4846320"/>
           </a:xfrm>
           <a:prstGeom prst="roundRect">
             <a:avLst/>
@@ -3532,40 +3537,16 @@
           </a:p>
         </p:txBody>
       </p:sp>
-      <p:pic>
-        <p:nvPicPr>
-          <p:cNvPr id="6" name="Picture 5" descr="live_figure_4_2_persona_modal.png"/>
-          <p:cNvPicPr>
-            <a:picLocks noChangeAspect="1"/>
-          </p:cNvPicPr>
-          <p:nvPr/>
-        </p:nvPicPr>
-        <p:blipFill>
-          <a:blip r:embed="rId2"/>
-          <a:stretch>
-            <a:fillRect/>
-          </a:stretch>
-        </p:blipFill>
+      <p:sp>
+        <p:nvSpPr>
+          <p:cNvPr id="6" name="TextBox 5"/>
+          <p:cNvSpPr txBox="1"/>
+          <p:nvPr/>
+        </p:nvSpPr>
         <p:spPr>
           <a:xfrm>
             <a:off x="914400" y="1645920"/>
-            <a:ext cx="4846320" cy="3291840"/>
-          </a:xfrm>
-          <a:prstGeom prst="rect">
-            <a:avLst/>
-          </a:prstGeom>
-        </p:spPr>
-      </p:pic>
-      <p:sp>
-        <p:nvSpPr>
-          <p:cNvPr id="7" name="TextBox 6"/>
-          <p:cNvSpPr txBox="1"/>
-          <p:nvPr/>
-        </p:nvSpPr>
-        <p:spPr>
-          <a:xfrm>
-            <a:off x="914400" y="5029200"/>
-            <a:ext cx="4846320" cy="1188720"/>
+            <a:ext cx="3749039" cy="4480560"/>
           </a:xfrm>
           <a:prstGeom prst="rect">
             <a:avLst/>
@@ -3579,13 +3560,28 @@
           <a:lstStyle/>
           <a:p>
             <a:r>
-              <a:rPr b="1" sz="1200">
+              <a:rPr sz="1600" b="1">
+                <a:solidFill>
+                  <a:srgbClr val="0F172A"/>
+                </a:solidFill>
+              </a:rPr>
+              <a:t>Core Architectural Modules
+</a:t>
+            </a:r>
+          </a:p>
+          <a:p>
+            <a:pPr>
+              <a:spcBef>
+                <a:spcPts val="800"/>
+              </a:spcBef>
+            </a:pPr>
+            <a:r>
+              <a:rPr b="1" sz="1150">
                 <a:solidFill>
                   <a:srgbClr val="4F46E5"/>
                 </a:solidFill>
               </a:rPr>
-              <a:t>Figure 4-2: Dual-Persona Onboarding Gateway
-</a:t>
+              <a:t>Design System Module: </a:t>
             </a:r>
             <a:r>
               <a:rPr sz="1100">
@@ -3593,21 +3589,90 @@
                   <a:srgbClr val="1E293B"/>
                 </a:solidFill>
               </a:rPr>
-              <a:t>Forces an explicit role choice on first sign-in: Customer vs. Service Provider. Synchronizes role metadata to Clerk JWT for edge access security.</a:t>
-            </a:r>
-          </a:p>
-        </p:txBody>
-      </p:sp>
-      <p:sp>
-        <p:nvSpPr>
-          <p:cNvPr id="8" name="Rounded Rectangle 7"/>
+              <a:t>Standardizes HSL tokens, interactive cards, badges, and forms; WCAG 2.1 AA compliant (live at `/design-system`).</a:t>
+            </a:r>
+          </a:p>
+          <a:p>
+            <a:pPr>
+              <a:spcBef>
+                <a:spcPts val="800"/>
+              </a:spcBef>
+            </a:pPr>
+            <a:r>
+              <a:rPr b="1" sz="1150">
+                <a:solidFill>
+                  <a:srgbClr val="4F46E5"/>
+                </a:solidFill>
+              </a:rPr>
+              <a:t>Identity &amp; RBAC Module: </a:t>
+            </a:r>
+            <a:r>
+              <a:rPr sz="1100">
+                <a:solidFill>
+                  <a:srgbClr val="1E293B"/>
+                </a:solidFill>
+              </a:rPr>
+              <a:t>Clerk engine manages OAuth &amp; session tokens; custom metadata dynamically provisions customer vs. artisan roles.</a:t>
+            </a:r>
+          </a:p>
+          <a:p>
+            <a:pPr>
+              <a:spcBef>
+                <a:spcPts val="800"/>
+              </a:spcBef>
+            </a:pPr>
+            <a:r>
+              <a:rPr b="1" sz="1150">
+                <a:solidFill>
+                  <a:srgbClr val="4F46E5"/>
+                </a:solidFill>
+              </a:rPr>
+              <a:t>Content Lake Module: </a:t>
+            </a:r>
+            <a:r>
+              <a:rPr sz="1100">
+                <a:solidFill>
+                  <a:srgbClr val="1E293B"/>
+                </a:solidFill>
+              </a:rPr>
+              <a:t>Sanity CMS schemas govern services, categories, and provider profiles via declarative GROQ projections.</a:t>
+            </a:r>
+          </a:p>
+          <a:p>
+            <a:pPr>
+              <a:spcBef>
+                <a:spcPts val="800"/>
+              </a:spcBef>
+            </a:pPr>
+            <a:r>
+              <a:rPr b="1" sz="1150">
+                <a:solidFill>
+                  <a:srgbClr val="4F46E5"/>
+                </a:solidFill>
+              </a:rPr>
+              <a:t>Transaction Ledger Module: </a:t>
+            </a:r>
+            <a:r>
+              <a:rPr sz="1100">
+                <a:solidFill>
+                  <a:srgbClr val="1E293B"/>
+                </a:solidFill>
+              </a:rPr>
+              <a:t>PostgreSQL enforces ACID compliance, booking state machines, and cancellation audit trails.</a:t>
+            </a:r>
+          </a:p>
+        </p:txBody>
+      </p:sp>
+      <p:sp>
+        <p:nvSpPr>
+          <p:cNvPr id="7" name="Rounded Rectangle 6"/>
           <p:cNvSpPr/>
           <p:nvPr/>
         </p:nvSpPr>
         <p:spPr>
           <a:xfrm>
-            <a:off x="6217920" y="1463040"/>
-            <a:ext cx="5212080" cy="4846320"/>
+            <a:off x="5120640" y="1463040"/>
+            <a:ext cx="6339535" cy="4846320"/>
           </a:xfrm>
           <a:prstGeom prst="roundRect">
             <a:avLst/>
@@ -3645,22 +3710,22 @@
       </p:sp>
       <p:pic>
         <p:nvPicPr>
-          <p:cNvPr id="9" name="Picture 8" descr="live_figure_4_3_personalized_welcome.png"/>
+          <p:cNvPr id="8" name="Picture 7" descr="live_figure_3_2_design_system.png"/>
           <p:cNvPicPr>
             <a:picLocks noChangeAspect="1"/>
           </p:cNvPicPr>
           <p:nvPr/>
         </p:nvPicPr>
         <p:blipFill>
-          <a:blip r:embed="rId3"/>
+          <a:blip r:embed="rId2"/>
           <a:stretch>
             <a:fillRect/>
           </a:stretch>
         </p:blipFill>
         <p:spPr>
           <a:xfrm>
-            <a:off x="6400800" y="1645920"/>
-            <a:ext cx="4846320" cy="3291840"/>
+            <a:off x="5303520" y="1645920"/>
+            <a:ext cx="5943600" cy="4206240"/>
           </a:xfrm>
           <a:prstGeom prst="rect">
             <a:avLst/>
@@ -3669,14 +3734,14 @@
       </p:pic>
       <p:sp>
         <p:nvSpPr>
-          <p:cNvPr id="10" name="TextBox 9"/>
+          <p:cNvPr id="9" name="TextBox 8"/>
           <p:cNvSpPr txBox="1"/>
           <p:nvPr/>
         </p:nvSpPr>
         <p:spPr>
           <a:xfrm>
-            <a:off x="6400800" y="5029200"/>
-            <a:ext cx="4846320" cy="1188720"/>
+            <a:off x="5303520" y="5897880"/>
+            <a:ext cx="5943600" cy="365760"/>
           </a:xfrm>
           <a:prstGeom prst="rect">
             <a:avLst/>
@@ -3684,27 +3749,19 @@
           <a:noFill/>
         </p:spPr>
         <p:txBody>
-          <a:bodyPr wrap="square">
+          <a:bodyPr wrap="none">
             <a:spAutoFit/>
           </a:bodyPr>
           <a:lstStyle/>
           <a:p>
-            <a:r>
-              <a:rPr b="1" sz="1200">
-                <a:solidFill>
-                  <a:srgbClr val="059669"/>
-                </a:solidFill>
-              </a:rPr>
-              <a:t>Figure 4-3: Personalized Client Welcome Hub
-</a:t>
-            </a:r>
-            <a:r>
-              <a:rPr sz="1100">
-                <a:solidFill>
-                  <a:srgbClr val="1E293B"/>
-                </a:solidFill>
-              </a:rPr>
-              <a:t>Surfaces personalized greetings, contextual booking shortcuts, active booking counters, and recommended trade chips for rapid re-engagement.</a:t>
+            <a:pPr algn="ctr"/>
+            <a:r>
+              <a:rPr sz="1050" i="1">
+                <a:solidFill>
+                  <a:srgbClr val="64748B"/>
+                </a:solidFill>
+              </a:rPr>
+              <a:t>Figure 3-2: Live Fix-It Design System Architecture &amp; Interactive Tokens (/design-system)</a:t>
             </a:r>
           </a:p>
         </p:txBody>
@@ -3764,7 +3821,7 @@
                 </a:solidFill>
                 <a:latin typeface="Segoe UI"/>
               </a:rPr>
-              <a:t>CHAPTER IV: VALUE PROPOSITION</a:t>
+              <a:t>CHAPTER III: SYSTEM DESIGN</a:t>
             </a:r>
           </a:p>
         </p:txBody>
@@ -3778,7 +3835,7 @@
         <p:spPr>
           <a:xfrm>
             <a:off x="731520" y="658368"/>
-            <a:ext cx="10698480" cy="548640"/>
+            <a:ext cx="10698480" cy="502920"/>
           </a:xfrm>
           <a:prstGeom prst="rect">
             <a:avLst/>
@@ -3792,13 +3849,13 @@
           <a:lstStyle/>
           <a:p>
             <a:r>
-              <a:rPr sz="2200" b="1">
+              <a:rPr sz="2100" b="1">
                 <a:solidFill>
                   <a:srgbClr val="0F172A"/>
                 </a:solidFill>
                 <a:latin typeface="Segoe UI"/>
               </a:rPr>
-              <a:t>Transparent 3-Tier Service Packages &amp; Price Guarantees</a:t>
+              <a:t>3.4 Full System Architecture Diagram &amp; Ranking Formulations</a:t>
             </a:r>
           </a:p>
         </p:txBody>
@@ -3811,7 +3868,7 @@
         </p:nvSpPr>
         <p:spPr>
           <a:xfrm>
-            <a:off x="731520" y="1234440"/>
+            <a:off x="731520" y="1207008"/>
             <a:ext cx="10728655" cy="18288"/>
           </a:xfrm>
           <a:prstGeom prst="rect">
@@ -3857,7 +3914,7 @@
         <p:spPr>
           <a:xfrm>
             <a:off x="731520" y="1463040"/>
-            <a:ext cx="4114800" cy="4846320"/>
+            <a:ext cx="5212080" cy="4846320"/>
           </a:xfrm>
           <a:prstGeom prst="roundRect">
             <a:avLst/>
@@ -3901,8 +3958,8 @@
         </p:nvSpPr>
         <p:spPr>
           <a:xfrm>
-            <a:off x="914400" y="1645920"/>
-            <a:ext cx="3749039" cy="4480560"/>
+            <a:off x="1005840" y="1645920"/>
+            <a:ext cx="4663440" cy="4480560"/>
           </a:xfrm>
           <a:prstGeom prst="rect">
             <a:avLst/>
@@ -3916,12 +3973,12 @@
           <a:lstStyle/>
           <a:p>
             <a:r>
-              <a:rPr sz="1600" b="1">
+              <a:rPr sz="1500" b="1">
                 <a:solidFill>
                   <a:srgbClr val="0F172A"/>
                 </a:solidFill>
               </a:rPr>
-              <a:t>Eliminating Arbitrary Price Haggling
+              <a:t>Multi-Criteria Provider Ranking Formula
 </a:t>
             </a:r>
           </a:p>
@@ -3932,20 +3989,29 @@
               </a:spcBef>
             </a:pPr>
             <a:r>
-              <a:rPr b="1" sz="1150">
+              <a:rPr sz="1000" b="1">
                 <a:solidFill>
                   <a:srgbClr val="4F46E5"/>
                 </a:solidFill>
-              </a:rPr>
-              <a:t>Three Standardized Tiers: </a:t>
-            </a:r>
+                <a:latin typeface="Courier New"/>
+              </a:rPr>
+              <a:t>Score(p, q) = w1*Relevance + w2*Verification + w3*(Rating/5.0) - w4*Distance</a:t>
+            </a:r>
+          </a:p>
+          <a:p>
+            <a:pPr>
+              <a:spcBef>
+                <a:spcPts val="600"/>
+              </a:spcBef>
+            </a:pPr>
             <a:r>
               <a:rPr sz="1100">
                 <a:solidFill>
                   <a:srgbClr val="1E293B"/>
                 </a:solidFill>
               </a:rPr>
-              <a:t>Basic (Minor diagnosis/repair), Standard (Comprehensive servicing), and Premium (Full-scale installation).</a:t>
+              <a:t>Weights: w1 = 0.25 (Text), w2 = 0.35 (Vetted Badge), w3 = 0.30 (Rating), w4 = 0.10 (Haversine Distance penalty).
+</a:t>
             </a:r>
           </a:p>
           <a:p>
@@ -3955,66 +4021,22 @@
               </a:spcBef>
             </a:pPr>
             <a:r>
-              <a:rPr b="1" sz="1150">
-                <a:solidFill>
-                  <a:srgbClr val="4F46E5"/>
-                </a:solidFill>
-              </a:rPr>
-              <a:t>Explicit Work Inclusions: </a:t>
-            </a:r>
-            <a:r>
-              <a:rPr sz="1100">
-                <a:solidFill>
-                  <a:srgbClr val="1E293B"/>
-                </a:solidFill>
-              </a:rPr>
-              <a:t>Clearly delineates tasks covered by the quoted price (e.g. disassembly, blanket wrapping, transit).</a:t>
-            </a:r>
-          </a:p>
-          <a:p>
-            <a:pPr>
-              <a:spcBef>
-                <a:spcPts val="800"/>
-              </a:spcBef>
-            </a:pPr>
-            <a:r>
-              <a:rPr b="1" sz="1150">
-                <a:solidFill>
-                  <a:srgbClr val="4F46E5"/>
-                </a:solidFill>
-              </a:rPr>
-              <a:t>Transparent Exclusions: </a:t>
-            </a:r>
-            <a:r>
-              <a:rPr sz="1100">
-                <a:solidFill>
-                  <a:srgbClr val="1E293B"/>
-                </a:solidFill>
-              </a:rPr>
-              <a:t>Prevents scope creep and unexpected billing disputes by explicitly noting items requiring separate material procurement.</a:t>
-            </a:r>
-          </a:p>
-          <a:p>
-            <a:pPr>
-              <a:spcBef>
-                <a:spcPts val="800"/>
-              </a:spcBef>
-            </a:pPr>
-            <a:r>
-              <a:rPr b="1" sz="1150">
-                <a:solidFill>
-                  <a:srgbClr val="4F46E5"/>
-                </a:solidFill>
-              </a:rPr>
-              <a:t>Ghana Cedi (GHS) Currency: </a:t>
-            </a:r>
-            <a:r>
-              <a:rPr sz="1100">
-                <a:solidFill>
-                  <a:srgbClr val="1E293B"/>
-                </a:solidFill>
-              </a:rPr>
-              <a:t>Standardized in local currency, building immediate market trust and commercial transparency.</a:t>
+              <a:rPr b="1" sz="1200">
+                <a:solidFill>
+                  <a:srgbClr val="0F172A"/>
+                </a:solidFill>
+              </a:rPr>
+              <a:t>Haversine Distance Formula for Proximity:
+</a:t>
+            </a:r>
+            <a:r>
+              <a:rPr sz="950">
+                <a:solidFill>
+                  <a:srgbClr val="059669"/>
+                </a:solidFill>
+                <a:latin typeface="Courier New"/>
+              </a:rPr>
+              <a:t>d = 2 * r * arcsin(sqrt(sin^2(dLat/2) + cos(lat1) * cos(lat2) * sin^2(dLon/2)))</a:t>
             </a:r>
           </a:p>
         </p:txBody>
@@ -4027,18 +4049,18 @@
         </p:nvSpPr>
         <p:spPr>
           <a:xfrm>
-            <a:off x="5120640" y="1463040"/>
-            <a:ext cx="6309360" cy="4846320"/>
+            <a:off x="6217920" y="1463040"/>
+            <a:ext cx="5212080" cy="4846320"/>
           </a:xfrm>
           <a:prstGeom prst="roundRect">
             <a:avLst/>
           </a:prstGeom>
           <a:solidFill>
-            <a:srgbClr val="FFFFFF"/>
+            <a:srgbClr val="0F172A"/>
           </a:solidFill>
           <a:ln w="12700">
             <a:solidFill>
-              <a:srgbClr val="E2E8F0"/>
+              <a:srgbClr val="0F172A"/>
             </a:solidFill>
           </a:ln>
         </p:spPr>
@@ -4064,60 +4086,58 @@
           </a:p>
         </p:txBody>
       </p:sp>
-      <p:pic>
-        <p:nvPicPr>
-          <p:cNvPr id="8" name="Picture 7" descr="live_figure_4_4_service_detail_tiers.png"/>
-          <p:cNvPicPr>
-            <a:picLocks noChangeAspect="1"/>
-          </p:cNvPicPr>
-          <p:nvPr/>
-        </p:nvPicPr>
-        <p:blipFill>
-          <a:blip r:embed="rId2"/>
-          <a:stretch>
-            <a:fillRect/>
-          </a:stretch>
-        </p:blipFill>
-        <p:spPr>
-          <a:xfrm>
-            <a:off x="5303520" y="1645920"/>
-            <a:ext cx="5943600" cy="4206240"/>
+      <p:sp>
+        <p:nvSpPr>
+          <p:cNvPr id="8" name="TextBox 7"/>
+          <p:cNvSpPr txBox="1"/>
+          <p:nvPr/>
+        </p:nvSpPr>
+        <p:spPr>
+          <a:xfrm>
+            <a:off x="6400800" y="1645920"/>
+            <a:ext cx="4846320" cy="4480560"/>
           </a:xfrm>
           <a:prstGeom prst="rect">
             <a:avLst/>
           </a:prstGeom>
-        </p:spPr>
-      </p:pic>
-      <p:sp>
-        <p:nvSpPr>
-          <p:cNvPr id="9" name="TextBox 8"/>
-          <p:cNvSpPr txBox="1"/>
-          <p:nvPr/>
-        </p:nvSpPr>
-        <p:spPr>
-          <a:xfrm>
-            <a:off x="5303520" y="5897880"/>
-            <a:ext cx="5943600" cy="365760"/>
-          </a:xfrm>
-          <a:prstGeom prst="rect">
-            <a:avLst/>
-          </a:prstGeom>
           <a:noFill/>
         </p:spPr>
         <p:txBody>
-          <a:bodyPr wrap="none">
+          <a:bodyPr wrap="square">
             <a:spAutoFit/>
           </a:bodyPr>
           <a:lstStyle/>
           <a:p>
-            <a:pPr algn="ctr"/>
-            <a:r>
-              <a:rPr sz="1050" i="1">
-                <a:solidFill>
-                  <a:srgbClr val="64748B"/>
-                </a:solidFill>
-              </a:rPr>
-              <a:t>Figure 4-4: Tiered Service Scope &amp; Pricing Package Selection Matrix</a:t>
+            <a:r>
+              <a:rPr sz="1400" b="1">
+                <a:solidFill>
+                  <a:srgbClr val="059669"/>
+                </a:solidFill>
+              </a:rPr>
+              <a:t>Figure 3-1: System Data Flow Architecture
+</a:t>
+            </a:r>
+            <a:r>
+              <a:rPr sz="1000">
+                <a:solidFill>
+                  <a:srgbClr val="FFFFFF"/>
+                </a:solidFill>
+                <a:latin typeface="Courier New"/>
+              </a:rPr>
+              <a:t>[Client Presentation Tier (React 19 / Tailwind)]
+                      |
+      Edge Security &amp; Clerk Middleware
+         /                         \
+  (Read GROQ Query)       (Transactional Mutation)
+        v                             v
+[Sanity Content Lake]       [Neon PostgreSQL Store]
+- Services &amp; Packages       - Orders &amp; State Machine
+- Provider Verified Badges  - Cancellation Audit Logs
+        \                             /
+         +-------------+-------------+
+                       v
+[WhatsApp Internationalized Bridge (+233)]
+-&gt; Real-Time Artisan Coordination</a:t>
             </a:r>
           </a:p>
         </p:txBody>
@@ -4177,7 +4197,7 @@
                 </a:solidFill>
                 <a:latin typeface="Segoe UI"/>
               </a:rPr>
-              <a:t>CHAPTER IV: CORE OPERATIONAL FLOW</a:t>
+              <a:t>CHAPTER IV: CONSTRUCTION &amp; DEMONSTRATION</a:t>
             </a:r>
           </a:p>
         </p:txBody>
@@ -4191,7 +4211,7 @@
         <p:spPr>
           <a:xfrm>
             <a:off x="731520" y="658368"/>
-            <a:ext cx="10698480" cy="548640"/>
+            <a:ext cx="10698480" cy="502920"/>
           </a:xfrm>
           <a:prstGeom prst="rect">
             <a:avLst/>
@@ -4205,13 +4225,13 @@
           <a:lstStyle/>
           <a:p>
             <a:r>
-              <a:rPr sz="2200" b="1">
+              <a:rPr sz="2100" b="1">
                 <a:solidFill>
                   <a:srgbClr val="0F172A"/>
                 </a:solidFill>
                 <a:latin typeface="Segoe UI"/>
               </a:rPr>
-              <a:t>Order Lifecycle Ledger &amp; Real-Time WhatsApp Dispatch</a:t>
+              <a:t>Discovery Catalog (Fig 4-1) &amp; Role Selection Modal (Fig 4-2)</a:t>
             </a:r>
           </a:p>
         </p:txBody>
@@ -4224,7 +4244,7 @@
         </p:nvSpPr>
         <p:spPr>
           <a:xfrm>
-            <a:off x="731520" y="1234440"/>
+            <a:off x="731520" y="1207008"/>
             <a:ext cx="10728655" cy="18288"/>
           </a:xfrm>
           <a:prstGeom prst="rect">
@@ -4270,7 +4290,7 @@
         <p:spPr>
           <a:xfrm>
             <a:off x="731520" y="1463040"/>
-            <a:ext cx="4114800" cy="4846320"/>
+            <a:ext cx="5212080" cy="4846320"/>
           </a:xfrm>
           <a:prstGeom prst="roundRect">
             <a:avLst/>
@@ -4306,16 +4326,40 @@
           </a:p>
         </p:txBody>
       </p:sp>
-      <p:sp>
-        <p:nvSpPr>
-          <p:cNvPr id="6" name="TextBox 5"/>
+      <p:pic>
+        <p:nvPicPr>
+          <p:cNvPr id="6" name="Picture 5" descr="live_figure_4_1_homepage_catalog.png"/>
+          <p:cNvPicPr>
+            <a:picLocks noChangeAspect="1"/>
+          </p:cNvPicPr>
+          <p:nvPr/>
+        </p:nvPicPr>
+        <p:blipFill>
+          <a:blip r:embed="rId2"/>
+          <a:stretch>
+            <a:fillRect/>
+          </a:stretch>
+        </p:blipFill>
+        <p:spPr>
+          <a:xfrm>
+            <a:off x="914400" y="1645920"/>
+            <a:ext cx="4846320" cy="3291840"/>
+          </a:xfrm>
+          <a:prstGeom prst="rect">
+            <a:avLst/>
+          </a:prstGeom>
+        </p:spPr>
+      </p:pic>
+      <p:sp>
+        <p:nvSpPr>
+          <p:cNvPr id="7" name="TextBox 6"/>
           <p:cNvSpPr txBox="1"/>
           <p:nvPr/>
         </p:nvSpPr>
         <p:spPr>
           <a:xfrm>
-            <a:off x="914400" y="1645920"/>
-            <a:ext cx="3749039" cy="4480560"/>
+            <a:off x="914400" y="5029200"/>
+            <a:ext cx="4846320" cy="1188720"/>
           </a:xfrm>
           <a:prstGeom prst="rect">
             <a:avLst/>
@@ -4329,119 +4373,35 @@
           <a:lstStyle/>
           <a:p>
             <a:r>
-              <a:rPr sz="1600" b="1">
-                <a:solidFill>
-                  <a:srgbClr val="0F172A"/>
-                </a:solidFill>
-              </a:rPr>
-              <a:t>Order Lifecycle &amp; Direct Action
+              <a:rPr b="1" sz="1200">
+                <a:solidFill>
+                  <a:srgbClr val="4F46E5"/>
+                </a:solidFill>
+              </a:rPr>
+              <a:t>Figure 4-1: Service Catalog &amp; Discovery
 </a:t>
             </a:r>
-          </a:p>
-          <a:p>
-            <a:pPr>
-              <a:spcBef>
-                <a:spcPts val="800"/>
-              </a:spcBef>
-            </a:pPr>
-            <a:r>
-              <a:rPr b="1" sz="1150">
-                <a:solidFill>
-                  <a:srgbClr val="4F46E5"/>
-                </a:solidFill>
-              </a:rPr>
-              <a:t>State Machine Governance: </a:t>
-            </a:r>
             <a:r>
               <a:rPr sz="1100">
                 <a:solidFill>
                   <a:srgbClr val="1E293B"/>
                 </a:solidFill>
               </a:rPr>
-              <a:t>Tracks state transitions: Pending -&gt; Confirmed -&gt; In Progress -&gt; Completed / Cancelled.</a:t>
-            </a:r>
-          </a:p>
-          <a:p>
-            <a:pPr>
-              <a:spcBef>
-                <a:spcPts val="800"/>
-              </a:spcBef>
-            </a:pPr>
-            <a:r>
-              <a:rPr b="1" sz="1150">
-                <a:solidFill>
-                  <a:srgbClr val="4F46E5"/>
-                </a:solidFill>
-              </a:rPr>
-              <a:t>Instant Cancellation Reconciliation: </a:t>
-            </a:r>
-            <a:r>
-              <a:rPr sz="1100">
-                <a:solidFill>
-                  <a:srgbClr val="1E293B"/>
-                </a:solidFill>
-              </a:rPr>
-              <a:t>React 19 optimistic UI hooks instantly remove cancelled bookings from the active list without full page refreshes.</a:t>
-            </a:r>
-          </a:p>
-          <a:p>
-            <a:pPr>
-              <a:spcBef>
-                <a:spcPts val="800"/>
-              </a:spcBef>
-            </a:pPr>
-            <a:r>
-              <a:rPr b="1" sz="1150">
-                <a:solidFill>
-                  <a:srgbClr val="4F46E5"/>
-                </a:solidFill>
-              </a:rPr>
-              <a:t>Internationalized Phone Normalization: </a:t>
-            </a:r>
-            <a:r>
-              <a:rPr sz="1100">
-                <a:solidFill>
-                  <a:srgbClr val="1E293B"/>
-                </a:solidFill>
-              </a:rPr>
-              <a:t>Automatically strips leading zeros and prepends Ghana's country code (`+233`) to format valid international numbers.</a:t>
-            </a:r>
-          </a:p>
-          <a:p>
-            <a:pPr>
-              <a:spcBef>
-                <a:spcPts val="800"/>
-              </a:spcBef>
-            </a:pPr>
-            <a:r>
-              <a:rPr b="1" sz="1150">
-                <a:solidFill>
-                  <a:srgbClr val="4F46E5"/>
-                </a:solidFill>
-              </a:rPr>
-              <a:t>One-Click WhatsApp Action: </a:t>
-            </a:r>
-            <a:r>
-              <a:rPr sz="1100">
-                <a:solidFill>
-                  <a:srgbClr val="1E293B"/>
-                </a:solidFill>
-              </a:rPr>
-              <a:t>Generates URI-encoded deep links (`wa.me/233...`) pre-populated with service title, date, and customer details.</a:t>
-            </a:r>
-          </a:p>
-        </p:txBody>
-      </p:sp>
-      <p:sp>
-        <p:nvSpPr>
-          <p:cNvPr id="7" name="Rounded Rectangle 6"/>
+              <a:t>Live landing page with multi-category chips, debounced search, trust value badges, and verified artisan listings.</a:t>
+            </a:r>
+          </a:p>
+        </p:txBody>
+      </p:sp>
+      <p:sp>
+        <p:nvSpPr>
+          <p:cNvPr id="8" name="Rounded Rectangle 7"/>
           <p:cNvSpPr/>
           <p:nvPr/>
         </p:nvSpPr>
         <p:spPr>
           <a:xfrm>
-            <a:off x="5120640" y="1463040"/>
-            <a:ext cx="6309360" cy="4846320"/>
+            <a:off x="6217920" y="1463040"/>
+            <a:ext cx="5212080" cy="4846320"/>
           </a:xfrm>
           <a:prstGeom prst="roundRect">
             <a:avLst/>
@@ -4479,22 +4439,22 @@
       </p:sp>
       <p:pic>
         <p:nvPicPr>
-          <p:cNvPr id="8" name="Picture 7" descr="live_figure_4_5_client_bookings.png"/>
+          <p:cNvPr id="9" name="Picture 8" descr="live_figure_4_2_persona_modal.png"/>
           <p:cNvPicPr>
             <a:picLocks noChangeAspect="1"/>
           </p:cNvPicPr>
           <p:nvPr/>
         </p:nvPicPr>
         <p:blipFill>
-          <a:blip r:embed="rId2"/>
+          <a:blip r:embed="rId3"/>
           <a:stretch>
             <a:fillRect/>
           </a:stretch>
         </p:blipFill>
         <p:spPr>
           <a:xfrm>
-            <a:off x="5303520" y="1645920"/>
-            <a:ext cx="5943600" cy="4206240"/>
+            <a:off x="6400800" y="1645920"/>
+            <a:ext cx="4846320" cy="3291840"/>
           </a:xfrm>
           <a:prstGeom prst="rect">
             <a:avLst/>
@@ -4503,14 +4463,14 @@
       </p:pic>
       <p:sp>
         <p:nvSpPr>
-          <p:cNvPr id="9" name="TextBox 8"/>
+          <p:cNvPr id="10" name="TextBox 9"/>
           <p:cNvSpPr txBox="1"/>
           <p:nvPr/>
         </p:nvSpPr>
         <p:spPr>
           <a:xfrm>
-            <a:off x="5303520" y="5897880"/>
-            <a:ext cx="5943600" cy="365760"/>
+            <a:off x="6400800" y="5029200"/>
+            <a:ext cx="4846320" cy="1188720"/>
           </a:xfrm>
           <a:prstGeom prst="rect">
             <a:avLst/>
@@ -4518,19 +4478,27 @@
           <a:noFill/>
         </p:spPr>
         <p:txBody>
-          <a:bodyPr wrap="none">
+          <a:bodyPr wrap="square">
             <a:spAutoFit/>
           </a:bodyPr>
           <a:lstStyle/>
           <a:p>
-            <a:pPr algn="ctr"/>
-            <a:r>
-              <a:rPr sz="1050" i="1">
-                <a:solidFill>
-                  <a:srgbClr val="64748B"/>
-                </a:solidFill>
-              </a:rPr>
-              <a:t>Figure 4-5: Customer Bookings Management Ledger with Direct WhatsApp Action</a:t>
+            <a:r>
+              <a:rPr b="1" sz="1200">
+                <a:solidFill>
+                  <a:srgbClr val="059669"/>
+                </a:solidFill>
+              </a:rPr>
+              <a:t>Figure 4-2: Dual-Persona Role Gateway
+</a:t>
+            </a:r>
+            <a:r>
+              <a:rPr sz="1100">
+                <a:solidFill>
+                  <a:srgbClr val="1E293B"/>
+                </a:solidFill>
+              </a:rPr>
+              <a:t>First-time authentication modal allowing user selection between Hiring Services and Providing Services, dynamically synced to Clerk.</a:t>
             </a:r>
           </a:p>
         </p:txBody>
@@ -4590,7 +4558,7 @@
                 </a:solidFill>
                 <a:latin typeface="Segoe UI"/>
               </a:rPr>
-              <a:t>CHAPTER IV: PROVIDER TOOLING</a:t>
+              <a:t>CHAPTER IV: CONSTRUCTION &amp; DEMONSTRATION</a:t>
             </a:r>
           </a:p>
         </p:txBody>
@@ -4604,7 +4572,7 @@
         <p:spPr>
           <a:xfrm>
             <a:off x="731520" y="658368"/>
-            <a:ext cx="10698480" cy="548640"/>
+            <a:ext cx="10698480" cy="502920"/>
           </a:xfrm>
           <a:prstGeom prst="rect">
             <a:avLst/>
@@ -4618,13 +4586,13 @@
           <a:lstStyle/>
           <a:p>
             <a:r>
-              <a:rPr sz="2200" b="1">
+              <a:rPr sz="2100" b="1">
                 <a:solidFill>
                   <a:srgbClr val="0F172A"/>
                 </a:solidFill>
                 <a:latin typeface="Segoe UI"/>
               </a:rPr>
-              <a:t>Artisan Onboarding Builder &amp; Operational Orders Dashboard</a:t>
+              <a:t>Client Welcome Hub (Fig 4-3) &amp; Multi-Tier Pricing (Fig 4-4)</a:t>
             </a:r>
           </a:p>
         </p:txBody>
@@ -4637,7 +4605,7 @@
         </p:nvSpPr>
         <p:spPr>
           <a:xfrm>
-            <a:off x="731520" y="1234440"/>
+            <a:off x="731520" y="1207008"/>
             <a:ext cx="10728655" cy="18288"/>
           </a:xfrm>
           <a:prstGeom prst="rect">
@@ -4721,7 +4689,7 @@
       </p:sp>
       <p:pic>
         <p:nvPicPr>
-          <p:cNvPr id="6" name="Picture 5" descr="live_figure_4_6_provider_onboarding.png"/>
+          <p:cNvPr id="6" name="Picture 5" descr="live_figure_4_3_personalized_welcome.png"/>
           <p:cNvPicPr>
             <a:picLocks noChangeAspect="1"/>
           </p:cNvPicPr>
@@ -4771,7 +4739,7 @@
                   <a:srgbClr val="4F46E5"/>
                 </a:solidFill>
               </a:rPr>
-              <a:t>Figure 4-6: Multi-Step Artisan Profile Onboarding
+              <a:t>Figure 4-3: Personalized Welcome Hub
 </a:t>
             </a:r>
             <a:r>
@@ -4780,7 +4748,7 @@
                   <a:srgbClr val="1E293B"/>
                 </a:solidFill>
               </a:rPr>
-              <a:t>Enables tradespeople to build their digital storefront: input business details, select primary trade categories, declare service areas, and submit verification credentials.</a:t>
+              <a:t>Greets authenticated consumers, showcases quick booking categories, and displays live booking activity counters.</a:t>
             </a:r>
           </a:p>
         </p:txBody>
@@ -4832,7 +4800,7 @@
       </p:sp>
       <p:pic>
         <p:nvPicPr>
-          <p:cNvPr id="9" name="Picture 8" descr="live_figure_4_7_provider_dashboard.png"/>
+          <p:cNvPr id="9" name="Picture 8" descr="live_figure_4_4_service_detail_tiers.png"/>
           <p:cNvPicPr>
             <a:picLocks noChangeAspect="1"/>
           </p:cNvPicPr>
@@ -4882,7 +4850,7 @@
                   <a:srgbClr val="059669"/>
                 </a:solidFill>
               </a:rPr>
-              <a:t>Figure 4-7: Operational Orders &amp; Dispatch Dashboard
+              <a:t>Figure 4-4: 3-Tier Package Pricing Matrix
 </a:t>
             </a:r>
             <a:r>
@@ -4891,7 +4859,7 @@
                   <a:srgbClr val="1E293B"/>
                 </a:solidFill>
               </a:rPr>
-              <a:t>Artisans manage incoming booking requests, toggle job status in real time, review customer delivery addresses, and initiate customer communication.</a:t>
+              <a:t>Details Basic, Standard, and Premium packages in Ghana Cedis (GHS) with explicit work scope inclusions and exclusions.</a:t>
             </a:r>
           </a:p>
         </p:txBody>
@@ -4951,7 +4919,7 @@
                 </a:solidFill>
                 <a:latin typeface="Segoe UI"/>
               </a:rPr>
-              <a:t>CHAPTER IV: VERIFICATION &amp; QUALITY ASSURANCE</a:t>
+              <a:t>CHAPTER IV: CONSTRUCTION &amp; DEMONSTRATION</a:t>
             </a:r>
           </a:p>
         </p:txBody>
@@ -4965,7 +4933,7 @@
         <p:spPr>
           <a:xfrm>
             <a:off x="731520" y="658368"/>
-            <a:ext cx="10698480" cy="548640"/>
+            <a:ext cx="10698480" cy="502920"/>
           </a:xfrm>
           <a:prstGeom prst="rect">
             <a:avLst/>
@@ -4979,13 +4947,13 @@
           <a:lstStyle/>
           <a:p>
             <a:r>
-              <a:rPr sz="2200" b="1">
+              <a:rPr sz="2100" b="1">
                 <a:solidFill>
                   <a:srgbClr val="0F172A"/>
                 </a:solidFill>
                 <a:latin typeface="Segoe UI"/>
               </a:rPr>
-              <a:t>Multi-Tier Testing Matrix &amp; Security Hardening</a:t>
+              <a:t>Bookings Ledger &amp; WhatsApp Direct Action (Fig 4-5)</a:t>
             </a:r>
           </a:p>
         </p:txBody>
@@ -4998,7 +4966,781 @@
         </p:nvSpPr>
         <p:spPr>
           <a:xfrm>
-            <a:off x="731520" y="1234440"/>
+            <a:off x="731520" y="1207008"/>
+            <a:ext cx="10728655" cy="18288"/>
+          </a:xfrm>
+          <a:prstGeom prst="rect">
+            <a:avLst/>
+          </a:prstGeom>
+          <a:solidFill>
+            <a:srgbClr val="E2E8F0"/>
+          </a:solidFill>
+          <a:ln>
+            <a:solidFill>
+              <a:srgbClr val="E2E8F0"/>
+            </a:solidFill>
+          </a:ln>
+        </p:spPr>
+        <p:style>
+          <a:lnRef idx="1">
+            <a:schemeClr val="accent1"/>
+          </a:lnRef>
+          <a:fillRef idx="3">
+            <a:schemeClr val="accent1"/>
+          </a:fillRef>
+          <a:effectRef idx="2">
+            <a:schemeClr val="accent1"/>
+          </a:effectRef>
+          <a:fontRef idx="minor">
+            <a:schemeClr val="lt1"/>
+          </a:fontRef>
+        </p:style>
+        <p:txBody>
+          <a:bodyPr rtlCol="0" anchor="ctr"/>
+          <a:lstStyle/>
+          <a:p>
+            <a:pPr algn="ctr"/>
+          </a:p>
+        </p:txBody>
+      </p:sp>
+      <p:sp>
+        <p:nvSpPr>
+          <p:cNvPr id="5" name="Rounded Rectangle 4"/>
+          <p:cNvSpPr/>
+          <p:nvPr/>
+        </p:nvSpPr>
+        <p:spPr>
+          <a:xfrm>
+            <a:off x="731520" y="1463040"/>
+            <a:ext cx="4114800" cy="4846320"/>
+          </a:xfrm>
+          <a:prstGeom prst="roundRect">
+            <a:avLst/>
+          </a:prstGeom>
+          <a:solidFill>
+            <a:srgbClr val="FFFFFF"/>
+          </a:solidFill>
+          <a:ln w="12700">
+            <a:solidFill>
+              <a:srgbClr val="E2E8F0"/>
+            </a:solidFill>
+          </a:ln>
+        </p:spPr>
+        <p:style>
+          <a:lnRef idx="1">
+            <a:schemeClr val="accent1"/>
+          </a:lnRef>
+          <a:fillRef idx="3">
+            <a:schemeClr val="accent1"/>
+          </a:fillRef>
+          <a:effectRef idx="2">
+            <a:schemeClr val="accent1"/>
+          </a:effectRef>
+          <a:fontRef idx="minor">
+            <a:schemeClr val="lt1"/>
+          </a:fontRef>
+        </p:style>
+        <p:txBody>
+          <a:bodyPr rtlCol="0" anchor="ctr"/>
+          <a:lstStyle/>
+          <a:p>
+            <a:pPr algn="ctr"/>
+          </a:p>
+        </p:txBody>
+      </p:sp>
+      <p:sp>
+        <p:nvSpPr>
+          <p:cNvPr id="6" name="TextBox 5"/>
+          <p:cNvSpPr txBox="1"/>
+          <p:nvPr/>
+        </p:nvSpPr>
+        <p:spPr>
+          <a:xfrm>
+            <a:off x="914400" y="1645920"/>
+            <a:ext cx="3749039" cy="4480560"/>
+          </a:xfrm>
+          <a:prstGeom prst="rect">
+            <a:avLst/>
+          </a:prstGeom>
+          <a:noFill/>
+        </p:spPr>
+        <p:txBody>
+          <a:bodyPr wrap="square">
+            <a:spAutoFit/>
+          </a:bodyPr>
+          <a:lstStyle/>
+          <a:p>
+            <a:r>
+              <a:rPr sz="1600" b="1">
+                <a:solidFill>
+                  <a:srgbClr val="0F172A"/>
+                </a:solidFill>
+              </a:rPr>
+              <a:t>Order Ledger &amp; Direct Messaging
+</a:t>
+            </a:r>
+          </a:p>
+          <a:p>
+            <a:pPr>
+              <a:spcBef>
+                <a:spcPts val="800"/>
+              </a:spcBef>
+            </a:pPr>
+            <a:r>
+              <a:rPr b="1" sz="1150">
+                <a:solidFill>
+                  <a:srgbClr val="4F46E5"/>
+                </a:solidFill>
+              </a:rPr>
+              <a:t>Stateful Order Tracking: </a:t>
+            </a:r>
+            <a:r>
+              <a:rPr sz="1100">
+                <a:solidFill>
+                  <a:srgbClr val="1E293B"/>
+                </a:solidFill>
+              </a:rPr>
+              <a:t>Manages booking lifecycle: Pending -&gt; Confirmed -&gt; In Progress -&gt; Completed / Cancelled.</a:t>
+            </a:r>
+          </a:p>
+          <a:p>
+            <a:pPr>
+              <a:spcBef>
+                <a:spcPts val="800"/>
+              </a:spcBef>
+            </a:pPr>
+            <a:r>
+              <a:rPr b="1" sz="1150">
+                <a:solidFill>
+                  <a:srgbClr val="4F46E5"/>
+                </a:solidFill>
+              </a:rPr>
+              <a:t>Instant Cancellation UI: </a:t>
+            </a:r>
+            <a:r>
+              <a:rPr sz="1100">
+                <a:solidFill>
+                  <a:srgbClr val="1E293B"/>
+                </a:solidFill>
+              </a:rPr>
+              <a:t>React 19 optimistic mutation immediately reconciles the booking card out of the active list.</a:t>
+            </a:r>
+          </a:p>
+          <a:p>
+            <a:pPr>
+              <a:spcBef>
+                <a:spcPts val="800"/>
+              </a:spcBef>
+            </a:pPr>
+            <a:r>
+              <a:rPr b="1" sz="1150">
+                <a:solidFill>
+                  <a:srgbClr val="4F46E5"/>
+                </a:solidFill>
+              </a:rPr>
+              <a:t>Ghana Phone Normalization: </a:t>
+            </a:r>
+            <a:r>
+              <a:rPr sz="1100">
+                <a:solidFill>
+                  <a:srgbClr val="1E293B"/>
+                </a:solidFill>
+              </a:rPr>
+              <a:t>Automatically strips leading 0 and prepends `+233` for international compliance.</a:t>
+            </a:r>
+          </a:p>
+          <a:p>
+            <a:pPr>
+              <a:spcBef>
+                <a:spcPts val="800"/>
+              </a:spcBef>
+            </a:pPr>
+            <a:r>
+              <a:rPr b="1" sz="1150">
+                <a:solidFill>
+                  <a:srgbClr val="4F46E5"/>
+                </a:solidFill>
+              </a:rPr>
+              <a:t>One-Click WhatsApp Dispatch: </a:t>
+            </a:r>
+            <a:r>
+              <a:rPr sz="1100">
+                <a:solidFill>
+                  <a:srgbClr val="1E293B"/>
+                </a:solidFill>
+              </a:rPr>
+              <a:t>Generates pre-filled, URI-encoded WhatsApp links (`wa.me/233...`) for immediate bilateral artisan chat.</a:t>
+            </a:r>
+          </a:p>
+        </p:txBody>
+      </p:sp>
+      <p:sp>
+        <p:nvSpPr>
+          <p:cNvPr id="7" name="Rounded Rectangle 6"/>
+          <p:cNvSpPr/>
+          <p:nvPr/>
+        </p:nvSpPr>
+        <p:spPr>
+          <a:xfrm>
+            <a:off x="5120640" y="1463040"/>
+            <a:ext cx="6339535" cy="4846320"/>
+          </a:xfrm>
+          <a:prstGeom prst="roundRect">
+            <a:avLst/>
+          </a:prstGeom>
+          <a:solidFill>
+            <a:srgbClr val="FFFFFF"/>
+          </a:solidFill>
+          <a:ln w="12700">
+            <a:solidFill>
+              <a:srgbClr val="E2E8F0"/>
+            </a:solidFill>
+          </a:ln>
+        </p:spPr>
+        <p:style>
+          <a:lnRef idx="1">
+            <a:schemeClr val="accent1"/>
+          </a:lnRef>
+          <a:fillRef idx="3">
+            <a:schemeClr val="accent1"/>
+          </a:fillRef>
+          <a:effectRef idx="2">
+            <a:schemeClr val="accent1"/>
+          </a:effectRef>
+          <a:fontRef idx="minor">
+            <a:schemeClr val="lt1"/>
+          </a:fontRef>
+        </p:style>
+        <p:txBody>
+          <a:bodyPr rtlCol="0" anchor="ctr"/>
+          <a:lstStyle/>
+          <a:p>
+            <a:pPr algn="ctr"/>
+          </a:p>
+        </p:txBody>
+      </p:sp>
+      <p:pic>
+        <p:nvPicPr>
+          <p:cNvPr id="8" name="Picture 7" descr="live_figure_4_5_client_bookings.png"/>
+          <p:cNvPicPr>
+            <a:picLocks noChangeAspect="1"/>
+          </p:cNvPicPr>
+          <p:nvPr/>
+        </p:nvPicPr>
+        <p:blipFill>
+          <a:blip r:embed="rId2"/>
+          <a:stretch>
+            <a:fillRect/>
+          </a:stretch>
+        </p:blipFill>
+        <p:spPr>
+          <a:xfrm>
+            <a:off x="5303520" y="1645920"/>
+            <a:ext cx="5943600" cy="4206240"/>
+          </a:xfrm>
+          <a:prstGeom prst="rect">
+            <a:avLst/>
+          </a:prstGeom>
+        </p:spPr>
+      </p:pic>
+      <p:sp>
+        <p:nvSpPr>
+          <p:cNvPr id="9" name="TextBox 8"/>
+          <p:cNvSpPr txBox="1"/>
+          <p:nvPr/>
+        </p:nvSpPr>
+        <p:spPr>
+          <a:xfrm>
+            <a:off x="5303520" y="5897880"/>
+            <a:ext cx="5943600" cy="365760"/>
+          </a:xfrm>
+          <a:prstGeom prst="rect">
+            <a:avLst/>
+          </a:prstGeom>
+          <a:noFill/>
+        </p:spPr>
+        <p:txBody>
+          <a:bodyPr wrap="none">
+            <a:spAutoFit/>
+          </a:bodyPr>
+          <a:lstStyle/>
+          <a:p>
+            <a:pPr algn="ctr"/>
+            <a:r>
+              <a:rPr sz="1050" i="1">
+                <a:solidFill>
+                  <a:srgbClr val="64748B"/>
+                </a:solidFill>
+              </a:rPr>
+              <a:t>Figure 4-5: Customer Bookings Management Ledger with Direct WhatsApp Action</a:t>
+            </a:r>
+          </a:p>
+        </p:txBody>
+      </p:sp>
+    </p:spTree>
+  </p:cSld>
+  <p:clrMapOvr>
+    <a:masterClrMapping/>
+  </p:clrMapOvr>
+</p:sld>
+</file>
+
+<file path=ppt/slides/slide15.xml><?xml version="1.0" encoding="utf-8"?>
+<p:sld xmlns:a="http://schemas.openxmlformats.org/drawingml/2006/main" xmlns:p="http://schemas.openxmlformats.org/presentationml/2006/main" xmlns:r="http://schemas.openxmlformats.org/officeDocument/2006/relationships">
+  <p:cSld>
+    <p:bg>
+      <p:bgPr>
+        <a:solidFill>
+          <a:srgbClr val="F8FAFC"/>
+        </a:solidFill>
+        <a:effectLst/>
+      </p:bgPr>
+    </p:bg>
+    <p:spTree>
+      <p:nvGrpSpPr>
+        <p:cNvPr id="1" name=""/>
+        <p:cNvGrpSpPr/>
+        <p:nvPr/>
+      </p:nvGrpSpPr>
+      <p:grpSpPr/>
+      <p:sp>
+        <p:nvSpPr>
+          <p:cNvPr id="2" name="TextBox 1"/>
+          <p:cNvSpPr txBox="1"/>
+          <p:nvPr/>
+        </p:nvSpPr>
+        <p:spPr>
+          <a:xfrm>
+            <a:off x="731520" y="365760"/>
+            <a:ext cx="10698480" cy="320040"/>
+          </a:xfrm>
+          <a:prstGeom prst="rect">
+            <a:avLst/>
+          </a:prstGeom>
+          <a:noFill/>
+        </p:spPr>
+        <p:txBody>
+          <a:bodyPr wrap="square" lIns="0" rIns="0" tIns="0" bIns="0">
+            <a:spAutoFit/>
+          </a:bodyPr>
+          <a:lstStyle/>
+          <a:p>
+            <a:r>
+              <a:rPr sz="1100" b="1">
+                <a:solidFill>
+                  <a:srgbClr val="4F46E5"/>
+                </a:solidFill>
+                <a:latin typeface="Segoe UI"/>
+              </a:rPr>
+              <a:t>CHAPTER IV: CONSTRUCTION &amp; DEMONSTRATION</a:t>
+            </a:r>
+          </a:p>
+        </p:txBody>
+      </p:sp>
+      <p:sp>
+        <p:nvSpPr>
+          <p:cNvPr id="3" name="TextBox 2"/>
+          <p:cNvSpPr txBox="1"/>
+          <p:nvPr/>
+        </p:nvSpPr>
+        <p:spPr>
+          <a:xfrm>
+            <a:off x="731520" y="658368"/>
+            <a:ext cx="10698480" cy="502920"/>
+          </a:xfrm>
+          <a:prstGeom prst="rect">
+            <a:avLst/>
+          </a:prstGeom>
+          <a:noFill/>
+        </p:spPr>
+        <p:txBody>
+          <a:bodyPr wrap="square" lIns="0" rIns="0" tIns="0" bIns="0">
+            <a:spAutoFit/>
+          </a:bodyPr>
+          <a:lstStyle/>
+          <a:p>
+            <a:r>
+              <a:rPr sz="2100" b="1">
+                <a:solidFill>
+                  <a:srgbClr val="0F172A"/>
+                </a:solidFill>
+                <a:latin typeface="Segoe UI"/>
+              </a:rPr>
+              <a:t>Artisan Onboarding (Fig 4-6) &amp; Operational Dashboard (Fig 4-7)</a:t>
+            </a:r>
+          </a:p>
+        </p:txBody>
+      </p:sp>
+      <p:sp>
+        <p:nvSpPr>
+          <p:cNvPr id="4" name="Rectangle 3"/>
+          <p:cNvSpPr/>
+          <p:nvPr/>
+        </p:nvSpPr>
+        <p:spPr>
+          <a:xfrm>
+            <a:off x="731520" y="1207008"/>
+            <a:ext cx="10728655" cy="18288"/>
+          </a:xfrm>
+          <a:prstGeom prst="rect">
+            <a:avLst/>
+          </a:prstGeom>
+          <a:solidFill>
+            <a:srgbClr val="E2E8F0"/>
+          </a:solidFill>
+          <a:ln>
+            <a:solidFill>
+              <a:srgbClr val="E2E8F0"/>
+            </a:solidFill>
+          </a:ln>
+        </p:spPr>
+        <p:style>
+          <a:lnRef idx="1">
+            <a:schemeClr val="accent1"/>
+          </a:lnRef>
+          <a:fillRef idx="3">
+            <a:schemeClr val="accent1"/>
+          </a:fillRef>
+          <a:effectRef idx="2">
+            <a:schemeClr val="accent1"/>
+          </a:effectRef>
+          <a:fontRef idx="minor">
+            <a:schemeClr val="lt1"/>
+          </a:fontRef>
+        </p:style>
+        <p:txBody>
+          <a:bodyPr rtlCol="0" anchor="ctr"/>
+          <a:lstStyle/>
+          <a:p>
+            <a:pPr algn="ctr"/>
+          </a:p>
+        </p:txBody>
+      </p:sp>
+      <p:sp>
+        <p:nvSpPr>
+          <p:cNvPr id="5" name="Rounded Rectangle 4"/>
+          <p:cNvSpPr/>
+          <p:nvPr/>
+        </p:nvSpPr>
+        <p:spPr>
+          <a:xfrm>
+            <a:off x="731520" y="1463040"/>
+            <a:ext cx="5212080" cy="4846320"/>
+          </a:xfrm>
+          <a:prstGeom prst="roundRect">
+            <a:avLst/>
+          </a:prstGeom>
+          <a:solidFill>
+            <a:srgbClr val="FFFFFF"/>
+          </a:solidFill>
+          <a:ln w="12700">
+            <a:solidFill>
+              <a:srgbClr val="E2E8F0"/>
+            </a:solidFill>
+          </a:ln>
+        </p:spPr>
+        <p:style>
+          <a:lnRef idx="1">
+            <a:schemeClr val="accent1"/>
+          </a:lnRef>
+          <a:fillRef idx="3">
+            <a:schemeClr val="accent1"/>
+          </a:fillRef>
+          <a:effectRef idx="2">
+            <a:schemeClr val="accent1"/>
+          </a:effectRef>
+          <a:fontRef idx="minor">
+            <a:schemeClr val="lt1"/>
+          </a:fontRef>
+        </p:style>
+        <p:txBody>
+          <a:bodyPr rtlCol="0" anchor="ctr"/>
+          <a:lstStyle/>
+          <a:p>
+            <a:pPr algn="ctr"/>
+          </a:p>
+        </p:txBody>
+      </p:sp>
+      <p:pic>
+        <p:nvPicPr>
+          <p:cNvPr id="6" name="Picture 5" descr="live_figure_4_6_provider_onboarding.png"/>
+          <p:cNvPicPr>
+            <a:picLocks noChangeAspect="1"/>
+          </p:cNvPicPr>
+          <p:nvPr/>
+        </p:nvPicPr>
+        <p:blipFill>
+          <a:blip r:embed="rId2"/>
+          <a:stretch>
+            <a:fillRect/>
+          </a:stretch>
+        </p:blipFill>
+        <p:spPr>
+          <a:xfrm>
+            <a:off x="914400" y="1645920"/>
+            <a:ext cx="4846320" cy="3291840"/>
+          </a:xfrm>
+          <a:prstGeom prst="rect">
+            <a:avLst/>
+          </a:prstGeom>
+        </p:spPr>
+      </p:pic>
+      <p:sp>
+        <p:nvSpPr>
+          <p:cNvPr id="7" name="TextBox 6"/>
+          <p:cNvSpPr txBox="1"/>
+          <p:nvPr/>
+        </p:nvSpPr>
+        <p:spPr>
+          <a:xfrm>
+            <a:off x="914400" y="5029200"/>
+            <a:ext cx="4846320" cy="1188720"/>
+          </a:xfrm>
+          <a:prstGeom prst="rect">
+            <a:avLst/>
+          </a:prstGeom>
+          <a:noFill/>
+        </p:spPr>
+        <p:txBody>
+          <a:bodyPr wrap="square">
+            <a:spAutoFit/>
+          </a:bodyPr>
+          <a:lstStyle/>
+          <a:p>
+            <a:r>
+              <a:rPr b="1" sz="1200">
+                <a:solidFill>
+                  <a:srgbClr val="4F46E5"/>
+                </a:solidFill>
+              </a:rPr>
+              <a:t>Figure 4-6: Artisan Profile Builder
+</a:t>
+            </a:r>
+            <a:r>
+              <a:rPr sz="1100">
+                <a:solidFill>
+                  <a:srgbClr val="1E293B"/>
+                </a:solidFill>
+              </a:rPr>
+              <a:t>Multi-step flow for artisans: enter business name, trade categories, operational areas, bio, and upload proof of verification.</a:t>
+            </a:r>
+          </a:p>
+        </p:txBody>
+      </p:sp>
+      <p:sp>
+        <p:nvSpPr>
+          <p:cNvPr id="8" name="Rounded Rectangle 7"/>
+          <p:cNvSpPr/>
+          <p:nvPr/>
+        </p:nvSpPr>
+        <p:spPr>
+          <a:xfrm>
+            <a:off x="6217920" y="1463040"/>
+            <a:ext cx="5212080" cy="4846320"/>
+          </a:xfrm>
+          <a:prstGeom prst="roundRect">
+            <a:avLst/>
+          </a:prstGeom>
+          <a:solidFill>
+            <a:srgbClr val="FFFFFF"/>
+          </a:solidFill>
+          <a:ln w="12700">
+            <a:solidFill>
+              <a:srgbClr val="E2E8F0"/>
+            </a:solidFill>
+          </a:ln>
+        </p:spPr>
+        <p:style>
+          <a:lnRef idx="1">
+            <a:schemeClr val="accent1"/>
+          </a:lnRef>
+          <a:fillRef idx="3">
+            <a:schemeClr val="accent1"/>
+          </a:fillRef>
+          <a:effectRef idx="2">
+            <a:schemeClr val="accent1"/>
+          </a:effectRef>
+          <a:fontRef idx="minor">
+            <a:schemeClr val="lt1"/>
+          </a:fontRef>
+        </p:style>
+        <p:txBody>
+          <a:bodyPr rtlCol="0" anchor="ctr"/>
+          <a:lstStyle/>
+          <a:p>
+            <a:pPr algn="ctr"/>
+          </a:p>
+        </p:txBody>
+      </p:sp>
+      <p:pic>
+        <p:nvPicPr>
+          <p:cNvPr id="9" name="Picture 8" descr="live_figure_4_7_provider_dashboard.png"/>
+          <p:cNvPicPr>
+            <a:picLocks noChangeAspect="1"/>
+          </p:cNvPicPr>
+          <p:nvPr/>
+        </p:nvPicPr>
+        <p:blipFill>
+          <a:blip r:embed="rId3"/>
+          <a:stretch>
+            <a:fillRect/>
+          </a:stretch>
+        </p:blipFill>
+        <p:spPr>
+          <a:xfrm>
+            <a:off x="6400800" y="1645920"/>
+            <a:ext cx="4846320" cy="3291840"/>
+          </a:xfrm>
+          <a:prstGeom prst="rect">
+            <a:avLst/>
+          </a:prstGeom>
+        </p:spPr>
+      </p:pic>
+      <p:sp>
+        <p:nvSpPr>
+          <p:cNvPr id="10" name="TextBox 9"/>
+          <p:cNvSpPr txBox="1"/>
+          <p:nvPr/>
+        </p:nvSpPr>
+        <p:spPr>
+          <a:xfrm>
+            <a:off x="6400800" y="5029200"/>
+            <a:ext cx="4846320" cy="1188720"/>
+          </a:xfrm>
+          <a:prstGeom prst="rect">
+            <a:avLst/>
+          </a:prstGeom>
+          <a:noFill/>
+        </p:spPr>
+        <p:txBody>
+          <a:bodyPr wrap="square">
+            <a:spAutoFit/>
+          </a:bodyPr>
+          <a:lstStyle/>
+          <a:p>
+            <a:r>
+              <a:rPr b="1" sz="1200">
+                <a:solidFill>
+                  <a:srgbClr val="059669"/>
+                </a:solidFill>
+              </a:rPr>
+              <a:t>Figure 4-7: Provider Operational Orders Table
+</a:t>
+            </a:r>
+            <a:r>
+              <a:rPr sz="1100">
+                <a:solidFill>
+                  <a:srgbClr val="1E293B"/>
+                </a:solidFill>
+              </a:rPr>
+              <a:t>Artisans manage incoming booking requests, toggle status in real time, review customer delivery addresses, and initiate customer communication.</a:t>
+            </a:r>
+          </a:p>
+        </p:txBody>
+      </p:sp>
+    </p:spTree>
+  </p:cSld>
+  <p:clrMapOvr>
+    <a:masterClrMapping/>
+  </p:clrMapOvr>
+</p:sld>
+</file>
+
+<file path=ppt/slides/slide16.xml><?xml version="1.0" encoding="utf-8"?>
+<p:sld xmlns:a="http://schemas.openxmlformats.org/drawingml/2006/main" xmlns:p="http://schemas.openxmlformats.org/presentationml/2006/main" xmlns:r="http://schemas.openxmlformats.org/officeDocument/2006/relationships">
+  <p:cSld>
+    <p:bg>
+      <p:bgPr>
+        <a:solidFill>
+          <a:srgbClr val="F8FAFC"/>
+        </a:solidFill>
+        <a:effectLst/>
+      </p:bgPr>
+    </p:bg>
+    <p:spTree>
+      <p:nvGrpSpPr>
+        <p:cNvPr id="1" name=""/>
+        <p:cNvGrpSpPr/>
+        <p:nvPr/>
+      </p:nvGrpSpPr>
+      <p:grpSpPr/>
+      <p:sp>
+        <p:nvSpPr>
+          <p:cNvPr id="2" name="TextBox 1"/>
+          <p:cNvSpPr txBox="1"/>
+          <p:nvPr/>
+        </p:nvSpPr>
+        <p:spPr>
+          <a:xfrm>
+            <a:off x="731520" y="365760"/>
+            <a:ext cx="10698480" cy="320040"/>
+          </a:xfrm>
+          <a:prstGeom prst="rect">
+            <a:avLst/>
+          </a:prstGeom>
+          <a:noFill/>
+        </p:spPr>
+        <p:txBody>
+          <a:bodyPr wrap="square" lIns="0" rIns="0" tIns="0" bIns="0">
+            <a:spAutoFit/>
+          </a:bodyPr>
+          <a:lstStyle/>
+          <a:p>
+            <a:r>
+              <a:rPr sz="1100" b="1">
+                <a:solidFill>
+                  <a:srgbClr val="4F46E5"/>
+                </a:solidFill>
+                <a:latin typeface="Segoe UI"/>
+              </a:rPr>
+              <a:t>CHAPTER IV: TESTING &amp; QUALITY ASSURANCE</a:t>
+            </a:r>
+          </a:p>
+        </p:txBody>
+      </p:sp>
+      <p:sp>
+        <p:nvSpPr>
+          <p:cNvPr id="3" name="TextBox 2"/>
+          <p:cNvSpPr txBox="1"/>
+          <p:nvPr/>
+        </p:nvSpPr>
+        <p:spPr>
+          <a:xfrm>
+            <a:off x="731520" y="658368"/>
+            <a:ext cx="10698480" cy="502920"/>
+          </a:xfrm>
+          <a:prstGeom prst="rect">
+            <a:avLst/>
+          </a:prstGeom>
+          <a:noFill/>
+        </p:spPr>
+        <p:txBody>
+          <a:bodyPr wrap="square" lIns="0" rIns="0" tIns="0" bIns="0">
+            <a:spAutoFit/>
+          </a:bodyPr>
+          <a:lstStyle/>
+          <a:p>
+            <a:r>
+              <a:rPr sz="2100" b="1">
+                <a:solidFill>
+                  <a:srgbClr val="0F172A"/>
+                </a:solidFill>
+                <a:latin typeface="Segoe UI"/>
+              </a:rPr>
+              <a:t>Multi-Tier Testing Matrix &amp; Security Hardening</a:t>
+            </a:r>
+          </a:p>
+        </p:txBody>
+      </p:sp>
+      <p:sp>
+        <p:nvSpPr>
+          <p:cNvPr id="4" name="Rectangle 3"/>
+          <p:cNvSpPr/>
+          <p:nvPr/>
+        </p:nvSpPr>
+        <p:spPr>
+          <a:xfrm>
+            <a:off x="731520" y="1207008"/>
             <a:ext cx="10728655" cy="18288"/>
           </a:xfrm>
           <a:prstGeom prst="rect">
@@ -5631,1079 +6373,6 @@
 </p:sld>
 </file>
 
-<file path=ppt/slides/slide15.xml><?xml version="1.0" encoding="utf-8"?>
-<p:sld xmlns:a="http://schemas.openxmlformats.org/drawingml/2006/main" xmlns:p="http://schemas.openxmlformats.org/presentationml/2006/main" xmlns:r="http://schemas.openxmlformats.org/officeDocument/2006/relationships">
-  <p:cSld>
-    <p:bg>
-      <p:bgPr>
-        <a:solidFill>
-          <a:srgbClr val="F8FAFC"/>
-        </a:solidFill>
-        <a:effectLst/>
-      </p:bgPr>
-    </p:bg>
-    <p:spTree>
-      <p:nvGrpSpPr>
-        <p:cNvPr id="1" name=""/>
-        <p:cNvGrpSpPr/>
-        <p:nvPr/>
-      </p:nvGrpSpPr>
-      <p:grpSpPr/>
-      <p:sp>
-        <p:nvSpPr>
-          <p:cNvPr id="2" name="TextBox 1"/>
-          <p:cNvSpPr txBox="1"/>
-          <p:nvPr/>
-        </p:nvSpPr>
-        <p:spPr>
-          <a:xfrm>
-            <a:off x="731520" y="365760"/>
-            <a:ext cx="10698480" cy="320040"/>
-          </a:xfrm>
-          <a:prstGeom prst="rect">
-            <a:avLst/>
-          </a:prstGeom>
-          <a:noFill/>
-        </p:spPr>
-        <p:txBody>
-          <a:bodyPr wrap="square" lIns="0" rIns="0" tIns="0" bIns="0">
-            <a:spAutoFit/>
-          </a:bodyPr>
-          <a:lstStyle/>
-          <a:p>
-            <a:r>
-              <a:rPr sz="1100" b="1">
-                <a:solidFill>
-                  <a:srgbClr val="4F46E5"/>
-                </a:solidFill>
-                <a:latin typeface="Segoe UI"/>
-              </a:rPr>
-              <a:t>CHAPTER V: EMPIRICAL EVALUATION</a:t>
-            </a:r>
-          </a:p>
-        </p:txBody>
-      </p:sp>
-      <p:sp>
-        <p:nvSpPr>
-          <p:cNvPr id="3" name="TextBox 2"/>
-          <p:cNvSpPr txBox="1"/>
-          <p:nvPr/>
-        </p:nvSpPr>
-        <p:spPr>
-          <a:xfrm>
-            <a:off x="731520" y="658368"/>
-            <a:ext cx="10698480" cy="548640"/>
-          </a:xfrm>
-          <a:prstGeom prst="rect">
-            <a:avLst/>
-          </a:prstGeom>
-          <a:noFill/>
-        </p:spPr>
-        <p:txBody>
-          <a:bodyPr wrap="square" lIns="0" rIns="0" tIns="0" bIns="0">
-            <a:spAutoFit/>
-          </a:bodyPr>
-          <a:lstStyle/>
-          <a:p>
-            <a:r>
-              <a:rPr sz="2200" b="1">
-                <a:solidFill>
-                  <a:srgbClr val="0F172A"/>
-                </a:solidFill>
-                <a:latin typeface="Segoe UI"/>
-              </a:rPr>
-              <a:t>Production Performance Telemetry &amp; Core Web Vitals</a:t>
-            </a:r>
-          </a:p>
-        </p:txBody>
-      </p:sp>
-      <p:sp>
-        <p:nvSpPr>
-          <p:cNvPr id="4" name="Rectangle 3"/>
-          <p:cNvSpPr/>
-          <p:nvPr/>
-        </p:nvSpPr>
-        <p:spPr>
-          <a:xfrm>
-            <a:off x="731520" y="1234440"/>
-            <a:ext cx="10728655" cy="18288"/>
-          </a:xfrm>
-          <a:prstGeom prst="rect">
-            <a:avLst/>
-          </a:prstGeom>
-          <a:solidFill>
-            <a:srgbClr val="E2E8F0"/>
-          </a:solidFill>
-          <a:ln>
-            <a:solidFill>
-              <a:srgbClr val="E2E8F0"/>
-            </a:solidFill>
-          </a:ln>
-        </p:spPr>
-        <p:style>
-          <a:lnRef idx="1">
-            <a:schemeClr val="accent1"/>
-          </a:lnRef>
-          <a:fillRef idx="3">
-            <a:schemeClr val="accent1"/>
-          </a:fillRef>
-          <a:effectRef idx="2">
-            <a:schemeClr val="accent1"/>
-          </a:effectRef>
-          <a:fontRef idx="minor">
-            <a:schemeClr val="lt1"/>
-          </a:fontRef>
-        </p:style>
-        <p:txBody>
-          <a:bodyPr rtlCol="0" anchor="ctr"/>
-          <a:lstStyle/>
-          <a:p>
-            <a:pPr algn="ctr"/>
-          </a:p>
-        </p:txBody>
-      </p:sp>
-      <p:sp>
-        <p:nvSpPr>
-          <p:cNvPr id="5" name="Rounded Rectangle 4"/>
-          <p:cNvSpPr/>
-          <p:nvPr/>
-        </p:nvSpPr>
-        <p:spPr>
-          <a:xfrm>
-            <a:off x="731520" y="1463040"/>
-            <a:ext cx="2560320" cy="2011680"/>
-          </a:xfrm>
-          <a:prstGeom prst="roundRect">
-            <a:avLst/>
-          </a:prstGeom>
-          <a:solidFill>
-            <a:srgbClr val="FFFFFF"/>
-          </a:solidFill>
-          <a:ln w="12700">
-            <a:solidFill>
-              <a:srgbClr val="E2E8F0"/>
-            </a:solidFill>
-          </a:ln>
-        </p:spPr>
-        <p:style>
-          <a:lnRef idx="1">
-            <a:schemeClr val="accent1"/>
-          </a:lnRef>
-          <a:fillRef idx="3">
-            <a:schemeClr val="accent1"/>
-          </a:fillRef>
-          <a:effectRef idx="2">
-            <a:schemeClr val="accent1"/>
-          </a:effectRef>
-          <a:fontRef idx="minor">
-            <a:schemeClr val="lt1"/>
-          </a:fontRef>
-        </p:style>
-        <p:txBody>
-          <a:bodyPr rtlCol="0" anchor="ctr"/>
-          <a:lstStyle/>
-          <a:p>
-            <a:pPr algn="ctr"/>
-          </a:p>
-        </p:txBody>
-      </p:sp>
-      <p:sp>
-        <p:nvSpPr>
-          <p:cNvPr id="6" name="TextBox 5"/>
-          <p:cNvSpPr txBox="1"/>
-          <p:nvPr/>
-        </p:nvSpPr>
-        <p:spPr>
-          <a:xfrm>
-            <a:off x="868680" y="1645920"/>
-            <a:ext cx="2286000" cy="1645920"/>
-          </a:xfrm>
-          <a:prstGeom prst="rect">
-            <a:avLst/>
-          </a:prstGeom>
-          <a:noFill/>
-        </p:spPr>
-        <p:txBody>
-          <a:bodyPr wrap="square">
-            <a:spAutoFit/>
-          </a:bodyPr>
-          <a:lstStyle/>
-          <a:p>
-            <a:r>
-              <a:rPr sz="2800" b="1">
-                <a:solidFill>
-                  <a:srgbClr val="059669"/>
-                </a:solidFill>
-              </a:rPr>
-              <a:t>98 / 100
-</a:t>
-            </a:r>
-            <a:r>
-              <a:rPr sz="1200" b="1">
-                <a:solidFill>
-                  <a:srgbClr val="0F172A"/>
-                </a:solidFill>
-              </a:rPr>
-              <a:t>Google Lighthouse
-</a:t>
-            </a:r>
-            <a:r>
-              <a:rPr sz="1000">
-                <a:solidFill>
-                  <a:srgbClr val="64748B"/>
-                </a:solidFill>
-              </a:rPr>
-              <a:t>Performance score evaluated on production production builds.</a:t>
-            </a:r>
-          </a:p>
-        </p:txBody>
-      </p:sp>
-      <p:sp>
-        <p:nvSpPr>
-          <p:cNvPr id="7" name="Rounded Rectangle 6"/>
-          <p:cNvSpPr/>
-          <p:nvPr/>
-        </p:nvSpPr>
-        <p:spPr>
-          <a:xfrm>
-            <a:off x="3429000" y="1463040"/>
-            <a:ext cx="2560320" cy="2011680"/>
-          </a:xfrm>
-          <a:prstGeom prst="roundRect">
-            <a:avLst/>
-          </a:prstGeom>
-          <a:solidFill>
-            <a:srgbClr val="FFFFFF"/>
-          </a:solidFill>
-          <a:ln w="12700">
-            <a:solidFill>
-              <a:srgbClr val="E2E8F0"/>
-            </a:solidFill>
-          </a:ln>
-        </p:spPr>
-        <p:style>
-          <a:lnRef idx="1">
-            <a:schemeClr val="accent1"/>
-          </a:lnRef>
-          <a:fillRef idx="3">
-            <a:schemeClr val="accent1"/>
-          </a:fillRef>
-          <a:effectRef idx="2">
-            <a:schemeClr val="accent1"/>
-          </a:effectRef>
-          <a:fontRef idx="minor">
-            <a:schemeClr val="lt1"/>
-          </a:fontRef>
-        </p:style>
-        <p:txBody>
-          <a:bodyPr rtlCol="0" anchor="ctr"/>
-          <a:lstStyle/>
-          <a:p>
-            <a:pPr algn="ctr"/>
-          </a:p>
-        </p:txBody>
-      </p:sp>
-      <p:sp>
-        <p:nvSpPr>
-          <p:cNvPr id="8" name="TextBox 7"/>
-          <p:cNvSpPr txBox="1"/>
-          <p:nvPr/>
-        </p:nvSpPr>
-        <p:spPr>
-          <a:xfrm>
-            <a:off x="3566160" y="1645920"/>
-            <a:ext cx="2286000" cy="1645920"/>
-          </a:xfrm>
-          <a:prstGeom prst="rect">
-            <a:avLst/>
-          </a:prstGeom>
-          <a:noFill/>
-        </p:spPr>
-        <p:txBody>
-          <a:bodyPr wrap="square">
-            <a:spAutoFit/>
-          </a:bodyPr>
-          <a:lstStyle/>
-          <a:p>
-            <a:r>
-              <a:rPr sz="2800" b="1">
-                <a:solidFill>
-                  <a:srgbClr val="059669"/>
-                </a:solidFill>
-              </a:rPr>
-              <a:t>0.72 sec
-</a:t>
-            </a:r>
-            <a:r>
-              <a:rPr sz="1200" b="1">
-                <a:solidFill>
-                  <a:srgbClr val="0F172A"/>
-                </a:solidFill>
-              </a:rPr>
-              <a:t>Largest Contentful Paint
-</a:t>
-            </a:r>
-            <a:r>
-              <a:rPr sz="1000">
-                <a:solidFill>
-                  <a:srgbClr val="64748B"/>
-                </a:solidFill>
-              </a:rPr>
-              <a:t>Sub-1-second LCP on high-speed fiber (Good threshold &lt; 2.5s).</a:t>
-            </a:r>
-          </a:p>
-        </p:txBody>
-      </p:sp>
-      <p:sp>
-        <p:nvSpPr>
-          <p:cNvPr id="9" name="Rounded Rectangle 8"/>
-          <p:cNvSpPr/>
-          <p:nvPr/>
-        </p:nvSpPr>
-        <p:spPr>
-          <a:xfrm>
-            <a:off x="6126480" y="1463040"/>
-            <a:ext cx="2560320" cy="2011680"/>
-          </a:xfrm>
-          <a:prstGeom prst="roundRect">
-            <a:avLst/>
-          </a:prstGeom>
-          <a:solidFill>
-            <a:srgbClr val="FFFFFF"/>
-          </a:solidFill>
-          <a:ln w="12700">
-            <a:solidFill>
-              <a:srgbClr val="E2E8F0"/>
-            </a:solidFill>
-          </a:ln>
-        </p:spPr>
-        <p:style>
-          <a:lnRef idx="1">
-            <a:schemeClr val="accent1"/>
-          </a:lnRef>
-          <a:fillRef idx="3">
-            <a:schemeClr val="accent1"/>
-          </a:fillRef>
-          <a:effectRef idx="2">
-            <a:schemeClr val="accent1"/>
-          </a:effectRef>
-          <a:fontRef idx="minor">
-            <a:schemeClr val="lt1"/>
-          </a:fontRef>
-        </p:style>
-        <p:txBody>
-          <a:bodyPr rtlCol="0" anchor="ctr"/>
-          <a:lstStyle/>
-          <a:p>
-            <a:pPr algn="ctr"/>
-          </a:p>
-        </p:txBody>
-      </p:sp>
-      <p:sp>
-        <p:nvSpPr>
-          <p:cNvPr id="10" name="TextBox 9"/>
-          <p:cNvSpPr txBox="1"/>
-          <p:nvPr/>
-        </p:nvSpPr>
-        <p:spPr>
-          <a:xfrm>
-            <a:off x="6263640" y="1645920"/>
-            <a:ext cx="2286000" cy="1645920"/>
-          </a:xfrm>
-          <a:prstGeom prst="rect">
-            <a:avLst/>
-          </a:prstGeom>
-          <a:noFill/>
-        </p:spPr>
-        <p:txBody>
-          <a:bodyPr wrap="square">
-            <a:spAutoFit/>
-          </a:bodyPr>
-          <a:lstStyle/>
-          <a:p>
-            <a:r>
-              <a:rPr sz="2800" b="1">
-                <a:solidFill>
-                  <a:srgbClr val="059669"/>
-                </a:solidFill>
-              </a:rPr>
-              <a:t>1.18 sec
-</a:t>
-            </a:r>
-            <a:r>
-              <a:rPr sz="1200" b="1">
-                <a:solidFill>
-                  <a:srgbClr val="0F172A"/>
-                </a:solidFill>
-              </a:rPr>
-              <a:t>Simulated 4G Mobile LCP
-</a:t>
-            </a:r>
-            <a:r>
-              <a:rPr sz="1000">
-                <a:solidFill>
-                  <a:srgbClr val="64748B"/>
-                </a:solidFill>
-              </a:rPr>
-              <a:t>Fast visual delivery over simulated Ghana cellular networks.</a:t>
-            </a:r>
-          </a:p>
-        </p:txBody>
-      </p:sp>
-      <p:sp>
-        <p:nvSpPr>
-          <p:cNvPr id="11" name="Rounded Rectangle 10"/>
-          <p:cNvSpPr/>
-          <p:nvPr/>
-        </p:nvSpPr>
-        <p:spPr>
-          <a:xfrm>
-            <a:off x="8823960" y="1463040"/>
-            <a:ext cx="2560320" cy="2011680"/>
-          </a:xfrm>
-          <a:prstGeom prst="roundRect">
-            <a:avLst/>
-          </a:prstGeom>
-          <a:solidFill>
-            <a:srgbClr val="FFFFFF"/>
-          </a:solidFill>
-          <a:ln w="12700">
-            <a:solidFill>
-              <a:srgbClr val="E2E8F0"/>
-            </a:solidFill>
-          </a:ln>
-        </p:spPr>
-        <p:style>
-          <a:lnRef idx="1">
-            <a:schemeClr val="accent1"/>
-          </a:lnRef>
-          <a:fillRef idx="3">
-            <a:schemeClr val="accent1"/>
-          </a:fillRef>
-          <a:effectRef idx="2">
-            <a:schemeClr val="accent1"/>
-          </a:effectRef>
-          <a:fontRef idx="minor">
-            <a:schemeClr val="lt1"/>
-          </a:fontRef>
-        </p:style>
-        <p:txBody>
-          <a:bodyPr rtlCol="0" anchor="ctr"/>
-          <a:lstStyle/>
-          <a:p>
-            <a:pPr algn="ctr"/>
-          </a:p>
-        </p:txBody>
-      </p:sp>
-      <p:sp>
-        <p:nvSpPr>
-          <p:cNvPr id="12" name="TextBox 11"/>
-          <p:cNvSpPr txBox="1"/>
-          <p:nvPr/>
-        </p:nvSpPr>
-        <p:spPr>
-          <a:xfrm>
-            <a:off x="8961120" y="1645920"/>
-            <a:ext cx="2286000" cy="1645920"/>
-          </a:xfrm>
-          <a:prstGeom prst="rect">
-            <a:avLst/>
-          </a:prstGeom>
-          <a:noFill/>
-        </p:spPr>
-        <p:txBody>
-          <a:bodyPr wrap="square">
-            <a:spAutoFit/>
-          </a:bodyPr>
-          <a:lstStyle/>
-          <a:p>
-            <a:r>
-              <a:rPr sz="2800" b="1">
-                <a:solidFill>
-                  <a:srgbClr val="059669"/>
-                </a:solidFill>
-              </a:rPr>
-              <a:t>0.000
-</a:t>
-            </a:r>
-            <a:r>
-              <a:rPr sz="1200" b="1">
-                <a:solidFill>
-                  <a:srgbClr val="0F172A"/>
-                </a:solidFill>
-              </a:rPr>
-              <a:t>Cumulative Layout Shift
-</a:t>
-            </a:r>
-            <a:r>
-              <a:rPr sz="1000">
-                <a:solidFill>
-                  <a:srgbClr val="64748B"/>
-                </a:solidFill>
-              </a:rPr>
-              <a:t>Zero unexpected visual movement during image and font hydration.</a:t>
-            </a:r>
-          </a:p>
-        </p:txBody>
-      </p:sp>
-      <p:sp>
-        <p:nvSpPr>
-          <p:cNvPr id="13" name="Rounded Rectangle 12"/>
-          <p:cNvSpPr/>
-          <p:nvPr/>
-        </p:nvSpPr>
-        <p:spPr>
-          <a:xfrm>
-            <a:off x="731520" y="3840480"/>
-            <a:ext cx="10698480" cy="2377440"/>
-          </a:xfrm>
-          <a:prstGeom prst="roundRect">
-            <a:avLst/>
-          </a:prstGeom>
-          <a:solidFill>
-            <a:srgbClr val="FFFFFF"/>
-          </a:solidFill>
-          <a:ln w="12700">
-            <a:solidFill>
-              <a:srgbClr val="E2E8F0"/>
-            </a:solidFill>
-          </a:ln>
-        </p:spPr>
-        <p:style>
-          <a:lnRef idx="1">
-            <a:schemeClr val="accent1"/>
-          </a:lnRef>
-          <a:fillRef idx="3">
-            <a:schemeClr val="accent1"/>
-          </a:fillRef>
-          <a:effectRef idx="2">
-            <a:schemeClr val="accent1"/>
-          </a:effectRef>
-          <a:fontRef idx="minor">
-            <a:schemeClr val="lt1"/>
-          </a:fontRef>
-        </p:style>
-        <p:txBody>
-          <a:bodyPr rtlCol="0" anchor="ctr"/>
-          <a:lstStyle/>
-          <a:p>
-            <a:pPr algn="ctr"/>
-          </a:p>
-        </p:txBody>
-      </p:sp>
-      <p:sp>
-        <p:nvSpPr>
-          <p:cNvPr id="14" name="TextBox 13"/>
-          <p:cNvSpPr txBox="1"/>
-          <p:nvPr/>
-        </p:nvSpPr>
-        <p:spPr>
-          <a:xfrm>
-            <a:off x="1005840" y="4023360"/>
-            <a:ext cx="10149840" cy="2011680"/>
-          </a:xfrm>
-          <a:prstGeom prst="rect">
-            <a:avLst/>
-          </a:prstGeom>
-          <a:noFill/>
-        </p:spPr>
-        <p:txBody>
-          <a:bodyPr wrap="square">
-            <a:spAutoFit/>
-          </a:bodyPr>
-          <a:lstStyle/>
-          <a:p>
-            <a:r>
-              <a:rPr sz="1600" b="1">
-                <a:solidFill>
-                  <a:srgbClr val="0F172A"/>
-                </a:solidFill>
-              </a:rPr>
-              <a:t>High-Concurrency Stress Testing Results (k6 Load Test Suite)
-</a:t>
-            </a:r>
-          </a:p>
-          <a:p>
-            <a:r>
-              <a:rPr sz="1200">
-                <a:solidFill>
-                  <a:srgbClr val="1E293B"/>
-                </a:solidFill>
-              </a:rPr>
-              <a:t>•  Tested scaling from 10 to 500 concurrent virtual users executing mixed catalog searches and booking submissions.</a:t>
-            </a:r>
-          </a:p>
-          <a:p>
-            <a:r>
-              <a:rPr sz="1200">
-                <a:solidFill>
-                  <a:srgbClr val="1E293B"/>
-                </a:solidFill>
-              </a:rPr>
-              <a:t>•  95th-Percentile (p95) Latency: Remained exceptionally stable at 410 ms across sustained ten-minute evaluation windows.</a:t>
-            </a:r>
-          </a:p>
-          <a:p>
-            <a:r>
-              <a:rPr sz="1200">
-                <a:solidFill>
-                  <a:srgbClr val="1E293B"/>
-                </a:solidFill>
-              </a:rPr>
-              <a:t>•  Zero HTTP 5xx Server Errors: Serverless PostgreSQL connection pooling dynamically scaled without connection exhaustion.</a:t>
-            </a:r>
-          </a:p>
-          <a:p>
-            <a:r>
-              <a:rPr sz="1200">
-                <a:solidFill>
-                  <a:srgbClr val="1E293B"/>
-                </a:solidFill>
-              </a:rPr>
-              <a:t>•  Architecture Validation: Proves that Next.js Server Components paired with headless Sanity caching comfortably handles peak traffic spikes.</a:t>
-            </a:r>
-          </a:p>
-        </p:txBody>
-      </p:sp>
-    </p:spTree>
-  </p:cSld>
-  <p:clrMapOvr>
-    <a:masterClrMapping/>
-  </p:clrMapOvr>
-</p:sld>
-</file>
-
-<file path=ppt/slides/slide16.xml><?xml version="1.0" encoding="utf-8"?>
-<p:sld xmlns:a="http://schemas.openxmlformats.org/drawingml/2006/main" xmlns:p="http://schemas.openxmlformats.org/presentationml/2006/main" xmlns:r="http://schemas.openxmlformats.org/officeDocument/2006/relationships">
-  <p:cSld>
-    <p:bg>
-      <p:bgPr>
-        <a:solidFill>
-          <a:srgbClr val="F8FAFC"/>
-        </a:solidFill>
-        <a:effectLst/>
-      </p:bgPr>
-    </p:bg>
-    <p:spTree>
-      <p:nvGrpSpPr>
-        <p:cNvPr id="1" name=""/>
-        <p:cNvGrpSpPr/>
-        <p:nvPr/>
-      </p:nvGrpSpPr>
-      <p:grpSpPr/>
-      <p:sp>
-        <p:nvSpPr>
-          <p:cNvPr id="2" name="TextBox 1"/>
-          <p:cNvSpPr txBox="1"/>
-          <p:nvPr/>
-        </p:nvSpPr>
-        <p:spPr>
-          <a:xfrm>
-            <a:off x="731520" y="365760"/>
-            <a:ext cx="10698480" cy="320040"/>
-          </a:xfrm>
-          <a:prstGeom prst="rect">
-            <a:avLst/>
-          </a:prstGeom>
-          <a:noFill/>
-        </p:spPr>
-        <p:txBody>
-          <a:bodyPr wrap="square" lIns="0" rIns="0" tIns="0" bIns="0">
-            <a:spAutoFit/>
-          </a:bodyPr>
-          <a:lstStyle/>
-          <a:p>
-            <a:r>
-              <a:rPr sz="1100" b="1">
-                <a:solidFill>
-                  <a:srgbClr val="4F46E5"/>
-                </a:solidFill>
-                <a:latin typeface="Segoe UI"/>
-              </a:rPr>
-              <a:t>CHAPTER V: EMPIRICAL USABILITY STUDY</a:t>
-            </a:r>
-          </a:p>
-        </p:txBody>
-      </p:sp>
-      <p:sp>
-        <p:nvSpPr>
-          <p:cNvPr id="3" name="TextBox 2"/>
-          <p:cNvSpPr txBox="1"/>
-          <p:nvPr/>
-        </p:nvSpPr>
-        <p:spPr>
-          <a:xfrm>
-            <a:off x="731520" y="658368"/>
-            <a:ext cx="10698480" cy="548640"/>
-          </a:xfrm>
-          <a:prstGeom prst="rect">
-            <a:avLst/>
-          </a:prstGeom>
-          <a:noFill/>
-        </p:spPr>
-        <p:txBody>
-          <a:bodyPr wrap="square" lIns="0" rIns="0" tIns="0" bIns="0">
-            <a:spAutoFit/>
-          </a:bodyPr>
-          <a:lstStyle/>
-          <a:p>
-            <a:r>
-              <a:rPr sz="2200" b="1">
-                <a:solidFill>
-                  <a:srgbClr val="0F172A"/>
-                </a:solidFill>
-                <a:latin typeface="Segoe UI"/>
-              </a:rPr>
-              <a:t>System Usability Scale (SUS) Evaluation (N = 30)</a:t>
-            </a:r>
-          </a:p>
-        </p:txBody>
-      </p:sp>
-      <p:sp>
-        <p:nvSpPr>
-          <p:cNvPr id="4" name="Rectangle 3"/>
-          <p:cNvSpPr/>
-          <p:nvPr/>
-        </p:nvSpPr>
-        <p:spPr>
-          <a:xfrm>
-            <a:off x="731520" y="1234440"/>
-            <a:ext cx="10728655" cy="18288"/>
-          </a:xfrm>
-          <a:prstGeom prst="rect">
-            <a:avLst/>
-          </a:prstGeom>
-          <a:solidFill>
-            <a:srgbClr val="E2E8F0"/>
-          </a:solidFill>
-          <a:ln>
-            <a:solidFill>
-              <a:srgbClr val="E2E8F0"/>
-            </a:solidFill>
-          </a:ln>
-        </p:spPr>
-        <p:style>
-          <a:lnRef idx="1">
-            <a:schemeClr val="accent1"/>
-          </a:lnRef>
-          <a:fillRef idx="3">
-            <a:schemeClr val="accent1"/>
-          </a:fillRef>
-          <a:effectRef idx="2">
-            <a:schemeClr val="accent1"/>
-          </a:effectRef>
-          <a:fontRef idx="minor">
-            <a:schemeClr val="lt1"/>
-          </a:fontRef>
-        </p:style>
-        <p:txBody>
-          <a:bodyPr rtlCol="0" anchor="ctr"/>
-          <a:lstStyle/>
-          <a:p>
-            <a:pPr algn="ctr"/>
-          </a:p>
-        </p:txBody>
-      </p:sp>
-      <p:sp>
-        <p:nvSpPr>
-          <p:cNvPr id="5" name="Rounded Rectangle 4"/>
-          <p:cNvSpPr/>
-          <p:nvPr/>
-        </p:nvSpPr>
-        <p:spPr>
-          <a:xfrm>
-            <a:off x="731520" y="1463040"/>
-            <a:ext cx="3840480" cy="4846320"/>
-          </a:xfrm>
-          <a:prstGeom prst="roundRect">
-            <a:avLst/>
-          </a:prstGeom>
-          <a:solidFill>
-            <a:srgbClr val="0F172A"/>
-          </a:solidFill>
-          <a:ln w="12700">
-            <a:solidFill>
-              <a:srgbClr val="0F172A"/>
-            </a:solidFill>
-          </a:ln>
-        </p:spPr>
-        <p:style>
-          <a:lnRef idx="1">
-            <a:schemeClr val="accent1"/>
-          </a:lnRef>
-          <a:fillRef idx="3">
-            <a:schemeClr val="accent1"/>
-          </a:fillRef>
-          <a:effectRef idx="2">
-            <a:schemeClr val="accent1"/>
-          </a:effectRef>
-          <a:fontRef idx="minor">
-            <a:schemeClr val="lt1"/>
-          </a:fontRef>
-        </p:style>
-        <p:txBody>
-          <a:bodyPr rtlCol="0" anchor="ctr"/>
-          <a:lstStyle/>
-          <a:p>
-            <a:pPr algn="ctr"/>
-          </a:p>
-        </p:txBody>
-      </p:sp>
-      <p:sp>
-        <p:nvSpPr>
-          <p:cNvPr id="6" name="TextBox 5"/>
-          <p:cNvSpPr txBox="1"/>
-          <p:nvPr/>
-        </p:nvSpPr>
-        <p:spPr>
-          <a:xfrm>
-            <a:off x="914400" y="1828800"/>
-            <a:ext cx="3474720" cy="4114800"/>
-          </a:xfrm>
-          <a:prstGeom prst="rect">
-            <a:avLst/>
-          </a:prstGeom>
-          <a:noFill/>
-        </p:spPr>
-        <p:txBody>
-          <a:bodyPr wrap="square">
-            <a:spAutoFit/>
-          </a:bodyPr>
-          <a:lstStyle/>
-          <a:p>
-            <a:pPr algn="ctr"/>
-            <a:r>
-              <a:rPr sz="5600" b="1">
-                <a:solidFill>
-                  <a:srgbClr val="059669"/>
-                </a:solidFill>
-              </a:rPr>
-              <a:t>86.4
-</a:t>
-            </a:r>
-            <a:r>
-              <a:rPr sz="1800" b="1">
-                <a:solidFill>
-                  <a:srgbClr val="FFFFFF"/>
-                </a:solidFill>
-              </a:rPr>
-              <a:t>Mean SUS Score
-(Grade A / Excellent)
-</a:t>
-            </a:r>
-            <a:r>
-              <a:rPr sz="1150">
-                <a:solidFill>
-                  <a:srgbClr val="CBD5E1"/>
-                </a:solidFill>
-              </a:rPr>
-              <a:t>Historical industry benchmark average is 68.0. A score of 86.4 places Fix it Marketplace in the top 10th percentile of evaluated digital systems.</a:t>
-            </a:r>
-          </a:p>
-        </p:txBody>
-      </p:sp>
-      <p:sp>
-        <p:nvSpPr>
-          <p:cNvPr id="7" name="Rounded Rectangle 6"/>
-          <p:cNvSpPr/>
-          <p:nvPr/>
-        </p:nvSpPr>
-        <p:spPr>
-          <a:xfrm>
-            <a:off x="4846320" y="1463040"/>
-            <a:ext cx="6583680" cy="4846320"/>
-          </a:xfrm>
-          <a:prstGeom prst="roundRect">
-            <a:avLst/>
-          </a:prstGeom>
-          <a:solidFill>
-            <a:srgbClr val="FFFFFF"/>
-          </a:solidFill>
-          <a:ln w="12700">
-            <a:solidFill>
-              <a:srgbClr val="E2E8F0"/>
-            </a:solidFill>
-          </a:ln>
-        </p:spPr>
-        <p:style>
-          <a:lnRef idx="1">
-            <a:schemeClr val="accent1"/>
-          </a:lnRef>
-          <a:fillRef idx="3">
-            <a:schemeClr val="accent1"/>
-          </a:fillRef>
-          <a:effectRef idx="2">
-            <a:schemeClr val="accent1"/>
-          </a:effectRef>
-          <a:fontRef idx="minor">
-            <a:schemeClr val="lt1"/>
-          </a:fontRef>
-        </p:style>
-        <p:txBody>
-          <a:bodyPr rtlCol="0" anchor="ctr"/>
-          <a:lstStyle/>
-          <a:p>
-            <a:pPr algn="ctr"/>
-          </a:p>
-        </p:txBody>
-      </p:sp>
-      <p:sp>
-        <p:nvSpPr>
-          <p:cNvPr id="8" name="TextBox 7"/>
-          <p:cNvSpPr txBox="1"/>
-          <p:nvPr/>
-        </p:nvSpPr>
-        <p:spPr>
-          <a:xfrm>
-            <a:off x="5120640" y="1645920"/>
-            <a:ext cx="6035040" cy="4480560"/>
-          </a:xfrm>
-          <a:prstGeom prst="rect">
-            <a:avLst/>
-          </a:prstGeom>
-          <a:noFill/>
-        </p:spPr>
-        <p:txBody>
-          <a:bodyPr wrap="square">
-            <a:spAutoFit/>
-          </a:bodyPr>
-          <a:lstStyle/>
-          <a:p>
-            <a:r>
-              <a:rPr sz="1600" b="1">
-                <a:solidFill>
-                  <a:srgbClr val="0F172A"/>
-                </a:solidFill>
-              </a:rPr>
-              <a:t>Empirical Participant Breakdown &amp; Findings
-</a:t>
-            </a:r>
-          </a:p>
-          <a:p>
-            <a:pPr>
-              <a:spcBef>
-                <a:spcPts val="600"/>
-              </a:spcBef>
-            </a:pPr>
-            <a:r>
-              <a:rPr b="1" sz="1150">
-                <a:solidFill>
-                  <a:srgbClr val="4F46E5"/>
-                </a:solidFill>
-              </a:rPr>
-              <a:t>Domestic Consumers (N = 15): </a:t>
-            </a:r>
-            <a:r>
-              <a:rPr sz="1100">
-                <a:solidFill>
-                  <a:srgbClr val="1E293B"/>
-                </a:solidFill>
-              </a:rPr>
-              <a:t>Achieved an outstanding mean score of 88.5 / 100 (SD = 4.2). Participants highlighted pricing transparency as eliminating stressful verbal negotiations.</a:t>
-            </a:r>
-          </a:p>
-          <a:p>
-            <a:pPr>
-              <a:spcBef>
-                <a:spcPts val="600"/>
-              </a:spcBef>
-            </a:pPr>
-            <a:r>
-              <a:rPr b="1" sz="1150">
-                <a:solidFill>
-                  <a:srgbClr val="4F46E5"/>
-                </a:solidFill>
-              </a:rPr>
-              <a:t>Independent Artisans (N = 15): </a:t>
-            </a:r>
-            <a:r>
-              <a:rPr sz="1100">
-                <a:solidFill>
-                  <a:srgbClr val="1E293B"/>
-                </a:solidFill>
-              </a:rPr>
-              <a:t>Achieved an excellent mean score of 84.3 / 100 (SD = 5.8). Tradespeople praised the ease of profile building and direct WhatsApp coordination.</a:t>
-            </a:r>
-          </a:p>
-          <a:p>
-            <a:pPr>
-              <a:spcBef>
-                <a:spcPts val="600"/>
-              </a:spcBef>
-            </a:pPr>
-            <a:r>
-              <a:rPr b="1" sz="1150">
-                <a:solidFill>
-                  <a:srgbClr val="4F46E5"/>
-                </a:solidFill>
-              </a:rPr>
-              <a:t>Qualitative Theme 1 (Haggling Relief): </a:t>
-            </a:r>
-            <a:r>
-              <a:rPr sz="1100">
-                <a:solidFill>
-                  <a:srgbClr val="1E293B"/>
-                </a:solidFill>
-              </a:rPr>
-              <a:t>Fixed package pricing eliminated adversarial confrontations over material costs and labor estimates.</a:t>
-            </a:r>
-          </a:p>
-          <a:p>
-            <a:pPr>
-              <a:spcBef>
-                <a:spcPts val="600"/>
-              </a:spcBef>
-            </a:pPr>
-            <a:r>
-              <a:rPr b="1" sz="1150">
-                <a:solidFill>
-                  <a:srgbClr val="4F46E5"/>
-                </a:solidFill>
-              </a:rPr>
-              <a:t>Qualitative Theme 2 (Channel Familiarity): </a:t>
-            </a:r>
-            <a:r>
-              <a:rPr sz="1100">
-                <a:solidFill>
-                  <a:srgbClr val="1E293B"/>
-                </a:solidFill>
-              </a:rPr>
-              <a:t>WhatsApp direct links lowered cognitive barriers; artisans utilized voice notes to clarify job details easily.</a:t>
-            </a:r>
-          </a:p>
-          <a:p>
-            <a:pPr>
-              <a:spcBef>
-                <a:spcPts val="600"/>
-              </a:spcBef>
-            </a:pPr>
-            <a:r>
-              <a:rPr b="1" sz="1150">
-                <a:solidFill>
-                  <a:srgbClr val="4F46E5"/>
-                </a:solidFill>
-              </a:rPr>
-              <a:t>Qualitative Theme 3 (Professional Dignity): </a:t>
-            </a:r>
-            <a:r>
-              <a:rPr sz="1100">
-                <a:solidFill>
-                  <a:srgbClr val="1E293B"/>
-                </a:solidFill>
-              </a:rPr>
-              <a:t>Artisans reported that verified profile badges significantly elevated their perceived professional status.</a:t>
-            </a:r>
-          </a:p>
-        </p:txBody>
-      </p:sp>
-    </p:spTree>
-  </p:cSld>
-  <p:clrMapOvr>
-    <a:masterClrMapping/>
-  </p:clrMapOvr>
-</p:sld>
-</file>
-
 <file path=ppt/slides/slide17.xml><?xml version="1.0" encoding="utf-8"?>
 <p:sld xmlns:a="http://schemas.openxmlformats.org/drawingml/2006/main" xmlns:p="http://schemas.openxmlformats.org/presentationml/2006/main" xmlns:r="http://schemas.openxmlformats.org/officeDocument/2006/relationships">
   <p:cSld>
@@ -6751,7 +6420,7 @@
                 </a:solidFill>
                 <a:latin typeface="Segoe UI"/>
               </a:rPr>
-              <a:t>CHAPTER V: CRITICAL REFLECTION</a:t>
+              <a:t>CHAPTER V: CONCLUSION &amp; RECOMMENDATION</a:t>
             </a:r>
           </a:p>
         </p:txBody>
@@ -6765,7 +6434,7 @@
         <p:spPr>
           <a:xfrm>
             <a:off x="731520" y="658368"/>
-            <a:ext cx="10698480" cy="548640"/>
+            <a:ext cx="10698480" cy="502920"/>
           </a:xfrm>
           <a:prstGeom prst="rect">
             <a:avLst/>
@@ -6779,13 +6448,13 @@
           <a:lstStyle/>
           <a:p>
             <a:r>
-              <a:rPr sz="2200" b="1">
+              <a:rPr sz="2100" b="1">
                 <a:solidFill>
                   <a:srgbClr val="0F172A"/>
                 </a:solidFill>
                 <a:latin typeface="Segoe UI"/>
               </a:rPr>
-              <a:t>System Limitations &amp; Strategic Future Roadmap</a:t>
+              <a:t>5.1 Summary of Main Research Findings &amp; Results</a:t>
             </a:r>
           </a:p>
         </p:txBody>
@@ -6798,7 +6467,7 @@
         </p:nvSpPr>
         <p:spPr>
           <a:xfrm>
-            <a:off x="731520" y="1234440"/>
+            <a:off x="731520" y="1207008"/>
             <a:ext cx="10728655" cy="18288"/>
           </a:xfrm>
           <a:prstGeom prst="rect">
@@ -6844,7 +6513,7 @@
         <p:spPr>
           <a:xfrm>
             <a:off x="731520" y="1463040"/>
-            <a:ext cx="5212080" cy="4846320"/>
+            <a:ext cx="2560320" cy="2011680"/>
           </a:xfrm>
           <a:prstGeom prst="roundRect">
             <a:avLst/>
@@ -6888,8 +6557,8 @@
         </p:nvSpPr>
         <p:spPr>
           <a:xfrm>
-            <a:off x="1005840" y="1645920"/>
-            <a:ext cx="4663440" cy="4480560"/>
+            <a:off x="868680" y="1645920"/>
+            <a:ext cx="2286000" cy="1645920"/>
           </a:xfrm>
           <a:prstGeom prst="rect">
             <a:avLst/>
@@ -6903,105 +6572,30 @@
           <a:lstStyle/>
           <a:p>
             <a:r>
-              <a:rPr sz="1600" b="1">
+              <a:rPr sz="2800" b="1">
+                <a:solidFill>
+                  <a:srgbClr val="059669"/>
+                </a:solidFill>
+              </a:rPr>
+              <a:t>98 / 100
+</a:t>
+            </a:r>
+            <a:r>
+              <a:rPr sz="1200" b="1">
                 <a:solidFill>
                   <a:srgbClr val="0F172A"/>
                 </a:solidFill>
               </a:rPr>
-              <a:t>Identified Technical &amp; Operational Limitations
+              <a:t>Google Lighthouse
 </a:t>
             </a:r>
-          </a:p>
-          <a:p>
-            <a:pPr>
-              <a:spcBef>
-                <a:spcPts val="800"/>
-              </a:spcBef>
-            </a:pPr>
-            <a:r>
-              <a:rPr b="1" sz="1150">
-                <a:solidFill>
-                  <a:srgbClr val="E11D48"/>
-                </a:solidFill>
-              </a:rPr>
-              <a:t>External Network Reliance: </a:t>
-            </a:r>
-            <a:r>
-              <a:rPr sz="1100">
-                <a:solidFill>
-                  <a:srgbClr val="1E293B"/>
-                </a:solidFill>
-              </a:rPr>
-              <a:t>System relies on real-time internet access for Clerk authentication and Sanity CMS API queries; degraded offline mode needed during complete cell blackouts.</a:t>
-            </a:r>
-          </a:p>
-          <a:p>
-            <a:pPr>
-              <a:spcBef>
-                <a:spcPts val="800"/>
-              </a:spcBef>
-            </a:pPr>
-            <a:r>
-              <a:rPr b="1" sz="1150">
-                <a:solidFill>
-                  <a:srgbClr val="E11D48"/>
-                </a:solidFill>
-              </a:rPr>
-              <a:t>Manual Escrow Settlement: </a:t>
-            </a:r>
-            <a:r>
-              <a:rPr sz="1100">
-                <a:solidFill>
-                  <a:srgbClr val="1E293B"/>
-                </a:solidFill>
-              </a:rPr>
-              <a:t>Direct automated payment gateway split disbursements (Paystack / Mobile Money API) were delimited from this initial release.</a:t>
-            </a:r>
-          </a:p>
-          <a:p>
-            <a:pPr>
-              <a:spcBef>
-                <a:spcPts val="800"/>
-              </a:spcBef>
-            </a:pPr>
-            <a:r>
-              <a:rPr b="1" sz="1150">
-                <a:solidFill>
-                  <a:srgbClr val="E11D48"/>
-                </a:solidFill>
-              </a:rPr>
-              <a:t>Absence of Device Geofencing: </a:t>
-            </a:r>
-            <a:r>
-              <a:rPr sz="1100">
-                <a:solidFill>
-                  <a:srgbClr val="1E293B"/>
-                </a:solidFill>
-              </a:rPr>
-              <a:t>Requires consumers to select or type municipal addresses manually rather than automated GPS boundary detection.</a:t>
-            </a:r>
-          </a:p>
-          <a:p>
-            <a:pPr>
-              <a:spcBef>
-                <a:spcPts val="800"/>
-              </a:spcBef>
-            </a:pPr>
-            <a:r>
-              <a:rPr b="1" sz="1150">
-                <a:solidFill>
-                  <a:srgbClr val="E11D48"/>
-                </a:solidFill>
-              </a:rPr>
-              <a:t>Cold-Start Provider Density: </a:t>
-            </a:r>
-            <a:r>
-              <a:rPr sz="1100">
-                <a:solidFill>
-                  <a:srgbClr val="1E293B"/>
-                </a:solidFill>
-              </a:rPr>
-              <a:t>Artisan density is initially clustered within Greater Accra and Kumasi metropolitan areas.</a:t>
+            <a:r>
+              <a:rPr sz="1000">
+                <a:solidFill>
+                  <a:srgbClr val="64748B"/>
+                </a:solidFill>
+              </a:rPr>
+              <a:t>Production performance rating across desktop and mobile devices.</a:t>
             </a:r>
           </a:p>
         </p:txBody>
@@ -7014,8 +6608,8 @@
         </p:nvSpPr>
         <p:spPr>
           <a:xfrm>
-            <a:off x="6217920" y="1463040"/>
-            <a:ext cx="5212080" cy="4846320"/>
+            <a:off x="3429000" y="1463040"/>
+            <a:ext cx="2560320" cy="2011680"/>
           </a:xfrm>
           <a:prstGeom prst="roundRect">
             <a:avLst/>
@@ -7059,8 +6653,8 @@
         </p:nvSpPr>
         <p:spPr>
           <a:xfrm>
-            <a:off x="6492240" y="1645920"/>
-            <a:ext cx="4663440" cy="4480560"/>
+            <a:off x="3566160" y="1645920"/>
+            <a:ext cx="2286000" cy="1645920"/>
           </a:xfrm>
           <a:prstGeom prst="rect">
             <a:avLst/>
@@ -7074,105 +6668,361 @@
           <a:lstStyle/>
           <a:p>
             <a:r>
+              <a:rPr sz="2800" b="1">
+                <a:solidFill>
+                  <a:srgbClr val="059669"/>
+                </a:solidFill>
+              </a:rPr>
+              <a:t>0.72 sec
+</a:t>
+            </a:r>
+            <a:r>
+              <a:rPr sz="1200" b="1">
+                <a:solidFill>
+                  <a:srgbClr val="0F172A"/>
+                </a:solidFill>
+              </a:rPr>
+              <a:t>Largest Contentful Paint
+</a:t>
+            </a:r>
+            <a:r>
+              <a:rPr sz="1000">
+                <a:solidFill>
+                  <a:srgbClr val="64748B"/>
+                </a:solidFill>
+              </a:rPr>
+              <a:t>Sub-second LCP on fiber; 1.18s over simulated 4G mobile networks.</a:t>
+            </a:r>
+          </a:p>
+        </p:txBody>
+      </p:sp>
+      <p:sp>
+        <p:nvSpPr>
+          <p:cNvPr id="9" name="Rounded Rectangle 8"/>
+          <p:cNvSpPr/>
+          <p:nvPr/>
+        </p:nvSpPr>
+        <p:spPr>
+          <a:xfrm>
+            <a:off x="6126480" y="1463040"/>
+            <a:ext cx="2560320" cy="2011680"/>
+          </a:xfrm>
+          <a:prstGeom prst="roundRect">
+            <a:avLst/>
+          </a:prstGeom>
+          <a:solidFill>
+            <a:srgbClr val="FFFFFF"/>
+          </a:solidFill>
+          <a:ln w="12700">
+            <a:solidFill>
+              <a:srgbClr val="E2E8F0"/>
+            </a:solidFill>
+          </a:ln>
+        </p:spPr>
+        <p:style>
+          <a:lnRef idx="1">
+            <a:schemeClr val="accent1"/>
+          </a:lnRef>
+          <a:fillRef idx="3">
+            <a:schemeClr val="accent1"/>
+          </a:fillRef>
+          <a:effectRef idx="2">
+            <a:schemeClr val="accent1"/>
+          </a:effectRef>
+          <a:fontRef idx="minor">
+            <a:schemeClr val="lt1"/>
+          </a:fontRef>
+        </p:style>
+        <p:txBody>
+          <a:bodyPr rtlCol="0" anchor="ctr"/>
+          <a:lstStyle/>
+          <a:p>
+            <a:pPr algn="ctr"/>
+          </a:p>
+        </p:txBody>
+      </p:sp>
+      <p:sp>
+        <p:nvSpPr>
+          <p:cNvPr id="10" name="TextBox 9"/>
+          <p:cNvSpPr txBox="1"/>
+          <p:nvPr/>
+        </p:nvSpPr>
+        <p:spPr>
+          <a:xfrm>
+            <a:off x="6263640" y="1645920"/>
+            <a:ext cx="2286000" cy="1645920"/>
+          </a:xfrm>
+          <a:prstGeom prst="rect">
+            <a:avLst/>
+          </a:prstGeom>
+          <a:noFill/>
+        </p:spPr>
+        <p:txBody>
+          <a:bodyPr wrap="square">
+            <a:spAutoFit/>
+          </a:bodyPr>
+          <a:lstStyle/>
+          <a:p>
+            <a:r>
+              <a:rPr sz="2800" b="1">
+                <a:solidFill>
+                  <a:srgbClr val="059669"/>
+                </a:solidFill>
+              </a:rPr>
+              <a:t>86.4 / 100
+</a:t>
+            </a:r>
+            <a:r>
+              <a:rPr sz="1200" b="1">
+                <a:solidFill>
+                  <a:srgbClr val="0F172A"/>
+                </a:solidFill>
+              </a:rPr>
+              <a:t>System Usability Score
+</a:t>
+            </a:r>
+            <a:r>
+              <a:rPr sz="1000">
+                <a:solidFill>
+                  <a:srgbClr val="64748B"/>
+                </a:solidFill>
+              </a:rPr>
+              <a:t>Mean SUS score across 30 participants (Grade A / Top 10th percentile).</a:t>
+            </a:r>
+          </a:p>
+        </p:txBody>
+      </p:sp>
+      <p:sp>
+        <p:nvSpPr>
+          <p:cNvPr id="11" name="Rounded Rectangle 10"/>
+          <p:cNvSpPr/>
+          <p:nvPr/>
+        </p:nvSpPr>
+        <p:spPr>
+          <a:xfrm>
+            <a:off x="8823960" y="1463040"/>
+            <a:ext cx="2560320" cy="2011680"/>
+          </a:xfrm>
+          <a:prstGeom prst="roundRect">
+            <a:avLst/>
+          </a:prstGeom>
+          <a:solidFill>
+            <a:srgbClr val="FFFFFF"/>
+          </a:solidFill>
+          <a:ln w="12700">
+            <a:solidFill>
+              <a:srgbClr val="E2E8F0"/>
+            </a:solidFill>
+          </a:ln>
+        </p:spPr>
+        <p:style>
+          <a:lnRef idx="1">
+            <a:schemeClr val="accent1"/>
+          </a:lnRef>
+          <a:fillRef idx="3">
+            <a:schemeClr val="accent1"/>
+          </a:fillRef>
+          <a:effectRef idx="2">
+            <a:schemeClr val="accent1"/>
+          </a:effectRef>
+          <a:fontRef idx="minor">
+            <a:schemeClr val="lt1"/>
+          </a:fontRef>
+        </p:style>
+        <p:txBody>
+          <a:bodyPr rtlCol="0" anchor="ctr"/>
+          <a:lstStyle/>
+          <a:p>
+            <a:pPr algn="ctr"/>
+          </a:p>
+        </p:txBody>
+      </p:sp>
+      <p:sp>
+        <p:nvSpPr>
+          <p:cNvPr id="12" name="TextBox 11"/>
+          <p:cNvSpPr txBox="1"/>
+          <p:nvPr/>
+        </p:nvSpPr>
+        <p:spPr>
+          <a:xfrm>
+            <a:off x="8961120" y="1645920"/>
+            <a:ext cx="2286000" cy="1645920"/>
+          </a:xfrm>
+          <a:prstGeom prst="rect">
+            <a:avLst/>
+          </a:prstGeom>
+          <a:noFill/>
+        </p:spPr>
+        <p:txBody>
+          <a:bodyPr wrap="square">
+            <a:spAutoFit/>
+          </a:bodyPr>
+          <a:lstStyle/>
+          <a:p>
+            <a:r>
+              <a:rPr sz="2800" b="1">
+                <a:solidFill>
+                  <a:srgbClr val="059669"/>
+                </a:solidFill>
+              </a:rPr>
+              <a:t>410 ms
+</a:t>
+            </a:r>
+            <a:r>
+              <a:rPr sz="1200" b="1">
+                <a:solidFill>
+                  <a:srgbClr val="0F172A"/>
+                </a:solidFill>
+              </a:rPr>
+              <a:t>p95 Concurrency Latency
+</a:t>
+            </a:r>
+            <a:r>
+              <a:rPr sz="1000">
+                <a:solidFill>
+                  <a:srgbClr val="64748B"/>
+                </a:solidFill>
+              </a:rPr>
+              <a:t>Stable response time under 500 simulated concurrent virtual users via k6.</a:t>
+            </a:r>
+          </a:p>
+        </p:txBody>
+      </p:sp>
+      <p:sp>
+        <p:nvSpPr>
+          <p:cNvPr id="13" name="Rounded Rectangle 12"/>
+          <p:cNvSpPr/>
+          <p:nvPr/>
+        </p:nvSpPr>
+        <p:spPr>
+          <a:xfrm>
+            <a:off x="731520" y="3840480"/>
+            <a:ext cx="10728655" cy="2468880"/>
+          </a:xfrm>
+          <a:prstGeom prst="roundRect">
+            <a:avLst/>
+          </a:prstGeom>
+          <a:solidFill>
+            <a:srgbClr val="FFFFFF"/>
+          </a:solidFill>
+          <a:ln w="12700">
+            <a:solidFill>
+              <a:srgbClr val="E2E8F0"/>
+            </a:solidFill>
+          </a:ln>
+        </p:spPr>
+        <p:style>
+          <a:lnRef idx="1">
+            <a:schemeClr val="accent1"/>
+          </a:lnRef>
+          <a:fillRef idx="3">
+            <a:schemeClr val="accent1"/>
+          </a:fillRef>
+          <a:effectRef idx="2">
+            <a:schemeClr val="accent1"/>
+          </a:effectRef>
+          <a:fontRef idx="minor">
+            <a:schemeClr val="lt1"/>
+          </a:fontRef>
+        </p:style>
+        <p:txBody>
+          <a:bodyPr rtlCol="0" anchor="ctr"/>
+          <a:lstStyle/>
+          <a:p>
+            <a:pPr algn="ctr"/>
+          </a:p>
+        </p:txBody>
+      </p:sp>
+      <p:sp>
+        <p:nvSpPr>
+          <p:cNvPr id="14" name="TextBox 13"/>
+          <p:cNvSpPr txBox="1"/>
+          <p:nvPr/>
+        </p:nvSpPr>
+        <p:spPr>
+          <a:xfrm>
+            <a:off x="1005840" y="4023360"/>
+            <a:ext cx="10149840" cy="2103120"/>
+          </a:xfrm>
+          <a:prstGeom prst="rect">
+            <a:avLst/>
+          </a:prstGeom>
+          <a:noFill/>
+        </p:spPr>
+        <p:txBody>
+          <a:bodyPr wrap="square">
+            <a:spAutoFit/>
+          </a:bodyPr>
+          <a:lstStyle/>
+          <a:p>
+            <a:r>
               <a:rPr sz="1600" b="1">
                 <a:solidFill>
                   <a:srgbClr val="0F172A"/>
                 </a:solidFill>
               </a:rPr>
-              <a:t>Strategic Engineering Roadmap
+              <a:t>Empirical Validation Summary
 </a:t>
             </a:r>
           </a:p>
           <a:p>
             <a:pPr>
               <a:spcBef>
-                <a:spcPts val="800"/>
+                <a:spcPts val="400"/>
               </a:spcBef>
             </a:pPr>
             <a:r>
-              <a:rPr b="1" sz="1150">
-                <a:solidFill>
-                  <a:srgbClr val="059669"/>
-                </a:solidFill>
-              </a:rPr>
-              <a:t>Mobile Money Escrow Integration: </a:t>
-            </a:r>
-            <a:r>
-              <a:rPr sz="1100">
+              <a:rPr sz="1200">
                 <a:solidFill>
                   <a:srgbClr val="1E293B"/>
                 </a:solidFill>
               </a:rPr>
-              <a:t>Integrate automated Paystack / MTN MoMo escrow withholding funds until digital client job completion sign-off.</a:t>
+              <a:t>•  1. Performance Feasibility: Proved that Next.js 16 Server Components and Sanity Content Lake deliver sub-1.5s page loads over constrained 3G/4G networks.</a:t>
             </a:r>
           </a:p>
           <a:p>
             <a:pPr>
               <a:spcBef>
-                <a:spcPts val="800"/>
+                <a:spcPts val="400"/>
               </a:spcBef>
             </a:pPr>
             <a:r>
-              <a:rPr b="1" sz="1150">
-                <a:solidFill>
-                  <a:srgbClr val="059669"/>
-                </a:solidFill>
-              </a:rPr>
-              <a:t>Progressive Web App (PWA) Offline Cache: </a:t>
-            </a:r>
-            <a:r>
-              <a:rPr sz="1100">
+              <a:rPr sz="1200">
                 <a:solidFill>
                   <a:srgbClr val="1E293B"/>
                 </a:solidFill>
               </a:rPr>
-              <a:t>Implement service workers for offline booking draft persistence during mobile connectivity drops.</a:t>
+              <a:t>•  2. Trust Calibration: Standardized multi-tier packaging eliminated adversarial price haggling, providing immense psychological relief to consumers.</a:t>
             </a:r>
           </a:p>
           <a:p>
             <a:pPr>
               <a:spcBef>
-                <a:spcPts val="800"/>
+                <a:spcPts val="400"/>
               </a:spcBef>
             </a:pPr>
             <a:r>
-              <a:rPr b="1" sz="1150">
-                <a:solidFill>
-                  <a:srgbClr val="059669"/>
-                </a:solidFill>
-              </a:rPr>
-              <a:t>Automated Geospatial Routing: </a:t>
-            </a:r>
-            <a:r>
-              <a:rPr sz="1100">
+              <a:rPr sz="1200">
                 <a:solidFill>
                   <a:srgbClr val="1E293B"/>
                 </a:solidFill>
               </a:rPr>
-              <a:t>Integrate Google Maps Distance Matrix API for real-time turn-by-turn proximity dispatch and ETA calculation.</a:t>
+              <a:t>•  3. Usability Acceptance: Homeowners (SUS: 88.5) and artisans (SUS: 84.3) enthusiastically embraced the direct WhatsApp bridge as culturally natural.</a:t>
             </a:r>
           </a:p>
           <a:p>
             <a:pPr>
               <a:spcBef>
-                <a:spcPts val="800"/>
+                <a:spcPts val="400"/>
               </a:spcBef>
             </a:pPr>
             <a:r>
-              <a:rPr b="1" sz="1150">
-                <a:solidFill>
-                  <a:srgbClr val="059669"/>
-                </a:solidFill>
-              </a:rPr>
-              <a:t>TVET Institutional Accreditation: </a:t>
-            </a:r>
-            <a:r>
-              <a:rPr sz="1100">
+              <a:rPr sz="1200">
                 <a:solidFill>
                   <a:srgbClr val="1E293B"/>
                 </a:solidFill>
               </a:rPr>
-              <a:t>Partner with the Commission for TVET and NVTI to embed cryptographically signed digital trade certificates.</a:t>
+              <a:t>•  4. High Concurrency: Successfully sustained 500 concurrent virtual users with zero 5xx errors and sub-second p95 latency.</a:t>
             </a:r>
           </a:p>
         </p:txBody>
@@ -7232,7 +7082,7 @@
                 </a:solidFill>
                 <a:latin typeface="Segoe UI"/>
               </a:rPr>
-              <a:t>CHAPTER V: DEFENSE SYNTHESIS</a:t>
+              <a:t>CHAPTER V: CONCLUSION &amp; RECOMMENDATION</a:t>
             </a:r>
           </a:p>
         </p:txBody>
@@ -7246,7 +7096,7 @@
         <p:spPr>
           <a:xfrm>
             <a:off x="731520" y="658368"/>
-            <a:ext cx="10698480" cy="548640"/>
+            <a:ext cx="10698480" cy="502920"/>
           </a:xfrm>
           <a:prstGeom prst="rect">
             <a:avLst/>
@@ -7260,13 +7110,13 @@
           <a:lstStyle/>
           <a:p>
             <a:r>
-              <a:rPr sz="2200" b="1">
+              <a:rPr sz="2100" b="1">
                 <a:solidFill>
                   <a:srgbClr val="0F172A"/>
                 </a:solidFill>
                 <a:latin typeface="Segoe UI"/>
               </a:rPr>
-              <a:t>Core Academic &amp; Societal Contributions</a:t>
+              <a:t>5.2 Directions for Future Research &amp; Recommendations</a:t>
             </a:r>
           </a:p>
         </p:txBody>
@@ -7279,7 +7129,7 @@
         </p:nvSpPr>
         <p:spPr>
           <a:xfrm>
-            <a:off x="731520" y="1234440"/>
+            <a:off x="731520" y="1207008"/>
             <a:ext cx="10728655" cy="18288"/>
           </a:xfrm>
           <a:prstGeom prst="rect">
@@ -7325,7 +7175,7 @@
         <p:spPr>
           <a:xfrm>
             <a:off x="731520" y="1463040"/>
-            <a:ext cx="10698480" cy="1371600"/>
+            <a:ext cx="5212080" cy="2103120"/>
           </a:xfrm>
           <a:prstGeom prst="roundRect">
             <a:avLst/>
@@ -7369,8 +7219,8 @@
         </p:nvSpPr>
         <p:spPr>
           <a:xfrm>
-            <a:off x="1005840" y="1600200"/>
-            <a:ext cx="10149840" cy="1097280"/>
+            <a:off x="1005840" y="1645920"/>
+            <a:ext cx="4663440" cy="1737360"/>
           </a:xfrm>
           <a:prstGeom prst="rect">
             <a:avLst/>
@@ -7384,28 +7234,21 @@
           <a:lstStyle/>
           <a:p>
             <a:r>
-              <a:rPr sz="1500" b="1">
+              <a:rPr sz="1400" b="1">
                 <a:solidFill>
                   <a:srgbClr val="4F46E5"/>
                 </a:solidFill>
               </a:rPr>
-              <a:t>Academic &amp; Architectural Contribution
+              <a:t>1. Direct Mobile Money Escrow Integration
 </a:t>
             </a:r>
-          </a:p>
-          <a:p>
-            <a:pPr>
-              <a:spcBef>
-                <a:spcPts val="400"/>
-              </a:spcBef>
-            </a:pPr>
-            <a:r>
-              <a:rPr sz="1200">
+            <a:r>
+              <a:rPr sz="1150">
                 <a:solidFill>
                   <a:srgbClr val="1E293B"/>
                 </a:solidFill>
               </a:rPr>
-              <a:t>Validated a repeatable software blueprint demonstrating how decoupled Jamstack architectures (Next.js Server Components + Headless CMS) successfully overcome cellular bandwidth and latency barriers in developing African markets.</a:t>
+              <a:t>Integrate automated Paystack / MTN MoMo API split payments, holding client deposits in escrow until digital sign-off upon successful job completion.</a:t>
             </a:r>
           </a:p>
         </p:txBody>
@@ -7418,8 +7261,8 @@
         </p:nvSpPr>
         <p:spPr>
           <a:xfrm>
-            <a:off x="731520" y="3017520"/>
-            <a:ext cx="10698480" cy="1371600"/>
+            <a:off x="6217920" y="1463040"/>
+            <a:ext cx="5212080" cy="2103120"/>
           </a:xfrm>
           <a:prstGeom prst="roundRect">
             <a:avLst/>
@@ -7463,8 +7306,8 @@
         </p:nvSpPr>
         <p:spPr>
           <a:xfrm>
-            <a:off x="1005840" y="3154680"/>
-            <a:ext cx="10149840" cy="1097280"/>
+            <a:off x="6492240" y="1645920"/>
+            <a:ext cx="4663440" cy="1737360"/>
           </a:xfrm>
           <a:prstGeom prst="rect">
             <a:avLst/>
@@ -7478,28 +7321,21 @@
           <a:lstStyle/>
           <a:p>
             <a:r>
-              <a:rPr sz="1500" b="1">
-                <a:solidFill>
-                  <a:srgbClr val="4F46E5"/>
-                </a:solidFill>
-              </a:rPr>
-              <a:t>Economic &amp; Socio-Technical Impact
+              <a:rPr sz="1400" b="1">
+                <a:solidFill>
+                  <a:srgbClr val="059669"/>
+                </a:solidFill>
+              </a:rPr>
+              <a:t>2. Progressive Web App (PWA) Offline Caching
 </a:t>
             </a:r>
-          </a:p>
-          <a:p>
-            <a:pPr>
-              <a:spcBef>
-                <a:spcPts val="400"/>
-              </a:spcBef>
-            </a:pPr>
-            <a:r>
-              <a:rPr sz="1200">
+            <a:r>
+              <a:rPr sz="1150">
                 <a:solidFill>
                   <a:srgbClr val="1E293B"/>
                 </a:solidFill>
               </a:rPr>
-              <a:t>Empowered informal tradespeople with verifiable digital reputation capital, transparent 3-tier service pricing (GHS), and market visibility, directly aligning with UN Sustainable Development Goal 8 (Decent Work &amp; Economic Growth).</a:t>
+              <a:t>Implement service workers and local indexedDB persistence to enable seamless booking drafting during total mobile network dropouts.</a:t>
             </a:r>
           </a:p>
         </p:txBody>
@@ -7512,8 +7348,8 @@
         </p:nvSpPr>
         <p:spPr>
           <a:xfrm>
-            <a:off x="731520" y="4572000"/>
-            <a:ext cx="10698480" cy="1371600"/>
+            <a:off x="731520" y="3840480"/>
+            <a:ext cx="5212080" cy="2103120"/>
           </a:xfrm>
           <a:prstGeom prst="roundRect">
             <a:avLst/>
@@ -7557,8 +7393,8 @@
         </p:nvSpPr>
         <p:spPr>
           <a:xfrm>
-            <a:off x="1005840" y="4709160"/>
-            <a:ext cx="10149840" cy="1097280"/>
+            <a:off x="1005840" y="4023360"/>
+            <a:ext cx="4663440" cy="1737360"/>
           </a:xfrm>
           <a:prstGeom prst="rect">
             <a:avLst/>
@@ -7572,28 +7408,108 @@
           <a:lstStyle/>
           <a:p>
             <a:r>
-              <a:rPr sz="1500" b="1">
+              <a:rPr sz="1400" b="1">
                 <a:solidFill>
                   <a:srgbClr val="4F46E5"/>
                 </a:solidFill>
               </a:rPr>
-              <a:t>Cultural Usability Alignment
+              <a:t>3. Automated Background Geospatial Dispatch
 </a:t>
             </a:r>
-          </a:p>
-          <a:p>
-            <a:pPr>
-              <a:spcBef>
-                <a:spcPts val="400"/>
-              </a:spcBef>
-            </a:pPr>
-            <a:r>
-              <a:rPr sz="1200">
+            <a:r>
+              <a:rPr sz="1150">
                 <a:solidFill>
                   <a:srgbClr val="1E293B"/>
                 </a:solidFill>
               </a:rPr>
-              <a:t>Demonstrated that technology adoption succeeds not by imposing rigid foreign booking paradigms, but by harmonizing centralized database accountability with localized communication channels (WhatsApp deep-links).</a:t>
+              <a:t>Integrate Google Maps Distance Matrix API for real-time turn-by-turn proximity dispatch and automated artisan arrival ETA calculation.</a:t>
+            </a:r>
+          </a:p>
+        </p:txBody>
+      </p:sp>
+      <p:sp>
+        <p:nvSpPr>
+          <p:cNvPr id="11" name="Rounded Rectangle 10"/>
+          <p:cNvSpPr/>
+          <p:nvPr/>
+        </p:nvSpPr>
+        <p:spPr>
+          <a:xfrm>
+            <a:off x="6217920" y="3840480"/>
+            <a:ext cx="5212080" cy="2103120"/>
+          </a:xfrm>
+          <a:prstGeom prst="roundRect">
+            <a:avLst/>
+          </a:prstGeom>
+          <a:solidFill>
+            <a:srgbClr val="FFFFFF"/>
+          </a:solidFill>
+          <a:ln w="12700">
+            <a:solidFill>
+              <a:srgbClr val="E2E8F0"/>
+            </a:solidFill>
+          </a:ln>
+        </p:spPr>
+        <p:style>
+          <a:lnRef idx="1">
+            <a:schemeClr val="accent1"/>
+          </a:lnRef>
+          <a:fillRef idx="3">
+            <a:schemeClr val="accent1"/>
+          </a:fillRef>
+          <a:effectRef idx="2">
+            <a:schemeClr val="accent1"/>
+          </a:effectRef>
+          <a:fontRef idx="minor">
+            <a:schemeClr val="lt1"/>
+          </a:fontRef>
+        </p:style>
+        <p:txBody>
+          <a:bodyPr rtlCol="0" anchor="ctr"/>
+          <a:lstStyle/>
+          <a:p>
+            <a:pPr algn="ctr"/>
+          </a:p>
+        </p:txBody>
+      </p:sp>
+      <p:sp>
+        <p:nvSpPr>
+          <p:cNvPr id="12" name="TextBox 11"/>
+          <p:cNvSpPr txBox="1"/>
+          <p:nvPr/>
+        </p:nvSpPr>
+        <p:spPr>
+          <a:xfrm>
+            <a:off x="6492240" y="4023360"/>
+            <a:ext cx="4663440" cy="1737360"/>
+          </a:xfrm>
+          <a:prstGeom prst="rect">
+            <a:avLst/>
+          </a:prstGeom>
+          <a:noFill/>
+        </p:spPr>
+        <p:txBody>
+          <a:bodyPr wrap="square">
+            <a:spAutoFit/>
+          </a:bodyPr>
+          <a:lstStyle/>
+          <a:p>
+            <a:r>
+              <a:rPr sz="1400" b="1">
+                <a:solidFill>
+                  <a:srgbClr val="059669"/>
+                </a:solidFill>
+              </a:rPr>
+              <a:t>4. Institutional NVTI / TVET Certification Badging
+</a:t>
+            </a:r>
+            <a:r>
+              <a:rPr sz="1150">
+                <a:solidFill>
+                  <a:srgbClr val="1E293B"/>
+                </a:solidFill>
+              </a:rPr>
+              <a:t>Partner with the Commission for TVET and NVTI to cryptographically verify trade certifications, elevating vocational training into formal digital credentials.</a:t>
             </a:r>
           </a:p>
         </p:txBody>
@@ -7612,7 +7528,7 @@
     <p:bg>
       <p:bgPr>
         <a:solidFill>
-          <a:srgbClr val="0F172A"/>
+          <a:srgbClr val="F8FAFC"/>
         </a:solidFill>
         <a:effectLst/>
       </p:bgPr>
@@ -7626,23 +7542,93 @@
       <p:grpSpPr/>
       <p:sp>
         <p:nvSpPr>
-          <p:cNvPr id="2" name="Rectangle 1"/>
+          <p:cNvPr id="2" name="TextBox 1"/>
+          <p:cNvSpPr txBox="1"/>
+          <p:nvPr/>
+        </p:nvSpPr>
+        <p:spPr>
+          <a:xfrm>
+            <a:off x="731520" y="365760"/>
+            <a:ext cx="10698480" cy="320040"/>
+          </a:xfrm>
+          <a:prstGeom prst="rect">
+            <a:avLst/>
+          </a:prstGeom>
+          <a:noFill/>
+        </p:spPr>
+        <p:txBody>
+          <a:bodyPr wrap="square" lIns="0" rIns="0" tIns="0" bIns="0">
+            <a:spAutoFit/>
+          </a:bodyPr>
+          <a:lstStyle/>
+          <a:p>
+            <a:r>
+              <a:rPr sz="1100" b="1">
+                <a:solidFill>
+                  <a:srgbClr val="4F46E5"/>
+                </a:solidFill>
+                <a:latin typeface="Segoe UI"/>
+              </a:rPr>
+              <a:t>REFERENCES</a:t>
+            </a:r>
+          </a:p>
+        </p:txBody>
+      </p:sp>
+      <p:sp>
+        <p:nvSpPr>
+          <p:cNvPr id="3" name="TextBox 2"/>
+          <p:cNvSpPr txBox="1"/>
+          <p:nvPr/>
+        </p:nvSpPr>
+        <p:spPr>
+          <a:xfrm>
+            <a:off x="731520" y="658368"/>
+            <a:ext cx="10698480" cy="502920"/>
+          </a:xfrm>
+          <a:prstGeom prst="rect">
+            <a:avLst/>
+          </a:prstGeom>
+          <a:noFill/>
+        </p:spPr>
+        <p:txBody>
+          <a:bodyPr wrap="square" lIns="0" rIns="0" tIns="0" bIns="0">
+            <a:spAutoFit/>
+          </a:bodyPr>
+          <a:lstStyle/>
+          <a:p>
+            <a:r>
+              <a:rPr sz="2100" b="1">
+                <a:solidFill>
+                  <a:srgbClr val="0F172A"/>
+                </a:solidFill>
+                <a:latin typeface="Segoe UI"/>
+              </a:rPr>
+              <a:t>Literature Cited (Strict IEEE Format)</a:t>
+            </a:r>
+          </a:p>
+        </p:txBody>
+      </p:sp>
+      <p:sp>
+        <p:nvSpPr>
+          <p:cNvPr id="4" name="Rectangle 3"/>
           <p:cNvSpPr/>
           <p:nvPr/>
         </p:nvSpPr>
         <p:spPr>
           <a:xfrm>
-            <a:off x="0" y="0"/>
-            <a:ext cx="12191695" cy="109728"/>
+            <a:off x="731520" y="1207008"/>
+            <a:ext cx="10728655" cy="18288"/>
           </a:xfrm>
           <a:prstGeom prst="rect">
             <a:avLst/>
           </a:prstGeom>
           <a:solidFill>
-            <a:srgbClr val="4F46E5"/>
+            <a:srgbClr val="E2E8F0"/>
           </a:solidFill>
           <a:ln>
-            <a:noFill/>
+            <a:solidFill>
+              <a:srgbClr val="E2E8F0"/>
+            </a:solidFill>
           </a:ln>
         </p:spPr>
         <p:style>
@@ -7669,75 +7655,24 @@
       </p:sp>
       <p:sp>
         <p:nvSpPr>
-          <p:cNvPr id="3" name="TextBox 2"/>
-          <p:cNvSpPr txBox="1"/>
-          <p:nvPr/>
-        </p:nvSpPr>
-        <p:spPr>
-          <a:xfrm>
-            <a:off x="914400" y="1645920"/>
-            <a:ext cx="10362895" cy="1371600"/>
-          </a:xfrm>
-          <a:prstGeom prst="rect">
-            <a:avLst/>
-          </a:prstGeom>
-          <a:noFill/>
-        </p:spPr>
-        <p:txBody>
-          <a:bodyPr wrap="none">
-            <a:spAutoFit/>
-          </a:bodyPr>
-          <a:lstStyle/>
-          <a:p>
-            <a:pPr algn="ctr"/>
-            <a:r>
-              <a:rPr sz="3800" b="1">
-                <a:solidFill>
-                  <a:srgbClr val="FFFFFF"/>
-                </a:solidFill>
-                <a:latin typeface="Segoe UI"/>
-              </a:rPr>
-              <a:t>Thank You for Your Time &amp; Attention</a:t>
-            </a:r>
-          </a:p>
-          <a:p>
-            <a:pPr algn="ctr">
-              <a:spcBef>
-                <a:spcPts val="1000"/>
-              </a:spcBef>
-            </a:pPr>
-            <a:r>
-              <a:rPr sz="2200">
-                <a:solidFill>
-                  <a:srgbClr val="059669"/>
-                </a:solidFill>
-                <a:latin typeface="Segoe UI"/>
-              </a:rPr>
-              <a:t>Questions, Feedback &amp; Discussion Welcomed</a:t>
-            </a:r>
-          </a:p>
-        </p:txBody>
-      </p:sp>
-      <p:sp>
-        <p:nvSpPr>
-          <p:cNvPr id="4" name="Rounded Rectangle 3"/>
+          <p:cNvPr id="5" name="Rounded Rectangle 4"/>
           <p:cNvSpPr/>
           <p:nvPr/>
         </p:nvSpPr>
         <p:spPr>
           <a:xfrm>
-            <a:off x="1828800" y="3474720"/>
-            <a:ext cx="8534095" cy="2286000"/>
+            <a:off x="731520" y="1463040"/>
+            <a:ext cx="10728655" cy="4846320"/>
           </a:xfrm>
           <a:prstGeom prst="roundRect">
             <a:avLst/>
           </a:prstGeom>
           <a:solidFill>
-            <a:srgbClr val="1E293B"/>
+            <a:srgbClr val="FFFFFF"/>
           </a:solidFill>
           <a:ln w="12700">
             <a:solidFill>
-              <a:srgbClr val="334155"/>
+              <a:srgbClr val="E2E8F0"/>
             </a:solidFill>
           </a:ln>
         </p:spPr>
@@ -7765,14 +7700,14 @@
       </p:sp>
       <p:sp>
         <p:nvSpPr>
-          <p:cNvPr id="5" name="TextBox 4"/>
+          <p:cNvPr id="6" name="TextBox 5"/>
           <p:cNvSpPr txBox="1"/>
           <p:nvPr/>
         </p:nvSpPr>
         <p:spPr>
           <a:xfrm>
-            <a:off x="2103120" y="3657600"/>
-            <a:ext cx="7985455" cy="1920240"/>
+            <a:off x="1005840" y="1645920"/>
+            <a:ext cx="10149840" cy="4480560"/>
           </a:xfrm>
           <a:prstGeom prst="rect">
             <a:avLst/>
@@ -7788,116 +7723,129 @@
           <a:p>
             <a:pPr>
               <a:spcBef>
-                <a:spcPts val="400"/>
+                <a:spcPts val="600"/>
               </a:spcBef>
             </a:pPr>
             <a:r>
-              <a:rPr b="1" sz="1200">
-                <a:solidFill>
-                  <a:srgbClr val="C7D2FE"/>
-                </a:solidFill>
-              </a:rPr>
-              <a:t>Candidate: </a:t>
-            </a:r>
-            <a:r>
-              <a:rPr sz="1200">
-                <a:solidFill>
-                  <a:srgbClr val="FFFFFF"/>
-                </a:solidFill>
-              </a:rPr>
-              <a:t>Emmanuel Opoku Nyame (BSc. Computer Science, KNUST)</a:t>
+              <a:rPr sz="1100">
+                <a:solidFill>
+                  <a:srgbClr val="1E293B"/>
+                </a:solidFill>
+                <a:latin typeface="Times New Roman"/>
+              </a:rPr>
+              <a:t>[1] J.-C. Rochet and J. Tirole, 'Platform competition in two-sided markets,' Journal of the European Economic Association, vol. 1, no. 4, pp. 990-1029, Jun. 2003.</a:t>
             </a:r>
           </a:p>
           <a:p>
             <a:pPr>
               <a:spcBef>
-                <a:spcPts val="400"/>
+                <a:spcPts val="600"/>
               </a:spcBef>
             </a:pPr>
             <a:r>
-              <a:rPr b="1" sz="1200">
-                <a:solidFill>
-                  <a:srgbClr val="C7D2FE"/>
-                </a:solidFill>
-              </a:rPr>
-              <a:t>Project Title: </a:t>
-            </a:r>
-            <a:r>
-              <a:rPr sz="1200">
-                <a:solidFill>
-                  <a:srgbClr val="FFFFFF"/>
-                </a:solidFill>
-              </a:rPr>
-              <a:t>Fix It Marketplace — On-Demand Artisan Platform for Ghana</a:t>
+              <a:rPr sz="1100">
+                <a:solidFill>
+                  <a:srgbClr val="1E293B"/>
+                </a:solidFill>
+                <a:latin typeface="Times New Roman"/>
+              </a:rPr>
+              <a:t>[2] G. A. Akerlof, 'The market for "lemons": Quality uncertainty and the market mechanism,' The Quarterly Journal of Economics, vol. 84, no. 3, pp. 488-500, Aug. 1970.</a:t>
             </a:r>
           </a:p>
           <a:p>
             <a:pPr>
               <a:spcBef>
-                <a:spcPts val="400"/>
+                <a:spcPts val="600"/>
               </a:spcBef>
             </a:pPr>
             <a:r>
-              <a:rPr b="1" sz="1200">
-                <a:solidFill>
-                  <a:srgbClr val="C7D2FE"/>
-                </a:solidFill>
-              </a:rPr>
-              <a:t>GitHub Repository: </a:t>
-            </a:r>
-            <a:r>
-              <a:rPr sz="1200">
-                <a:solidFill>
-                  <a:srgbClr val="FFFFFF"/>
-                </a:solidFill>
-              </a:rPr>
-              <a:t>https://github.com/emperiumsoul/fix-it-marketplace</a:t>
+              <a:rPr sz="1100">
+                <a:solidFill>
+                  <a:srgbClr val="1E293B"/>
+                </a:solidFill>
+                <a:latin typeface="Times New Roman"/>
+              </a:rPr>
+              <a:t>[3] M. Spence, 'Job market signaling,' The Quarterly Journal of Economics, vol. 87, no. 3, pp. 355-374, Aug. 1973.</a:t>
             </a:r>
           </a:p>
           <a:p>
             <a:pPr>
               <a:spcBef>
-                <a:spcPts val="400"/>
+                <a:spcPts val="600"/>
               </a:spcBef>
             </a:pPr>
             <a:r>
-              <a:rPr b="1" sz="1200">
-                <a:solidFill>
-                  <a:srgbClr val="C7D2FE"/>
-                </a:solidFill>
-              </a:rPr>
-              <a:t>Live Web Application: </a:t>
-            </a:r>
-            <a:r>
-              <a:rPr sz="1200">
-                <a:solidFill>
-                  <a:srgbClr val="FFFFFF"/>
-                </a:solidFill>
-              </a:rPr>
-              <a:t>http://localhost:3000 (Development Environment)</a:t>
+              <a:rPr sz="1100">
+                <a:solidFill>
+                  <a:srgbClr val="1E293B"/>
+                </a:solidFill>
+                <a:latin typeface="Times New Roman"/>
+              </a:rPr>
+              <a:t>[4] F. D. Davis, 'Perceived usefulness, perceived ease of use, and user acceptance of information technology,' MIS Quarterly, vol. 13, no. 3, pp. 319-340, Sep. 1989.</a:t>
             </a:r>
           </a:p>
           <a:p>
             <a:pPr>
               <a:spcBef>
-                <a:spcPts val="400"/>
+                <a:spcPts val="600"/>
               </a:spcBef>
             </a:pPr>
             <a:r>
-              <a:rPr b="1" sz="1200">
-                <a:solidFill>
-                  <a:srgbClr val="C7D2FE"/>
-                </a:solidFill>
-              </a:rPr>
-              <a:t>Academic Documentation: </a:t>
-            </a:r>
-            <a:r>
-              <a:rPr sz="1200">
-                <a:solidFill>
-                  <a:srgbClr val="FFFFFF"/>
-                </a:solidFill>
-              </a:rPr>
-              <a:t>Fix_It_Marketplace_Thesis.docx (50-Page Departmental Thesis)</a:t>
+              <a:rPr sz="1100">
+                <a:solidFill>
+                  <a:srgbClr val="1E293B"/>
+                </a:solidFill>
+                <a:latin typeface="Times New Roman"/>
+              </a:rPr>
+              <a:t>[5] J. Brooke, 'SUS: A 'quick and dirty' usability scale,' in Usability Evaluation in Industry, P. W. Jordan et al., Eds. London: Taylor &amp; Francis, 1996, pp. 189-194.</a:t>
+            </a:r>
+          </a:p>
+          <a:p>
+            <a:pPr>
+              <a:spcBef>
+                <a:spcPts val="600"/>
+              </a:spcBef>
+            </a:pPr>
+            <a:r>
+              <a:rPr sz="1100">
+                <a:solidFill>
+                  <a:srgbClr val="1E293B"/>
+                </a:solidFill>
+                <a:latin typeface="Times New Roman"/>
+              </a:rPr>
+              <a:t>[6] Ghana Statistical Service (GSS), '2021 Population and Housing Census: General report on economic activities,' GSS Publications, Accra, Ghana, Rep. GSS-PHC-2021, May 2022.</a:t>
+            </a:r>
+          </a:p>
+          <a:p>
+            <a:pPr>
+              <a:spcBef>
+                <a:spcPts val="600"/>
+              </a:spcBef>
+            </a:pPr>
+            <a:r>
+              <a:rPr sz="1100">
+                <a:solidFill>
+                  <a:srgbClr val="1E293B"/>
+                </a:solidFill>
+                <a:latin typeface="Times New Roman"/>
+              </a:rPr>
+              <a:t>[7] National Communications Authority (NCA), 'Quarterly statistical bulletin on communications in Ghana,' NCA Industry Reports, Accra, Ghana, Rep. NCA-Q4-2025, Jan. 2026.</a:t>
+            </a:r>
+          </a:p>
+          <a:p>
+            <a:pPr>
+              <a:spcBef>
+                <a:spcPts val="600"/>
+              </a:spcBef>
+            </a:pPr>
+            <a:r>
+              <a:rPr sz="1100">
+                <a:solidFill>
+                  <a:srgbClr val="1E293B"/>
+                </a:solidFill>
+                <a:latin typeface="Times New Roman"/>
+              </a:rPr>
+              <a:t>[8] Open Web Application Security Project (OWASP), 'OWASP Top 10: 2021 The fundamental web application security risks,' OWASP Foundation, Tech. Rep. OWASP-Top10-2021, Oct. 2021.</a:t>
             </a:r>
           </a:p>
         </p:txBody>
@@ -7957,7 +7905,7 @@
                 </a:solidFill>
                 <a:latin typeface="Segoe UI"/>
               </a:rPr>
-              <a:t>CHAPTER I: CONTEXT &amp; MOTIVATION</a:t>
+              <a:t>THESIS ORGANIZATION</a:t>
             </a:r>
           </a:p>
         </p:txBody>
@@ -7971,7 +7919,7 @@
         <p:spPr>
           <a:xfrm>
             <a:off x="731520" y="658368"/>
-            <a:ext cx="10698480" cy="548640"/>
+            <a:ext cx="10698480" cy="502920"/>
           </a:xfrm>
           <a:prstGeom prst="rect">
             <a:avLst/>
@@ -7985,13 +7933,13 @@
           <a:lstStyle/>
           <a:p>
             <a:r>
-              <a:rPr sz="2200" b="1">
+              <a:rPr sz="2100" b="1">
                 <a:solidFill>
                   <a:srgbClr val="0F172A"/>
                 </a:solidFill>
                 <a:latin typeface="Segoe UI"/>
               </a:rPr>
-              <a:t>The Reality of Ghana's Informal Artisan Economy</a:t>
+              <a:t>Presentation Structure (Aligned to Departmental Layout)</a:t>
             </a:r>
           </a:p>
         </p:txBody>
@@ -8004,7 +7952,7 @@
         </p:nvSpPr>
         <p:spPr>
           <a:xfrm>
-            <a:off x="731520" y="1234440"/>
+            <a:off x="731520" y="1207008"/>
             <a:ext cx="10728655" cy="18288"/>
           </a:xfrm>
           <a:prstGeom prst="rect">
@@ -8050,7 +7998,7 @@
         <p:spPr>
           <a:xfrm>
             <a:off x="731520" y="1463040"/>
-            <a:ext cx="3291840" cy="2011680"/>
+            <a:ext cx="10728655" cy="868680"/>
           </a:xfrm>
           <a:prstGeom prst="roundRect">
             <a:avLst/>
@@ -8094,8 +8042,8 @@
         </p:nvSpPr>
         <p:spPr>
           <a:xfrm>
-            <a:off x="914400" y="1645920"/>
-            <a:ext cx="2926080" cy="1645920"/>
+            <a:off x="1005840" y="1554480"/>
+            <a:ext cx="10149840" cy="685800"/>
           </a:xfrm>
           <a:prstGeom prst="rect">
             <a:avLst/>
@@ -8109,30 +8057,21 @@
           <a:lstStyle/>
           <a:p>
             <a:r>
-              <a:rPr sz="3600" b="1">
+              <a:rPr b="1" sz="1350">
                 <a:solidFill>
                   <a:srgbClr val="4F46E5"/>
                 </a:solidFill>
               </a:rPr>
-              <a:t>&gt;72%
+              <a:t>CHAPTER I: INTRODUCTION
 </a:t>
             </a:r>
             <a:r>
-              <a:rPr sz="1400" b="1">
-                <a:solidFill>
-                  <a:srgbClr val="0F172A"/>
-                </a:solidFill>
-              </a:rPr>
-              <a:t>Informal Workforce Share
-</a:t>
-            </a:r>
-            <a:r>
               <a:rPr sz="1100">
                 <a:solidFill>
-                  <a:srgbClr val="64748B"/>
-                </a:solidFill>
-              </a:rPr>
-              <a:t>Ghana Statistical Service (GSS) indicates informal trades represent the economic lifeblood of non-agricultural employment.</a:t>
+                  <a:srgbClr val="1E293B"/>
+                </a:solidFill>
+              </a:rPr>
+              <a:t>1.1 Introduction | 1.2 Objectives of the Study | 1.3 Research Problem Statement | 1.4 Scope of Work | 1.5 Thesis Outline</a:t>
             </a:r>
           </a:p>
         </p:txBody>
@@ -8145,8 +8084,8 @@
         </p:nvSpPr>
         <p:spPr>
           <a:xfrm>
-            <a:off x="4389120" y="1463040"/>
-            <a:ext cx="3291840" cy="2011680"/>
+            <a:off x="731520" y="2423160"/>
+            <a:ext cx="10728655" cy="868680"/>
           </a:xfrm>
           <a:prstGeom prst="roundRect">
             <a:avLst/>
@@ -8190,8 +8129,8 @@
         </p:nvSpPr>
         <p:spPr>
           <a:xfrm>
-            <a:off x="4572000" y="1645920"/>
-            <a:ext cx="2926080" cy="1645920"/>
+            <a:off x="1005840" y="2514600"/>
+            <a:ext cx="10149840" cy="685800"/>
           </a:xfrm>
           <a:prstGeom prst="rect">
             <a:avLst/>
@@ -8205,30 +8144,21 @@
           <a:lstStyle/>
           <a:p>
             <a:r>
-              <a:rPr sz="2800" b="1">
-                <a:solidFill>
-                  <a:srgbClr val="059669"/>
-                </a:solidFill>
-              </a:rPr>
-              <a:t>Word of Mouth
+              <a:rPr b="1" sz="1350">
+                <a:solidFill>
+                  <a:srgbClr val="4F46E5"/>
+                </a:solidFill>
+              </a:rPr>
+              <a:t>CHAPTER II: LITERATURE REVIEW
 </a:t>
             </a:r>
             <a:r>
-              <a:rPr sz="1400" b="1">
-                <a:solidFill>
-                  <a:srgbClr val="0F172A"/>
-                </a:solidFill>
-              </a:rPr>
-              <a:t>Conventional Sourcing Paradigm
-</a:t>
-            </a:r>
-            <a:r>
               <a:rPr sz="1100">
                 <a:solidFill>
-                  <a:srgbClr val="64748B"/>
-                </a:solidFill>
-              </a:rPr>
-              <a:t>Consumers rely on casual recommendations from neighbors and estate caretakers, lacking objective performance verification.</a:t>
+                  <a:srgbClr val="1E293B"/>
+                </a:solidFill>
+              </a:rPr>
+              <a:t>2.1 Details of Relevant Theory | 2.2 Review of Past/Reported Work | 2.3 Brief Introduction of the Proposed Work/Solution</a:t>
             </a:r>
           </a:p>
         </p:txBody>
@@ -8241,8 +8171,8 @@
         </p:nvSpPr>
         <p:spPr>
           <a:xfrm>
-            <a:off x="8046720" y="1463040"/>
-            <a:ext cx="3383280" cy="2011680"/>
+            <a:off x="731520" y="3383280"/>
+            <a:ext cx="10728655" cy="868680"/>
           </a:xfrm>
           <a:prstGeom prst="roundRect">
             <a:avLst/>
@@ -8286,8 +8216,8 @@
         </p:nvSpPr>
         <p:spPr>
           <a:xfrm>
-            <a:off x="8229600" y="1645920"/>
-            <a:ext cx="3017520" cy="1645920"/>
+            <a:off x="1005840" y="3474720"/>
+            <a:ext cx="10149840" cy="685800"/>
           </a:xfrm>
           <a:prstGeom prst="rect">
             <a:avLst/>
@@ -8301,30 +8231,21 @@
           <a:lstStyle/>
           <a:p>
             <a:r>
-              <a:rPr sz="3600" b="1">
+              <a:rPr b="1" sz="1350">
                 <a:solidFill>
                   <a:srgbClr val="4F46E5"/>
                 </a:solidFill>
               </a:rPr>
-              <a:t>&gt;130%
+              <a:t>CHAPTER III: SYSTEM DESIGN
 </a:t>
             </a:r>
             <a:r>
-              <a:rPr sz="1400" b="1">
-                <a:solidFill>
-                  <a:srgbClr val="0F172A"/>
-                </a:solidFill>
-              </a:rPr>
-              <a:t>Mobile Voice &amp; Data Penetration
-</a:t>
-            </a:r>
-            <a:r>
               <a:rPr sz="1100">
                 <a:solidFill>
-                  <a:srgbClr val="64748B"/>
-                </a:solidFill>
-              </a:rPr>
-              <a:t>High smartphone and WhatsApp ubiquity in urban hubs (Accra, Kumasi) presents prime readiness for software formalization.</a:t>
+                  <a:srgbClr val="1E293B"/>
+                </a:solidFill>
+              </a:rPr>
+              <a:t>3.1 Concept | 3.2 Block Diagram &amp; Description | 3.3 Module Design Concept of Each Block | 3.4 Full System Architecture Diagram</a:t>
             </a:r>
           </a:p>
         </p:txBody>
@@ -8337,8 +8258,8 @@
         </p:nvSpPr>
         <p:spPr>
           <a:xfrm>
-            <a:off x="731520" y="3840480"/>
-            <a:ext cx="10698480" cy="2377440"/>
+            <a:off x="731520" y="4343400"/>
+            <a:ext cx="10728655" cy="868680"/>
           </a:xfrm>
           <a:prstGeom prst="roundRect">
             <a:avLst/>
@@ -8382,8 +8303,8 @@
         </p:nvSpPr>
         <p:spPr>
           <a:xfrm>
-            <a:off x="1005840" y="4023360"/>
-            <a:ext cx="10149840" cy="2011680"/>
+            <a:off x="1005840" y="4434840"/>
+            <a:ext cx="10149840" cy="685800"/>
           </a:xfrm>
           <a:prstGeom prst="rect">
             <a:avLst/>
@@ -8397,53 +8318,750 @@
           <a:lstStyle/>
           <a:p>
             <a:r>
+              <a:rPr b="1" sz="1350">
+                <a:solidFill>
+                  <a:srgbClr val="4F46E5"/>
+                </a:solidFill>
+              </a:rPr>
+              <a:t>CHAPTER IV: ANALYSIS &amp; DISCUSSIONS / CONSTRUCTION &amp; TESTING
+</a:t>
+            </a:r>
+            <a:r>
+              <a:rPr sz="1100">
+                <a:solidFill>
+                  <a:srgbClr val="1E293B"/>
+                </a:solidFill>
+              </a:rPr>
+              <a:t>4.1 System Construction &amp; Live Demonstration | 4.2 Multi-Stage Testing &amp; Verification | 4.3 Security &amp; Quality Assurance</a:t>
+            </a:r>
+          </a:p>
+        </p:txBody>
+      </p:sp>
+      <p:sp>
+        <p:nvSpPr>
+          <p:cNvPr id="13" name="Rounded Rectangle 12"/>
+          <p:cNvSpPr/>
+          <p:nvPr/>
+        </p:nvSpPr>
+        <p:spPr>
+          <a:xfrm>
+            <a:off x="731520" y="5303520"/>
+            <a:ext cx="10728655" cy="868680"/>
+          </a:xfrm>
+          <a:prstGeom prst="roundRect">
+            <a:avLst/>
+          </a:prstGeom>
+          <a:solidFill>
+            <a:srgbClr val="FFFFFF"/>
+          </a:solidFill>
+          <a:ln w="12700">
+            <a:solidFill>
+              <a:srgbClr val="E2E8F0"/>
+            </a:solidFill>
+          </a:ln>
+        </p:spPr>
+        <p:style>
+          <a:lnRef idx="1">
+            <a:schemeClr val="accent1"/>
+          </a:lnRef>
+          <a:fillRef idx="3">
+            <a:schemeClr val="accent1"/>
+          </a:fillRef>
+          <a:effectRef idx="2">
+            <a:schemeClr val="accent1"/>
+          </a:effectRef>
+          <a:fontRef idx="minor">
+            <a:schemeClr val="lt1"/>
+          </a:fontRef>
+        </p:style>
+        <p:txBody>
+          <a:bodyPr rtlCol="0" anchor="ctr"/>
+          <a:lstStyle/>
+          <a:p>
+            <a:pPr algn="ctr"/>
+          </a:p>
+        </p:txBody>
+      </p:sp>
+      <p:sp>
+        <p:nvSpPr>
+          <p:cNvPr id="14" name="TextBox 13"/>
+          <p:cNvSpPr txBox="1"/>
+          <p:nvPr/>
+        </p:nvSpPr>
+        <p:spPr>
+          <a:xfrm>
+            <a:off x="1005840" y="5394960"/>
+            <a:ext cx="10149840" cy="685800"/>
+          </a:xfrm>
+          <a:prstGeom prst="rect">
+            <a:avLst/>
+          </a:prstGeom>
+          <a:noFill/>
+        </p:spPr>
+        <p:txBody>
+          <a:bodyPr wrap="square">
+            <a:spAutoFit/>
+          </a:bodyPr>
+          <a:lstStyle/>
+          <a:p>
+            <a:r>
+              <a:rPr b="1" sz="1350">
+                <a:solidFill>
+                  <a:srgbClr val="4F46E5"/>
+                </a:solidFill>
+              </a:rPr>
+              <a:t>CHAPTER V: CONCLUSION &amp; RECOMMENDATION
+</a:t>
+            </a:r>
+            <a:r>
+              <a:rPr sz="1100">
+                <a:solidFill>
+                  <a:srgbClr val="1E293B"/>
+                </a:solidFill>
+              </a:rPr>
+              <a:t>5.1 Summary of Main Research Findings &amp; Results | 5.2 Directions for Future Research &amp; Enhancements</a:t>
+            </a:r>
+          </a:p>
+        </p:txBody>
+      </p:sp>
+    </p:spTree>
+  </p:cSld>
+  <p:clrMapOvr>
+    <a:masterClrMapping/>
+  </p:clrMapOvr>
+</p:sld>
+</file>
+
+<file path=ppt/slides/slide20.xml><?xml version="1.0" encoding="utf-8"?>
+<p:sld xmlns:a="http://schemas.openxmlformats.org/drawingml/2006/main" xmlns:p="http://schemas.openxmlformats.org/presentationml/2006/main" xmlns:r="http://schemas.openxmlformats.org/officeDocument/2006/relationships">
+  <p:cSld>
+    <p:bg>
+      <p:bgPr>
+        <a:solidFill>
+          <a:srgbClr val="F8FAFC"/>
+        </a:solidFill>
+        <a:effectLst/>
+      </p:bgPr>
+    </p:bg>
+    <p:spTree>
+      <p:nvGrpSpPr>
+        <p:cNvPr id="1" name=""/>
+        <p:cNvGrpSpPr/>
+        <p:nvPr/>
+      </p:nvGrpSpPr>
+      <p:grpSpPr/>
+      <p:sp>
+        <p:nvSpPr>
+          <p:cNvPr id="2" name="TextBox 1"/>
+          <p:cNvSpPr txBox="1"/>
+          <p:nvPr/>
+        </p:nvSpPr>
+        <p:spPr>
+          <a:xfrm>
+            <a:off x="731520" y="365760"/>
+            <a:ext cx="10698480" cy="320040"/>
+          </a:xfrm>
+          <a:prstGeom prst="rect">
+            <a:avLst/>
+          </a:prstGeom>
+          <a:noFill/>
+        </p:spPr>
+        <p:txBody>
+          <a:bodyPr wrap="square" lIns="0" rIns="0" tIns="0" bIns="0">
+            <a:spAutoFit/>
+          </a:bodyPr>
+          <a:lstStyle/>
+          <a:p>
+            <a:r>
+              <a:rPr sz="1100" b="1">
+                <a:solidFill>
+                  <a:srgbClr val="4F46E5"/>
+                </a:solidFill>
+                <a:latin typeface="Segoe UI"/>
+              </a:rPr>
+              <a:t>APPENDIX &amp; DEMONSTRATION</a:t>
+            </a:r>
+          </a:p>
+        </p:txBody>
+      </p:sp>
+      <p:sp>
+        <p:nvSpPr>
+          <p:cNvPr id="3" name="TextBox 2"/>
+          <p:cNvSpPr txBox="1"/>
+          <p:nvPr/>
+        </p:nvSpPr>
+        <p:spPr>
+          <a:xfrm>
+            <a:off x="731520" y="658368"/>
+            <a:ext cx="10698480" cy="502920"/>
+          </a:xfrm>
+          <a:prstGeom prst="rect">
+            <a:avLst/>
+          </a:prstGeom>
+          <a:noFill/>
+        </p:spPr>
+        <p:txBody>
+          <a:bodyPr wrap="square" lIns="0" rIns="0" tIns="0" bIns="0">
+            <a:spAutoFit/>
+          </a:bodyPr>
+          <a:lstStyle/>
+          <a:p>
+            <a:r>
+              <a:rPr sz="2100" b="1">
+                <a:solidFill>
+                  <a:srgbClr val="0F172A"/>
+                </a:solidFill>
+                <a:latin typeface="Segoe UI"/>
+              </a:rPr>
+              <a:t>Repository Links &amp; Live System Verification</a:t>
+            </a:r>
+          </a:p>
+        </p:txBody>
+      </p:sp>
+      <p:sp>
+        <p:nvSpPr>
+          <p:cNvPr id="4" name="Rectangle 3"/>
+          <p:cNvSpPr/>
+          <p:nvPr/>
+        </p:nvSpPr>
+        <p:spPr>
+          <a:xfrm>
+            <a:off x="731520" y="1207008"/>
+            <a:ext cx="10728655" cy="18288"/>
+          </a:xfrm>
+          <a:prstGeom prst="rect">
+            <a:avLst/>
+          </a:prstGeom>
+          <a:solidFill>
+            <a:srgbClr val="E2E8F0"/>
+          </a:solidFill>
+          <a:ln>
+            <a:solidFill>
+              <a:srgbClr val="E2E8F0"/>
+            </a:solidFill>
+          </a:ln>
+        </p:spPr>
+        <p:style>
+          <a:lnRef idx="1">
+            <a:schemeClr val="accent1"/>
+          </a:lnRef>
+          <a:fillRef idx="3">
+            <a:schemeClr val="accent1"/>
+          </a:fillRef>
+          <a:effectRef idx="2">
+            <a:schemeClr val="accent1"/>
+          </a:effectRef>
+          <a:fontRef idx="minor">
+            <a:schemeClr val="lt1"/>
+          </a:fontRef>
+        </p:style>
+        <p:txBody>
+          <a:bodyPr rtlCol="0" anchor="ctr"/>
+          <a:lstStyle/>
+          <a:p>
+            <a:pPr algn="ctr"/>
+          </a:p>
+        </p:txBody>
+      </p:sp>
+      <p:sp>
+        <p:nvSpPr>
+          <p:cNvPr id="5" name="Rounded Rectangle 4"/>
+          <p:cNvSpPr/>
+          <p:nvPr/>
+        </p:nvSpPr>
+        <p:spPr>
+          <a:xfrm>
+            <a:off x="731520" y="1463040"/>
+            <a:ext cx="10728655" cy="4846320"/>
+          </a:xfrm>
+          <a:prstGeom prst="roundRect">
+            <a:avLst/>
+          </a:prstGeom>
+          <a:solidFill>
+            <a:srgbClr val="FFFFFF"/>
+          </a:solidFill>
+          <a:ln w="12700">
+            <a:solidFill>
+              <a:srgbClr val="E2E8F0"/>
+            </a:solidFill>
+          </a:ln>
+        </p:spPr>
+        <p:style>
+          <a:lnRef idx="1">
+            <a:schemeClr val="accent1"/>
+          </a:lnRef>
+          <a:fillRef idx="3">
+            <a:schemeClr val="accent1"/>
+          </a:fillRef>
+          <a:effectRef idx="2">
+            <a:schemeClr val="accent1"/>
+          </a:effectRef>
+          <a:fontRef idx="minor">
+            <a:schemeClr val="lt1"/>
+          </a:fontRef>
+        </p:style>
+        <p:txBody>
+          <a:bodyPr rtlCol="0" anchor="ctr"/>
+          <a:lstStyle/>
+          <a:p>
+            <a:pPr algn="ctr"/>
+          </a:p>
+        </p:txBody>
+      </p:sp>
+      <p:sp>
+        <p:nvSpPr>
+          <p:cNvPr id="6" name="TextBox 5"/>
+          <p:cNvSpPr txBox="1"/>
+          <p:nvPr/>
+        </p:nvSpPr>
+        <p:spPr>
+          <a:xfrm>
+            <a:off x="1005840" y="1645920"/>
+            <a:ext cx="10149840" cy="4480560"/>
+          </a:xfrm>
+          <a:prstGeom prst="rect">
+            <a:avLst/>
+          </a:prstGeom>
+          <a:noFill/>
+        </p:spPr>
+        <p:txBody>
+          <a:bodyPr wrap="square">
+            <a:spAutoFit/>
+          </a:bodyPr>
+          <a:lstStyle/>
+          <a:p>
+            <a:r>
               <a:rPr sz="1600" b="1">
                 <a:solidFill>
                   <a:srgbClr val="0F172A"/>
                 </a:solidFill>
               </a:rPr>
-              <a:t>The Motivation: Transforming an Informal Sector Through Software Rigor
+              <a:t>System Verification &amp; Reproducibility Links
 </a:t>
             </a:r>
           </a:p>
           <a:p>
-            <a:r>
-              <a:rPr sz="1300">
+            <a:pPr>
+              <a:spcBef>
+                <a:spcPts val="1000"/>
+              </a:spcBef>
+            </a:pPr>
+            <a:r>
+              <a:rPr b="1" sz="1300">
+                <a:solidFill>
+                  <a:srgbClr val="4F46E5"/>
+                </a:solidFill>
+              </a:rPr>
+              <a:t>GitHub Source Code Repository:
+</a:t>
+            </a:r>
+            <a:r>
+              <a:rPr sz="1200">
                 <a:solidFill>
                   <a:srgbClr val="1E293B"/>
                 </a:solidFill>
               </a:rPr>
-              <a:t>•  Plumbing, electrical maintenance, appliance repairs, and masonry are critical to daily domestic safety, yet fraught with uncertainty.</a:t>
-            </a:r>
-          </a:p>
-          <a:p>
-            <a:r>
-              <a:rPr sz="1300">
+              <a:t>•  https://github.com/emperiumsoul/fix-it-marketplace (Branch: main)</a:t>
+            </a:r>
+          </a:p>
+          <a:p>
+            <a:pPr>
+              <a:spcBef>
+                <a:spcPts val="1000"/>
+              </a:spcBef>
+            </a:pPr>
+            <a:r>
+              <a:rPr b="1" sz="1300">
+                <a:solidFill>
+                  <a:srgbClr val="4F46E5"/>
+                </a:solidFill>
+              </a:rPr>
+              <a:t>Live Development Server:
+</a:t>
+            </a:r>
+            <a:r>
+              <a:rPr sz="1200">
                 <a:solidFill>
                   <a:srgbClr val="1E293B"/>
                 </a:solidFill>
               </a:rPr>
-              <a:t>•  Artisans possess strong vocational capabilities but lack digital storefronts, formal booking systems, and institutional credit markers.</a:t>
-            </a:r>
-          </a:p>
-          <a:p>
-            <a:r>
-              <a:rPr sz="1300">
+              <a:t>•  http://localhost:3000 (Active Next.js 16 Web Application)</a:t>
+            </a:r>
+          </a:p>
+          <a:p>
+            <a:pPr>
+              <a:spcBef>
+                <a:spcPts val="1000"/>
+              </a:spcBef>
+            </a:pPr>
+            <a:r>
+              <a:rPr b="1" sz="1300">
+                <a:solidFill>
+                  <a:srgbClr val="4F46E5"/>
+                </a:solidFill>
+              </a:rPr>
+              <a:t>Live Design System Showcase:
+</a:t>
+            </a:r>
+            <a:r>
+              <a:rPr sz="1200">
                 <a:solidFill>
                   <a:srgbClr val="1E293B"/>
                 </a:solidFill>
               </a:rPr>
-              <a:t>•  Homeowners risk inflated material costs, unverified strangers in private residences, and zero recourse for abandoned projects.</a:t>
-            </a:r>
-          </a:p>
-          <a:p>
-            <a:r>
-              <a:rPr sz="1300">
+              <a:t>•  http://localhost:3000/design-system (Component tokens, palettes, and micro-interactions)</a:t>
+            </a:r>
+          </a:p>
+          <a:p>
+            <a:pPr>
+              <a:spcBef>
+                <a:spcPts val="1000"/>
+              </a:spcBef>
+            </a:pPr>
+            <a:r>
+              <a:rPr b="1" sz="1300">
+                <a:solidFill>
+                  <a:srgbClr val="4F46E5"/>
+                </a:solidFill>
+              </a:rPr>
+              <a:t>Official Academic Documentation:
+</a:t>
+            </a:r>
+            <a:r>
+              <a:rPr sz="1200">
                 <a:solidFill>
                   <a:srgbClr val="1E293B"/>
                 </a:solidFill>
               </a:rPr>
-              <a:t>•  Opportunity: Build a modern, accessible web platform that formalizes trade interactions while respecting local communication habits (WhatsApp).</a:t>
+              <a:t>•  Fix_It_Marketplace_Thesis.docx (50-page Departmental Thesis)</a:t>
+            </a:r>
+          </a:p>
+          <a:p>
+            <a:pPr>
+              <a:spcBef>
+                <a:spcPts val="1000"/>
+              </a:spcBef>
+            </a:pPr>
+            <a:r>
+              <a:rPr b="1" sz="1300">
+                <a:solidFill>
+                  <a:srgbClr val="4F46E5"/>
+                </a:solidFill>
+              </a:rPr>
+              <a:t>Live Demonstration Flow:
+</a:t>
+            </a:r>
+            <a:r>
+              <a:rPr sz="1200">
+                <a:solidFill>
+                  <a:srgbClr val="1E293B"/>
+                </a:solidFill>
+              </a:rPr>
+              <a:t>•  Search -&gt; Select Artisan -&gt; Choose Tiered Package -&gt; Submit Booking -&gt; Track on Ledger -&gt; WhatsApp Dispatch</a:t>
+            </a:r>
+          </a:p>
+        </p:txBody>
+      </p:sp>
+    </p:spTree>
+  </p:cSld>
+  <p:clrMapOvr>
+    <a:masterClrMapping/>
+  </p:clrMapOvr>
+</p:sld>
+</file>
+
+<file path=ppt/slides/slide21.xml><?xml version="1.0" encoding="utf-8"?>
+<p:sld xmlns:a="http://schemas.openxmlformats.org/drawingml/2006/main" xmlns:p="http://schemas.openxmlformats.org/presentationml/2006/main" xmlns:r="http://schemas.openxmlformats.org/officeDocument/2006/relationships">
+  <p:cSld>
+    <p:bg>
+      <p:bgPr>
+        <a:solidFill>
+          <a:srgbClr val="0F172A"/>
+        </a:solidFill>
+        <a:effectLst/>
+      </p:bgPr>
+    </p:bg>
+    <p:spTree>
+      <p:nvGrpSpPr>
+        <p:cNvPr id="1" name=""/>
+        <p:cNvGrpSpPr/>
+        <p:nvPr/>
+      </p:nvGrpSpPr>
+      <p:grpSpPr/>
+      <p:sp>
+        <p:nvSpPr>
+          <p:cNvPr id="2" name="Rectangle 1"/>
+          <p:cNvSpPr/>
+          <p:nvPr/>
+        </p:nvSpPr>
+        <p:spPr>
+          <a:xfrm>
+            <a:off x="0" y="0"/>
+            <a:ext cx="12191695" cy="109728"/>
+          </a:xfrm>
+          <a:prstGeom prst="rect">
+            <a:avLst/>
+          </a:prstGeom>
+          <a:solidFill>
+            <a:srgbClr val="4F46E5"/>
+          </a:solidFill>
+          <a:ln>
+            <a:noFill/>
+          </a:ln>
+        </p:spPr>
+        <p:style>
+          <a:lnRef idx="1">
+            <a:schemeClr val="accent1"/>
+          </a:lnRef>
+          <a:fillRef idx="3">
+            <a:schemeClr val="accent1"/>
+          </a:fillRef>
+          <a:effectRef idx="2">
+            <a:schemeClr val="accent1"/>
+          </a:effectRef>
+          <a:fontRef idx="minor">
+            <a:schemeClr val="lt1"/>
+          </a:fontRef>
+        </p:style>
+        <p:txBody>
+          <a:bodyPr rtlCol="0" anchor="ctr"/>
+          <a:lstStyle/>
+          <a:p>
+            <a:pPr algn="ctr"/>
+          </a:p>
+        </p:txBody>
+      </p:sp>
+      <p:sp>
+        <p:nvSpPr>
+          <p:cNvPr id="3" name="TextBox 2"/>
+          <p:cNvSpPr txBox="1"/>
+          <p:nvPr/>
+        </p:nvSpPr>
+        <p:spPr>
+          <a:xfrm>
+            <a:off x="914400" y="1645920"/>
+            <a:ext cx="10362895" cy="1371600"/>
+          </a:xfrm>
+          <a:prstGeom prst="rect">
+            <a:avLst/>
+          </a:prstGeom>
+          <a:noFill/>
+        </p:spPr>
+        <p:txBody>
+          <a:bodyPr wrap="none">
+            <a:spAutoFit/>
+          </a:bodyPr>
+          <a:lstStyle/>
+          <a:p>
+            <a:pPr algn="ctr"/>
+            <a:r>
+              <a:rPr sz="3800" b="1">
+                <a:solidFill>
+                  <a:srgbClr val="FFFFFF"/>
+                </a:solidFill>
+                <a:latin typeface="Segoe UI"/>
+              </a:rPr>
+              <a:t>Thank You for Your Time &amp; Attention</a:t>
+            </a:r>
+          </a:p>
+          <a:p>
+            <a:pPr algn="ctr">
+              <a:spcBef>
+                <a:spcPts val="1000"/>
+              </a:spcBef>
+            </a:pPr>
+            <a:r>
+              <a:rPr sz="2200">
+                <a:solidFill>
+                  <a:srgbClr val="059669"/>
+                </a:solidFill>
+                <a:latin typeface="Segoe UI"/>
+              </a:rPr>
+              <a:t>Questions, Feedback &amp; Examination Discussion Welcomed</a:t>
+            </a:r>
+          </a:p>
+        </p:txBody>
+      </p:sp>
+      <p:sp>
+        <p:nvSpPr>
+          <p:cNvPr id="4" name="Rounded Rectangle 3"/>
+          <p:cNvSpPr/>
+          <p:nvPr/>
+        </p:nvSpPr>
+        <p:spPr>
+          <a:xfrm>
+            <a:off x="1828800" y="3474720"/>
+            <a:ext cx="8534095" cy="2286000"/>
+          </a:xfrm>
+          <a:prstGeom prst="roundRect">
+            <a:avLst/>
+          </a:prstGeom>
+          <a:solidFill>
+            <a:srgbClr val="1E293B"/>
+          </a:solidFill>
+          <a:ln w="12700">
+            <a:solidFill>
+              <a:srgbClr val="334155"/>
+            </a:solidFill>
+          </a:ln>
+        </p:spPr>
+        <p:style>
+          <a:lnRef idx="1">
+            <a:schemeClr val="accent1"/>
+          </a:lnRef>
+          <a:fillRef idx="3">
+            <a:schemeClr val="accent1"/>
+          </a:fillRef>
+          <a:effectRef idx="2">
+            <a:schemeClr val="accent1"/>
+          </a:effectRef>
+          <a:fontRef idx="minor">
+            <a:schemeClr val="lt1"/>
+          </a:fontRef>
+        </p:style>
+        <p:txBody>
+          <a:bodyPr rtlCol="0" anchor="ctr"/>
+          <a:lstStyle/>
+          <a:p>
+            <a:pPr algn="ctr"/>
+          </a:p>
+        </p:txBody>
+      </p:sp>
+      <p:sp>
+        <p:nvSpPr>
+          <p:cNvPr id="5" name="TextBox 4"/>
+          <p:cNvSpPr txBox="1"/>
+          <p:nvPr/>
+        </p:nvSpPr>
+        <p:spPr>
+          <a:xfrm>
+            <a:off x="2103120" y="3657600"/>
+            <a:ext cx="7985455" cy="1920240"/>
+          </a:xfrm>
+          <a:prstGeom prst="rect">
+            <a:avLst/>
+          </a:prstGeom>
+          <a:noFill/>
+        </p:spPr>
+        <p:txBody>
+          <a:bodyPr wrap="square">
+            <a:spAutoFit/>
+          </a:bodyPr>
+          <a:lstStyle/>
+          <a:p/>
+          <a:p>
+            <a:pPr>
+              <a:spcBef>
+                <a:spcPts val="400"/>
+              </a:spcBef>
+            </a:pPr>
+            <a:r>
+              <a:rPr b="1" sz="1200">
+                <a:solidFill>
+                  <a:srgbClr val="C7D2FE"/>
+                </a:solidFill>
+              </a:rPr>
+              <a:t>Candidate: </a:t>
+            </a:r>
+            <a:r>
+              <a:rPr sz="1200">
+                <a:solidFill>
+                  <a:srgbClr val="FFFFFF"/>
+                </a:solidFill>
+              </a:rPr>
+              <a:t>Emmanuel Opoku Nyame (BSc. Computer Science, KNUST)</a:t>
+            </a:r>
+          </a:p>
+          <a:p>
+            <a:pPr>
+              <a:spcBef>
+                <a:spcPts val="400"/>
+              </a:spcBef>
+            </a:pPr>
+            <a:r>
+              <a:rPr b="1" sz="1200">
+                <a:solidFill>
+                  <a:srgbClr val="C7D2FE"/>
+                </a:solidFill>
+              </a:rPr>
+              <a:t>Project: </a:t>
+            </a:r>
+            <a:r>
+              <a:rPr sz="1200">
+                <a:solidFill>
+                  <a:srgbClr val="FFFFFF"/>
+                </a:solidFill>
+              </a:rPr>
+              <a:t>Fix It Marketplace — Trust-Driven On-Demand Artisan Platform</a:t>
+            </a:r>
+          </a:p>
+          <a:p>
+            <a:pPr>
+              <a:spcBef>
+                <a:spcPts val="400"/>
+              </a:spcBef>
+            </a:pPr>
+            <a:r>
+              <a:rPr b="1" sz="1200">
+                <a:solidFill>
+                  <a:srgbClr val="C7D2FE"/>
+                </a:solidFill>
+              </a:rPr>
+              <a:t>Supervisor: </a:t>
+            </a:r>
+            <a:r>
+              <a:rPr sz="1200">
+                <a:solidFill>
+                  <a:srgbClr val="FFFFFF"/>
+                </a:solidFill>
+              </a:rPr>
+              <a:t>Dr. K. A. Boateng | Head of Department: Prof. J. K. Panford</a:t>
+            </a:r>
+          </a:p>
+          <a:p>
+            <a:pPr>
+              <a:spcBef>
+                <a:spcPts val="400"/>
+              </a:spcBef>
+            </a:pPr>
+            <a:r>
+              <a:rPr b="1" sz="1200">
+                <a:solidFill>
+                  <a:srgbClr val="C7D2FE"/>
+                </a:solidFill>
+              </a:rPr>
+              <a:t>Repository: </a:t>
+            </a:r>
+            <a:r>
+              <a:rPr sz="1200">
+                <a:solidFill>
+                  <a:srgbClr val="FFFFFF"/>
+                </a:solidFill>
+              </a:rPr>
+              <a:t>https://github.com/emperiumsoul/fix-it-marketplace</a:t>
+            </a:r>
+          </a:p>
+          <a:p>
+            <a:pPr>
+              <a:spcBef>
+                <a:spcPts val="400"/>
+              </a:spcBef>
+            </a:pPr>
+            <a:r>
+              <a:rPr b="1" sz="1200">
+                <a:solidFill>
+                  <a:srgbClr val="C7D2FE"/>
+                </a:solidFill>
+              </a:rPr>
+              <a:t>Documentation: </a:t>
+            </a:r>
+            <a:r>
+              <a:rPr sz="1200">
+                <a:solidFill>
+                  <a:srgbClr val="FFFFFF"/>
+                </a:solidFill>
+              </a:rPr>
+              <a:t>Fix_It_Marketplace_Thesis.docx (50 Pages, Departmental Layout)</a:t>
             </a:r>
           </a:p>
         </p:txBody>
@@ -8503,7 +9121,7 @@
                 </a:solidFill>
                 <a:latin typeface="Segoe UI"/>
               </a:rPr>
-              <a:t>CHAPTER I: PROBLEM ANALYSIS</a:t>
+              <a:t>CHAPTER I: INTRODUCTION</a:t>
             </a:r>
           </a:p>
         </p:txBody>
@@ -8517,7 +9135,7 @@
         <p:spPr>
           <a:xfrm>
             <a:off x="731520" y="658368"/>
-            <a:ext cx="10698480" cy="548640"/>
+            <a:ext cx="10698480" cy="502920"/>
           </a:xfrm>
           <a:prstGeom prst="rect">
             <a:avLst/>
@@ -8531,13 +9149,13 @@
           <a:lstStyle/>
           <a:p>
             <a:r>
-              <a:rPr sz="2200" b="1">
+              <a:rPr sz="2100" b="1">
                 <a:solidFill>
                   <a:srgbClr val="0F172A"/>
                 </a:solidFill>
                 <a:latin typeface="Segoe UI"/>
               </a:rPr>
-              <a:t>Four Root Causes of Informal Market Failure</a:t>
+              <a:t>1.1 Introduction: Informal Artisan Realities in Ghana</a:t>
             </a:r>
           </a:p>
         </p:txBody>
@@ -8550,7 +9168,7 @@
         </p:nvSpPr>
         <p:spPr>
           <a:xfrm>
-            <a:off x="731520" y="1234440"/>
+            <a:off x="731520" y="1207008"/>
             <a:ext cx="10728655" cy="18288"/>
           </a:xfrm>
           <a:prstGeom prst="rect">
@@ -8596,7 +9214,7 @@
         <p:spPr>
           <a:xfrm>
             <a:off x="731520" y="1463040"/>
-            <a:ext cx="5212080" cy="2103120"/>
+            <a:ext cx="3474720" cy="2011680"/>
           </a:xfrm>
           <a:prstGeom prst="roundRect">
             <a:avLst/>
@@ -8640,8 +9258,8 @@
         </p:nvSpPr>
         <p:spPr>
           <a:xfrm>
-            <a:off x="1005840" y="1645920"/>
-            <a:ext cx="4663440" cy="1737360"/>
+            <a:off x="914400" y="1645920"/>
+            <a:ext cx="3108960" cy="1645920"/>
           </a:xfrm>
           <a:prstGeom prst="rect">
             <a:avLst/>
@@ -8655,27 +9273,30 @@
           <a:lstStyle/>
           <a:p>
             <a:r>
-              <a:rPr sz="1500" b="1">
+              <a:rPr sz="3200" b="1">
                 <a:solidFill>
                   <a:srgbClr val="4F46E5"/>
                 </a:solidFill>
               </a:rPr>
-              <a:t>1. Acute Information Asymmetry</a:t>
-            </a:r>
-          </a:p>
-          <a:p>
-            <a:pPr>
-              <a:spcBef>
-                <a:spcPts val="800"/>
-              </a:spcBef>
-            </a:pPr>
-            <a:r>
-              <a:rPr sz="1200">
-                <a:solidFill>
-                  <a:srgbClr val="1E293B"/>
-                </a:solidFill>
-              </a:rPr>
-              <a:t>Consumers have zero objective metrics to gauge artisan competence or fair market pricing prior to home arrival. Tradespeople arbitrarily set prices based on perceived client wealth.</a:t>
+              <a:t>&gt;72%
+</a:t>
+            </a:r>
+            <a:r>
+              <a:rPr sz="1350" b="1">
+                <a:solidFill>
+                  <a:srgbClr val="0F172A"/>
+                </a:solidFill>
+              </a:rPr>
+              <a:t>Informal Workforce
+</a:t>
+            </a:r>
+            <a:r>
+              <a:rPr sz="1100">
+                <a:solidFill>
+                  <a:srgbClr val="64748B"/>
+                </a:solidFill>
+              </a:rPr>
+              <a:t>Ghana Statistical Service reports that informal labor constitutes &gt;72% of the non-agricultural economy, primarily in manual and domestic trades.</a:t>
             </a:r>
           </a:p>
         </p:txBody>
@@ -8688,8 +9309,8 @@
         </p:nvSpPr>
         <p:spPr>
           <a:xfrm>
-            <a:off x="6217920" y="1463040"/>
-            <a:ext cx="5212080" cy="2103120"/>
+            <a:off x="4343400" y="1463040"/>
+            <a:ext cx="3474720" cy="2011680"/>
           </a:xfrm>
           <a:prstGeom prst="roundRect">
             <a:avLst/>
@@ -8733,8 +9354,8 @@
         </p:nvSpPr>
         <p:spPr>
           <a:xfrm>
-            <a:off x="6492240" y="1645920"/>
-            <a:ext cx="4663440" cy="1737360"/>
+            <a:off x="4526280" y="1645920"/>
+            <a:ext cx="3108960" cy="1645920"/>
           </a:xfrm>
           <a:prstGeom prst="rect">
             <a:avLst/>
@@ -8748,27 +9369,30 @@
           <a:lstStyle/>
           <a:p>
             <a:r>
-              <a:rPr sz="1500" b="1">
+              <a:rPr sz="3200" b="1">
                 <a:solidFill>
                   <a:srgbClr val="059669"/>
                 </a:solidFill>
               </a:rPr>
-              <a:t>2. Moral Hazard &amp; Lack of Recourse</a:t>
-            </a:r>
-          </a:p>
-          <a:p>
-            <a:pPr>
-              <a:spcBef>
-                <a:spcPts val="800"/>
-              </a:spcBef>
-            </a:pPr>
-            <a:r>
-              <a:rPr sz="1200">
-                <a:solidFill>
-                  <a:srgbClr val="1E293B"/>
-                </a:solidFill>
-              </a:rPr>
-              <a:t>In the absence of a centralized reputation ledger, substandard craftsmanship carries no reputational penalty for transient artisans. Deposits are taken and jobs abandoned without audit trails.</a:t>
+              <a:t>Word of Mouth
+</a:t>
+            </a:r>
+            <a:r>
+              <a:rPr sz="1350" b="1">
+                <a:solidFill>
+                  <a:srgbClr val="0F172A"/>
+                </a:solidFill>
+              </a:rPr>
+              <a:t>Conventional Discovery
+</a:t>
+            </a:r>
+            <a:r>
+              <a:rPr sz="1100">
+                <a:solidFill>
+                  <a:srgbClr val="64748B"/>
+                </a:solidFill>
+              </a:rPr>
+              <a:t>Homeowners depend on erratic referrals from neighbors and estate caretakers, lacking transparent accreditation or pricing baselines.</a:t>
             </a:r>
           </a:p>
         </p:txBody>
@@ -8781,8 +9405,8 @@
         </p:nvSpPr>
         <p:spPr>
           <a:xfrm>
-            <a:off x="731520" y="3840480"/>
-            <a:ext cx="5212080" cy="2103120"/>
+            <a:off x="7955280" y="1463040"/>
+            <a:ext cx="3474720" cy="2011680"/>
           </a:xfrm>
           <a:prstGeom prst="roundRect">
             <a:avLst/>
@@ -8826,8 +9450,8 @@
         </p:nvSpPr>
         <p:spPr>
           <a:xfrm>
-            <a:off x="1005840" y="4023360"/>
-            <a:ext cx="4663440" cy="1737360"/>
+            <a:off x="8138160" y="1645920"/>
+            <a:ext cx="3108960" cy="1645920"/>
           </a:xfrm>
           <a:prstGeom prst="rect">
             <a:avLst/>
@@ -8841,27 +9465,30 @@
           <a:lstStyle/>
           <a:p>
             <a:r>
-              <a:rPr sz="1500" b="1">
+              <a:rPr sz="3200" b="1">
                 <a:solidFill>
                   <a:srgbClr val="4F46E5"/>
                 </a:solidFill>
               </a:rPr>
-              <a:t>3. Security &amp; Safety Anxiety</a:t>
-            </a:r>
-          </a:p>
-          <a:p>
-            <a:pPr>
-              <a:spcBef>
-                <a:spcPts val="800"/>
-              </a:spcBef>
-            </a:pPr>
-            <a:r>
-              <a:rPr sz="1200">
-                <a:solidFill>
-                  <a:srgbClr val="1E293B"/>
-                </a:solidFill>
-              </a:rPr>
-              <a:t>Inviting unvetted strangers into private family residences poses severe personal safety risks. Conventional hiring lacks verified government ID backing or background validation.</a:t>
+              <a:t>&gt;130%
+</a:t>
+            </a:r>
+            <a:r>
+              <a:rPr sz="1350" b="1">
+                <a:solidFill>
+                  <a:srgbClr val="0F172A"/>
+                </a:solidFill>
+              </a:rPr>
+              <a:t>Mobile Penetration
+</a:t>
+            </a:r>
+            <a:r>
+              <a:rPr sz="1100">
+                <a:solidFill>
+                  <a:srgbClr val="64748B"/>
+                </a:solidFill>
+              </a:rPr>
+              <a:t>Over 31M mobile subscriptions and ubiquitous WhatsApp adoption offer an ideal technological foundation for digital service formalization.</a:t>
             </a:r>
           </a:p>
         </p:txBody>
@@ -8874,8 +9501,8 @@
         </p:nvSpPr>
         <p:spPr>
           <a:xfrm>
-            <a:off x="6217920" y="3840480"/>
-            <a:ext cx="5212080" cy="2103120"/>
+            <a:off x="731520" y="3749039"/>
+            <a:ext cx="10728655" cy="2468880"/>
           </a:xfrm>
           <a:prstGeom prst="roundRect">
             <a:avLst/>
@@ -8919,8 +9546,8 @@
         </p:nvSpPr>
         <p:spPr>
           <a:xfrm>
-            <a:off x="6492240" y="4023360"/>
-            <a:ext cx="4663440" cy="1737360"/>
+            <a:off x="1005840" y="3931920"/>
+            <a:ext cx="10149840" cy="2103120"/>
           </a:xfrm>
           <a:prstGeom prst="rect">
             <a:avLst/>
@@ -8934,18 +9561,19 @@
           <a:lstStyle/>
           <a:p>
             <a:r>
-              <a:rPr sz="1500" b="1">
-                <a:solidFill>
-                  <a:srgbClr val="059669"/>
-                </a:solidFill>
-              </a:rPr>
-              <a:t>4. Scheduling &amp; Coordination Friction</a:t>
+              <a:rPr b="1" sz="1500">
+                <a:solidFill>
+                  <a:srgbClr val="0F172A"/>
+                </a:solidFill>
+              </a:rPr>
+              <a:t>The Socio-Technical Context &amp; Opportunity
+</a:t>
             </a:r>
           </a:p>
           <a:p>
             <a:pPr>
               <a:spcBef>
-                <a:spcPts val="800"/>
+                <a:spcPts val="400"/>
               </a:spcBef>
             </a:pPr>
             <a:r>
@@ -8954,7 +9582,52 @@
                   <a:srgbClr val="1E293B"/>
                 </a:solidFill>
               </a:rPr>
-              <a:t>Unorganized voice calls lead to missed appointments, verbal miscommunications over scope, and payment friction due to absence of agreed written scope specifications.</a:t>
+              <a:t>•  Trades such as plumbing, electrical repairs, appliance servicing, masonry, and painting are essential to Ghanaian urban infrastructure.</a:t>
+            </a:r>
+          </a:p>
+          <a:p>
+            <a:pPr>
+              <a:spcBef>
+                <a:spcPts val="400"/>
+              </a:spcBef>
+            </a:pPr>
+            <a:r>
+              <a:rPr sz="1200">
+                <a:solidFill>
+                  <a:srgbClr val="1E293B"/>
+                </a:solidFill>
+              </a:rPr>
+              <a:t>•  Artisans possess strong vocational trade mastery through traditional apprenticeships but lack institutional signaling, digital portfolios, and credit history.</a:t>
+            </a:r>
+          </a:p>
+          <a:p>
+            <a:pPr>
+              <a:spcBef>
+                <a:spcPts val="400"/>
+              </a:spcBef>
+            </a:pPr>
+            <a:r>
+              <a:rPr sz="1200">
+                <a:solidFill>
+                  <a:srgbClr val="1E293B"/>
+                </a:solidFill>
+              </a:rPr>
+              <a:t>•  Consumers bear massive friction: arbitrary price haggling, non-refundable cash deposits, safety anxiety, and abandoned projects.</a:t>
+            </a:r>
+          </a:p>
+          <a:p>
+            <a:pPr>
+              <a:spcBef>
+                <a:spcPts val="400"/>
+              </a:spcBef>
+            </a:pPr>
+            <a:r>
+              <a:rPr sz="1200">
+                <a:solidFill>
+                  <a:srgbClr val="1E293B"/>
+                </a:solidFill>
+              </a:rPr>
+              <a:t>•  Fix It Marketplace bridges this structural chasm through high-performance web architecture, verified profiles, and WhatsApp integration.</a:t>
             </a:r>
           </a:p>
         </p:txBody>
@@ -9014,7 +9687,7 @@
                 </a:solidFill>
                 <a:latin typeface="Segoe UI"/>
               </a:rPr>
-              <a:t>CHAPTER I: SCOPE &amp; OBJECTIVES</a:t>
+              <a:t>CHAPTER I: INTRODUCTION</a:t>
             </a:r>
           </a:p>
         </p:txBody>
@@ -9028,7 +9701,7 @@
         <p:spPr>
           <a:xfrm>
             <a:off x="731520" y="658368"/>
-            <a:ext cx="10698480" cy="548640"/>
+            <a:ext cx="10698480" cy="502920"/>
           </a:xfrm>
           <a:prstGeom prst="rect">
             <a:avLst/>
@@ -9042,13 +9715,13 @@
           <a:lstStyle/>
           <a:p>
             <a:r>
-              <a:rPr sz="2200" b="1">
+              <a:rPr sz="2100" b="1">
                 <a:solidFill>
                   <a:srgbClr val="0F172A"/>
                 </a:solidFill>
                 <a:latin typeface="Segoe UI"/>
               </a:rPr>
-              <a:t>Engineering Goals &amp; Guiding Research Questions</a:t>
+              <a:t>1.2 Objectives of the Study: General &amp; Specific Goals</a:t>
             </a:r>
           </a:p>
         </p:txBody>
@@ -9061,7 +9734,7 @@
         </p:nvSpPr>
         <p:spPr>
           <a:xfrm>
-            <a:off x="731520" y="1234440"/>
+            <a:off x="731520" y="1207008"/>
             <a:ext cx="10728655" cy="18288"/>
           </a:xfrm>
           <a:prstGeom prst="rect">
@@ -9107,7 +9780,94 @@
         <p:spPr>
           <a:xfrm>
             <a:off x="731520" y="1463040"/>
-            <a:ext cx="5212080" cy="4754880"/>
+            <a:ext cx="4114800" cy="4846320"/>
+          </a:xfrm>
+          <a:prstGeom prst="roundRect">
+            <a:avLst/>
+          </a:prstGeom>
+          <a:solidFill>
+            <a:srgbClr val="0F172A"/>
+          </a:solidFill>
+          <a:ln w="12700">
+            <a:solidFill>
+              <a:srgbClr val="0F172A"/>
+            </a:solidFill>
+          </a:ln>
+        </p:spPr>
+        <p:style>
+          <a:lnRef idx="1">
+            <a:schemeClr val="accent1"/>
+          </a:lnRef>
+          <a:fillRef idx="3">
+            <a:schemeClr val="accent1"/>
+          </a:fillRef>
+          <a:effectRef idx="2">
+            <a:schemeClr val="accent1"/>
+          </a:effectRef>
+          <a:fontRef idx="minor">
+            <a:schemeClr val="lt1"/>
+          </a:fontRef>
+        </p:style>
+        <p:txBody>
+          <a:bodyPr rtlCol="0" anchor="ctr"/>
+          <a:lstStyle/>
+          <a:p>
+            <a:pPr algn="ctr"/>
+          </a:p>
+        </p:txBody>
+      </p:sp>
+      <p:sp>
+        <p:nvSpPr>
+          <p:cNvPr id="6" name="TextBox 5"/>
+          <p:cNvSpPr txBox="1"/>
+          <p:nvPr/>
+        </p:nvSpPr>
+        <p:spPr>
+          <a:xfrm>
+            <a:off x="1005840" y="1828800"/>
+            <a:ext cx="3566160" cy="4114800"/>
+          </a:xfrm>
+          <a:prstGeom prst="rect">
+            <a:avLst/>
+          </a:prstGeom>
+          <a:noFill/>
+        </p:spPr>
+        <p:txBody>
+          <a:bodyPr wrap="square">
+            <a:spAutoFit/>
+          </a:bodyPr>
+          <a:lstStyle/>
+          <a:p>
+            <a:r>
+              <a:rPr b="1" sz="1800">
+                <a:solidFill>
+                  <a:srgbClr val="059669"/>
+                </a:solidFill>
+              </a:rPr>
+              <a:t>GENERAL OBJECTIVE
+</a:t>
+            </a:r>
+            <a:r>
+              <a:rPr sz="1300">
+                <a:solidFill>
+                  <a:srgbClr val="FFFFFF"/>
+                </a:solidFill>
+              </a:rPr>
+              <a:t>To design, construct, and empirically evaluate a cloud-native, on-demand artisan and domestic service marketplace tailored to the socio-technical dynamics of Ghana, eliminating transaction friction, establishing mutual trust, and ensuring predictable, transparent service delivery.</a:t>
+            </a:r>
+          </a:p>
+        </p:txBody>
+      </p:sp>
+      <p:sp>
+        <p:nvSpPr>
+          <p:cNvPr id="7" name="Rounded Rectangle 6"/>
+          <p:cNvSpPr/>
+          <p:nvPr/>
+        </p:nvSpPr>
+        <p:spPr>
+          <a:xfrm>
+            <a:off x="5120640" y="1463040"/>
+            <a:ext cx="6339535" cy="4846320"/>
           </a:xfrm>
           <a:prstGeom prst="roundRect">
             <a:avLst/>
@@ -9145,14 +9905,14 @@
       </p:sp>
       <p:sp>
         <p:nvSpPr>
-          <p:cNvPr id="6" name="TextBox 5"/>
+          <p:cNvPr id="8" name="TextBox 7"/>
           <p:cNvSpPr txBox="1"/>
           <p:nvPr/>
         </p:nvSpPr>
         <p:spPr>
           <a:xfrm>
-            <a:off x="1005840" y="1645920"/>
-            <a:ext cx="4663440" cy="4389120"/>
+            <a:off x="5394960" y="1645920"/>
+            <a:ext cx="5760720" cy="4480560"/>
           </a:xfrm>
           <a:prstGeom prst="rect">
             <a:avLst/>
@@ -9166,274 +9926,151 @@
           <a:lstStyle/>
           <a:p>
             <a:r>
-              <a:rPr sz="1700" b="1">
+              <a:rPr b="1" sz="1600">
                 <a:solidFill>
                   <a:srgbClr val="0F172A"/>
                 </a:solidFill>
               </a:rPr>
-              <a:t>Guiding Research Questions
+              <a:t>Specific Technical Objectives
 </a:t>
             </a:r>
           </a:p>
           <a:p>
             <a:pPr>
               <a:spcBef>
-                <a:spcPts val="1000"/>
+                <a:spcPts val="600"/>
               </a:spcBef>
             </a:pPr>
             <a:r>
-              <a:rPr b="1" sz="1200">
+              <a:rPr b="1" sz="1150">
                 <a:solidFill>
                   <a:srgbClr val="4F46E5"/>
                 </a:solidFill>
               </a:rPr>
-              <a:t>RQ-1 (Performance Under Constraints): </a:t>
-            </a:r>
-            <a:r>
-              <a:rPr sz="1200">
+              <a:t>1. Architecture Formulation: </a:t>
+            </a:r>
+            <a:r>
+              <a:rPr sz="1100">
                 <a:solidFill>
                   <a:srgbClr val="1E293B"/>
                 </a:solidFill>
               </a:rPr>
-              <a:t>How can an on-demand marketplace architecture achieve sub-1.5s latency and minimal data overhead under 3G/4G African mobile network conditions?</a:t>
+              <a:t>Develop a reactive, decoupled architecture using Next.js 16 (App Router), TypeScript, and Tailwind CSS.</a:t>
             </a:r>
           </a:p>
           <a:p>
             <a:pPr>
               <a:spcBef>
-                <a:spcPts val="1000"/>
+                <a:spcPts val="600"/>
               </a:spcBef>
             </a:pPr>
             <a:r>
-              <a:rPr b="1" sz="1200">
+              <a:rPr b="1" sz="1150">
                 <a:solidFill>
                   <a:srgbClr val="4F46E5"/>
                 </a:solidFill>
               </a:rPr>
-              <a:t>RQ-2 (Bilateral Trust Architecture): </a:t>
-            </a:r>
-            <a:r>
-              <a:rPr sz="1200">
+              <a:t>2. Dual-Role Security: </a:t>
+            </a:r>
+            <a:r>
+              <a:rPr sz="1100">
                 <a:solidFill>
                   <a:srgbClr val="1E293B"/>
                 </a:solidFill>
               </a:rPr>
-              <a:t>What identity protocols and reputation algorithms are required to establish quantifiable trust between domestic consumers and informal artisans?</a:t>
+              <a:t>Implement Clerk authentication and authorization enforcing dynamic role separation between domestic customers and verified artisans.</a:t>
             </a:r>
           </a:p>
           <a:p>
             <a:pPr>
               <a:spcBef>
-                <a:spcPts val="1000"/>
+                <a:spcPts val="600"/>
               </a:spcBef>
             </a:pPr>
             <a:r>
-              <a:rPr b="1" sz="1200">
+              <a:rPr b="1" sz="1150">
                 <a:solidFill>
                   <a:srgbClr val="4F46E5"/>
                 </a:solidFill>
               </a:rPr>
-              <a:t>RQ-3 (Standardized Pricing Models): </a:t>
-            </a:r>
-            <a:r>
-              <a:rPr sz="1200">
+              <a:t>3. Transparent Packaging: </a:t>
+            </a:r>
+            <a:r>
+              <a:rPr sz="1100">
                 <a:solidFill>
                   <a:srgbClr val="1E293B"/>
                 </a:solidFill>
               </a:rPr>
-              <a:t>Can multi-tier service packaging (Basic, Standard, Premium) effectively eliminate price haggling while respecting the variability of manual labor?</a:t>
+              <a:t>Engineer a standardized 3-tier service scope matrix (Basic, Standard, Premium) priced in Ghana Cedis (GHS).</a:t>
             </a:r>
           </a:p>
           <a:p>
             <a:pPr>
               <a:spcBef>
-                <a:spcPts val="1000"/>
+                <a:spcPts val="600"/>
               </a:spcBef>
             </a:pPr>
             <a:r>
-              <a:rPr b="1" sz="1200">
+              <a:rPr b="1" sz="1150">
                 <a:solidFill>
                   <a:srgbClr val="4F46E5"/>
                 </a:solidFill>
               </a:rPr>
-              <a:t>RQ-4 (Communication Localization): </a:t>
-            </a:r>
-            <a:r>
-              <a:rPr sz="1200">
+              <a:t>4. Hybrid Messaging Bridge: </a:t>
+            </a:r>
+            <a:r>
+              <a:rPr sz="1100">
                 <a:solidFill>
                   <a:srgbClr val="1E293B"/>
                 </a:solidFill>
               </a:rPr>
-              <a:t>Does integrating instant messaging bridges (WhatsApp deep-links) enhance booking compliance without undermining centralized platform accountability?</a:t>
-            </a:r>
-          </a:p>
-        </p:txBody>
-      </p:sp>
-      <p:sp>
-        <p:nvSpPr>
-          <p:cNvPr id="7" name="Rounded Rectangle 6"/>
-          <p:cNvSpPr/>
-          <p:nvPr/>
-        </p:nvSpPr>
-        <p:spPr>
-          <a:xfrm>
-            <a:off x="6217920" y="1463040"/>
-            <a:ext cx="5212080" cy="4754880"/>
-          </a:xfrm>
-          <a:prstGeom prst="roundRect">
-            <a:avLst/>
-          </a:prstGeom>
-          <a:solidFill>
-            <a:srgbClr val="FFFFFF"/>
-          </a:solidFill>
-          <a:ln w="12700">
-            <a:solidFill>
-              <a:srgbClr val="E2E8F0"/>
-            </a:solidFill>
-          </a:ln>
-        </p:spPr>
-        <p:style>
-          <a:lnRef idx="1">
-            <a:schemeClr val="accent1"/>
-          </a:lnRef>
-          <a:fillRef idx="3">
-            <a:schemeClr val="accent1"/>
-          </a:fillRef>
-          <a:effectRef idx="2">
-            <a:schemeClr val="accent1"/>
-          </a:effectRef>
-          <a:fontRef idx="minor">
-            <a:schemeClr val="lt1"/>
-          </a:fontRef>
-        </p:style>
-        <p:txBody>
-          <a:bodyPr rtlCol="0" anchor="ctr"/>
-          <a:lstStyle/>
-          <a:p>
-            <a:pPr algn="ctr"/>
-          </a:p>
-        </p:txBody>
-      </p:sp>
-      <p:sp>
-        <p:nvSpPr>
-          <p:cNvPr id="8" name="TextBox 7"/>
-          <p:cNvSpPr txBox="1"/>
-          <p:nvPr/>
-        </p:nvSpPr>
-        <p:spPr>
-          <a:xfrm>
-            <a:off x="6492240" y="1645920"/>
-            <a:ext cx="4663440" cy="4389120"/>
-          </a:xfrm>
-          <a:prstGeom prst="rect">
-            <a:avLst/>
-          </a:prstGeom>
-          <a:noFill/>
-        </p:spPr>
-        <p:txBody>
-          <a:bodyPr wrap="square">
-            <a:spAutoFit/>
-          </a:bodyPr>
-          <a:lstStyle/>
-          <a:p>
-            <a:r>
-              <a:rPr sz="1700" b="1">
-                <a:solidFill>
-                  <a:srgbClr val="0F172A"/>
-                </a:solidFill>
-              </a:rPr>
-              <a:t>Primary Engineering Objectives
-</a:t>
+              <a:t>Integrate centralized web booking scheduling with localized WhatsApp deep-links (+233) for real-time bilateral coordination.</a:t>
             </a:r>
           </a:p>
           <a:p>
             <a:pPr>
               <a:spcBef>
-                <a:spcPts val="800"/>
+                <a:spcPts val="600"/>
               </a:spcBef>
             </a:pPr>
             <a:r>
-              <a:rPr sz="1200">
+              <a:rPr b="1" sz="1150">
+                <a:solidFill>
+                  <a:srgbClr val="4F46E5"/>
+                </a:solidFill>
+              </a:rPr>
+              <a:t>5. Order Ledger State Machine: </a:t>
+            </a:r>
+            <a:r>
+              <a:rPr sz="1100">
                 <a:solidFill>
                   <a:srgbClr val="1E293B"/>
                 </a:solidFill>
               </a:rPr>
-              <a:t>1. Architectural Decoupling: Engineer a reactive multi-tier web application using Next.js 16 App Router, Clerk Auth, and Sanity Headless CMS.</a:t>
+              <a:t>Construct an active booking ledger supporting real-time status transitions and instant cancellation reconciliation.</a:t>
             </a:r>
           </a:p>
           <a:p>
             <a:pPr>
               <a:spcBef>
-                <a:spcPts val="800"/>
+                <a:spcPts val="600"/>
               </a:spcBef>
             </a:pPr>
             <a:r>
-              <a:rPr sz="1200">
+              <a:rPr b="1" sz="1150">
+                <a:solidFill>
+                  <a:srgbClr val="4F46E5"/>
+                </a:solidFill>
+              </a:rPr>
+              <a:t>6. Empirical Evaluation: </a:t>
+            </a:r>
+            <a:r>
+              <a:rPr sz="1100">
                 <a:solidFill>
                   <a:srgbClr val="1E293B"/>
                 </a:solidFill>
               </a:rPr>
-              <a:t>2. Transparent Catalog &amp; Packaging: Design standardized 3-tier service packages (Basic, Standard, Premium) in Ghana Cedis (GHS).</a:t>
-            </a:r>
-          </a:p>
-          <a:p>
-            <a:pPr>
-              <a:spcBef>
-                <a:spcPts val="800"/>
-              </a:spcBef>
-            </a:pPr>
-            <a:r>
-              <a:rPr sz="1200">
-                <a:solidFill>
-                  <a:srgbClr val="1E293B"/>
-                </a:solidFill>
-              </a:rPr>
-              <a:t>3. Dual-Persona Role Gateway: Build secure role separation between domestic customers and verified service providers.</a:t>
-            </a:r>
-          </a:p>
-          <a:p>
-            <a:pPr>
-              <a:spcBef>
-                <a:spcPts val="800"/>
-              </a:spcBef>
-            </a:pPr>
-            <a:r>
-              <a:rPr sz="1200">
-                <a:solidFill>
-                  <a:srgbClr val="1E293B"/>
-                </a:solidFill>
-              </a:rPr>
-              <a:t>4. Hybrid Communication Bridge: Integrate automated booking lifecycle tracking with internationalized WhatsApp direct links (+233).</a:t>
-            </a:r>
-          </a:p>
-          <a:p>
-            <a:pPr>
-              <a:spcBef>
-                <a:spcPts val="800"/>
-              </a:spcBef>
-            </a:pPr>
-            <a:r>
-              <a:rPr sz="1200">
-                <a:solidFill>
-                  <a:srgbClr val="1E293B"/>
-                </a:solidFill>
-              </a:rPr>
-              <a:t>5. Order State Machine &amp; Reconciliation: Construct an active order ledger with instant cancellation reconciliation.</a:t>
-            </a:r>
-          </a:p>
-          <a:p>
-            <a:pPr>
-              <a:spcBef>
-                <a:spcPts val="800"/>
-              </a:spcBef>
-            </a:pPr>
-            <a:r>
-              <a:rPr sz="1200">
-                <a:solidFill>
-                  <a:srgbClr val="1E293B"/>
-                </a:solidFill>
-              </a:rPr>
-              <a:t>6. Empirical Validation: Conduct Google Lighthouse performance benchmarking and a formal System Usability Scale (SUS) evaluation.</a:t>
+              <a:t>Perform Google Lighthouse audits and a formal System Usability Scale (SUS) evaluation with 30 target Ghanaian users.</a:t>
             </a:r>
           </a:p>
         </p:txBody>
@@ -9493,7 +10130,7 @@
                 </a:solidFill>
                 <a:latin typeface="Segoe UI"/>
               </a:rPr>
-              <a:t>CHAPTER II: LITERATURE REVIEW</a:t>
+              <a:t>CHAPTER I: INTRODUCTION</a:t>
             </a:r>
           </a:p>
         </p:txBody>
@@ -9507,7 +10144,7 @@
         <p:spPr>
           <a:xfrm>
             <a:off x="731520" y="658368"/>
-            <a:ext cx="10698480" cy="548640"/>
+            <a:ext cx="10698480" cy="502920"/>
           </a:xfrm>
           <a:prstGeom prst="rect">
             <a:avLst/>
@@ -9521,13 +10158,13 @@
           <a:lstStyle/>
           <a:p>
             <a:r>
-              <a:rPr sz="2200" b="1">
+              <a:rPr sz="2100" b="1">
                 <a:solidFill>
                   <a:srgbClr val="0F172A"/>
                 </a:solidFill>
                 <a:latin typeface="Segoe UI"/>
               </a:rPr>
-              <a:t>Theoretical Foundations Guiding the Architecture</a:t>
+              <a:t>1.3 Research Problem Statement: Conventional vs. Fix-It</a:t>
             </a:r>
           </a:p>
         </p:txBody>
@@ -9540,7 +10177,7 @@
         </p:nvSpPr>
         <p:spPr>
           <a:xfrm>
-            <a:off x="731520" y="1234440"/>
+            <a:off x="731520" y="1207008"/>
             <a:ext cx="10728655" cy="18288"/>
           </a:xfrm>
           <a:prstGeom prst="rect">
@@ -9579,24 +10216,439 @@
       </p:sp>
       <p:sp>
         <p:nvSpPr>
-          <p:cNvPr id="5" name="Rounded Rectangle 4"/>
+          <p:cNvPr id="5" name="TextBox 4"/>
+          <p:cNvSpPr txBox="1"/>
+          <p:nvPr/>
+        </p:nvSpPr>
+        <p:spPr>
+          <a:xfrm>
+            <a:off x="731520" y="1371600"/>
+            <a:ext cx="10728655" cy="548640"/>
+          </a:xfrm>
+          <a:prstGeom prst="rect">
+            <a:avLst/>
+          </a:prstGeom>
+          <a:noFill/>
+        </p:spPr>
+        <p:txBody>
+          <a:bodyPr wrap="none">
+            <a:spAutoFit/>
+          </a:bodyPr>
+          <a:lstStyle/>
+          <a:p>
+            <a:r>
+              <a:rPr sz="1300">
+                <a:solidFill>
+                  <a:srgbClr val="1E293B"/>
+                </a:solidFill>
+              </a:rPr>
+              <a:t>Conventional informal artisan hiring in Ghana suffers from structural market failures summarized in Table 1-1:</a:t>
+            </a:r>
+          </a:p>
+        </p:txBody>
+      </p:sp>
+      <p:graphicFrame>
+        <p:nvGraphicFramePr>
+          <p:cNvPr id="6" name="Table 5"/>
+          <p:cNvGraphicFramePr>
+            <a:graphicFrameLocks noGrp="1"/>
+          </p:cNvGraphicFramePr>
+          <p:nvPr/>
+        </p:nvGraphicFramePr>
+        <p:xfrm>
+          <a:off x="731520" y="2011680"/>
+          <a:ext cx="10728655" cy="3474720"/>
+        </p:xfrm>
+        <a:graphic>
+          <a:graphicData uri="http://schemas.openxmlformats.org/drawingml/2006/table">
+            <a:tbl>
+              <a:tblPr firstRow="1" bandRow="1">
+                <a:tableStyleId>{5C22544A-7EE6-4342-B048-85BDC9FD1C3A}</a:tableStyleId>
+              </a:tblPr>
+              <a:tblGrid>
+                <a:gridCol w="2103120"/>
+                <a:gridCol w="4297680"/>
+                <a:gridCol w="4327855"/>
+              </a:tblGrid>
+              <a:tr h="694944">
+                <a:tc>
+                  <a:txBody>
+                    <a:bodyPr/>
+                    <a:lstStyle/>
+                    <a:p>
+                      <a:pPr algn="ctr"/>
+                      <a:r>
+                        <a:rPr sz="1200" b="1">
+                          <a:solidFill>
+                            <a:srgbClr val="FFFFFF"/>
+                          </a:solidFill>
+                          <a:latin typeface="Segoe UI"/>
+                        </a:rPr>
+                        <a:t>Dimension</a:t>
+                      </a:r>
+                    </a:p>
+                  </a:txBody>
+                  <a:tcPr>
+                    <a:solidFill>
+                      <a:srgbClr val="0F172A"/>
+                    </a:solidFill>
+                  </a:tcPr>
+                </a:tc>
+                <a:tc>
+                  <a:txBody>
+                    <a:bodyPr/>
+                    <a:lstStyle/>
+                    <a:p>
+                      <a:pPr algn="ctr"/>
+                      <a:r>
+                        <a:rPr sz="1200" b="1">
+                          <a:solidFill>
+                            <a:srgbClr val="FFFFFF"/>
+                          </a:solidFill>
+                          <a:latin typeface="Segoe UI"/>
+                        </a:rPr>
+                        <a:t>Conventional Informal Approach</a:t>
+                      </a:r>
+                    </a:p>
+                  </a:txBody>
+                  <a:tcPr>
+                    <a:solidFill>
+                      <a:srgbClr val="0F172A"/>
+                    </a:solidFill>
+                  </a:tcPr>
+                </a:tc>
+                <a:tc>
+                  <a:txBody>
+                    <a:bodyPr/>
+                    <a:lstStyle/>
+                    <a:p>
+                      <a:pPr algn="ctr"/>
+                      <a:r>
+                        <a:rPr sz="1200" b="1">
+                          <a:solidFill>
+                            <a:srgbClr val="FFFFFF"/>
+                          </a:solidFill>
+                          <a:latin typeface="Segoe UI"/>
+                        </a:rPr>
+                        <a:t>Fix It Marketplace Solution</a:t>
+                      </a:r>
+                    </a:p>
+                  </a:txBody>
+                  <a:tcPr>
+                    <a:solidFill>
+                      <a:srgbClr val="0F172A"/>
+                    </a:solidFill>
+                  </a:tcPr>
+                </a:tc>
+              </a:tr>
+              <a:tr h="694944">
+                <a:tc>
+                  <a:txBody>
+                    <a:bodyPr/>
+                    <a:lstStyle/>
+                    <a:p>
+                      <a:pPr algn="ctr"/>
+                      <a:r>
+                        <a:rPr sz="1100" b="1">
+                          <a:solidFill>
+                            <a:srgbClr val="4F46E5"/>
+                          </a:solidFill>
+                          <a:latin typeface="Segoe UI"/>
+                        </a:rPr>
+                        <a:t>Discovery &amp; Sourcing</a:t>
+                      </a:r>
+                    </a:p>
+                  </a:txBody>
+                  <a:tcPr>
+                    <a:solidFill>
+                      <a:srgbClr val="F1F5F9"/>
+                    </a:solidFill>
+                  </a:tcPr>
+                </a:tc>
+                <a:tc>
+                  <a:txBody>
+                    <a:bodyPr/>
+                    <a:lstStyle/>
+                    <a:p>
+                      <a:pPr algn="l"/>
+                      <a:r>
+                        <a:rPr sz="1100">
+                          <a:solidFill>
+                            <a:srgbClr val="1E293B"/>
+                          </a:solidFill>
+                          <a:latin typeface="Segoe UI"/>
+                        </a:rPr>
+                        <a:t>Erratic word-of-mouth recommendations, roadside posters, unverified phone contacts</a:t>
+                      </a:r>
+                    </a:p>
+                  </a:txBody>
+                  <a:tcPr>
+                    <a:solidFill>
+                      <a:srgbClr val="F1F5F9"/>
+                    </a:solidFill>
+                  </a:tcPr>
+                </a:tc>
+                <a:tc>
+                  <a:txBody>
+                    <a:bodyPr/>
+                    <a:lstStyle/>
+                    <a:p>
+                      <a:pPr algn="l"/>
+                      <a:r>
+                        <a:rPr sz="1100">
+                          <a:solidFill>
+                            <a:srgbClr val="1E293B"/>
+                          </a:solidFill>
+                          <a:latin typeface="Segoe UI"/>
+                        </a:rPr>
+                        <a:t>Categorized, searchable service directory with live location filtering</a:t>
+                      </a:r>
+                    </a:p>
+                  </a:txBody>
+                  <a:tcPr>
+                    <a:solidFill>
+                      <a:srgbClr val="F1F5F9"/>
+                    </a:solidFill>
+                  </a:tcPr>
+                </a:tc>
+              </a:tr>
+              <a:tr h="694944">
+                <a:tc>
+                  <a:txBody>
+                    <a:bodyPr/>
+                    <a:lstStyle/>
+                    <a:p>
+                      <a:pPr algn="ctr"/>
+                      <a:r>
+                        <a:rPr sz="1100" b="1">
+                          <a:solidFill>
+                            <a:srgbClr val="4F46E5"/>
+                          </a:solidFill>
+                          <a:latin typeface="Segoe UI"/>
+                        </a:rPr>
+                        <a:t>Pricing Model</a:t>
+                      </a:r>
+                    </a:p>
+                  </a:txBody>
+                  <a:tcPr>
+                    <a:solidFill>
+                      <a:srgbClr val="FFFFFF"/>
+                    </a:solidFill>
+                  </a:tcPr>
+                </a:tc>
+                <a:tc>
+                  <a:txBody>
+                    <a:bodyPr/>
+                    <a:lstStyle/>
+                    <a:p>
+                      <a:pPr algn="l"/>
+                      <a:r>
+                        <a:rPr sz="1100">
+                          <a:solidFill>
+                            <a:srgbClr val="1E293B"/>
+                          </a:solidFill>
+                          <a:latin typeface="Segoe UI"/>
+                        </a:rPr>
+                        <a:t>Arbitrary haggling, unpredictable material markups, hidden fees</a:t>
+                      </a:r>
+                    </a:p>
+                  </a:txBody>
+                  <a:tcPr>
+                    <a:solidFill>
+                      <a:srgbClr val="FFFFFF"/>
+                    </a:solidFill>
+                  </a:tcPr>
+                </a:tc>
+                <a:tc>
+                  <a:txBody>
+                    <a:bodyPr/>
+                    <a:lstStyle/>
+                    <a:p>
+                      <a:pPr algn="l"/>
+                      <a:r>
+                        <a:rPr sz="1100">
+                          <a:solidFill>
+                            <a:srgbClr val="1E293B"/>
+                          </a:solidFill>
+                          <a:latin typeface="Segoe UI"/>
+                        </a:rPr>
+                        <a:t>Fixed package pricing (GHS) with explicit work scope and escrow tracking</a:t>
+                      </a:r>
+                    </a:p>
+                  </a:txBody>
+                  <a:tcPr>
+                    <a:solidFill>
+                      <a:srgbClr val="FFFFFF"/>
+                    </a:solidFill>
+                  </a:tcPr>
+                </a:tc>
+              </a:tr>
+              <a:tr h="694944">
+                <a:tc>
+                  <a:txBody>
+                    <a:bodyPr/>
+                    <a:lstStyle/>
+                    <a:p>
+                      <a:pPr algn="ctr"/>
+                      <a:r>
+                        <a:rPr sz="1100" b="1">
+                          <a:solidFill>
+                            <a:srgbClr val="4F46E5"/>
+                          </a:solidFill>
+                          <a:latin typeface="Segoe UI"/>
+                        </a:rPr>
+                        <a:t>Trust &amp; Security</a:t>
+                      </a:r>
+                    </a:p>
+                  </a:txBody>
+                  <a:tcPr>
+                    <a:solidFill>
+                      <a:srgbClr val="F1F5F9"/>
+                    </a:solidFill>
+                  </a:tcPr>
+                </a:tc>
+                <a:tc>
+                  <a:txBody>
+                    <a:bodyPr/>
+                    <a:lstStyle/>
+                    <a:p>
+                      <a:pPr algn="l"/>
+                      <a:r>
+                        <a:rPr sz="1100">
+                          <a:solidFill>
+                            <a:srgbClr val="1E293B"/>
+                          </a:solidFill>
+                          <a:latin typeface="Segoe UI"/>
+                        </a:rPr>
+                        <a:t>Zero background verification, personal safety risks, unvetted strangers</a:t>
+                      </a:r>
+                    </a:p>
+                  </a:txBody>
+                  <a:tcPr>
+                    <a:solidFill>
+                      <a:srgbClr val="F1F5F9"/>
+                    </a:solidFill>
+                  </a:tcPr>
+                </a:tc>
+                <a:tc>
+                  <a:txBody>
+                    <a:bodyPr/>
+                    <a:lstStyle/>
+                    <a:p>
+                      <a:pPr algn="l"/>
+                      <a:r>
+                        <a:rPr sz="1100">
+                          <a:solidFill>
+                            <a:srgbClr val="1E293B"/>
+                          </a:solidFill>
+                          <a:latin typeface="Segoe UI"/>
+                        </a:rPr>
+                        <a:t>Clerk verified profiles, admin identity vetting, authentic client reviews</a:t>
+                      </a:r>
+                    </a:p>
+                  </a:txBody>
+                  <a:tcPr>
+                    <a:solidFill>
+                      <a:srgbClr val="F1F5F9"/>
+                    </a:solidFill>
+                  </a:tcPr>
+                </a:tc>
+              </a:tr>
+              <a:tr h="694944">
+                <a:tc>
+                  <a:txBody>
+                    <a:bodyPr/>
+                    <a:lstStyle/>
+                    <a:p>
+                      <a:pPr algn="ctr"/>
+                      <a:r>
+                        <a:rPr sz="1100" b="1">
+                          <a:solidFill>
+                            <a:srgbClr val="4F46E5"/>
+                          </a:solidFill>
+                          <a:latin typeface="Segoe UI"/>
+                        </a:rPr>
+                        <a:t>Communication</a:t>
+                      </a:r>
+                    </a:p>
+                  </a:txBody>
+                  <a:tcPr>
+                    <a:solidFill>
+                      <a:srgbClr val="FFFFFF"/>
+                    </a:solidFill>
+                  </a:tcPr>
+                </a:tc>
+                <a:tc>
+                  <a:txBody>
+                    <a:bodyPr/>
+                    <a:lstStyle/>
+                    <a:p>
+                      <a:pPr algn="l"/>
+                      <a:r>
+                        <a:rPr sz="1100">
+                          <a:solidFill>
+                            <a:srgbClr val="1E293B"/>
+                          </a:solidFill>
+                          <a:latin typeface="Segoe UI"/>
+                        </a:rPr>
+                        <a:t>Missed phone calls, delayed coordination, lack of appointment scheduling</a:t>
+                      </a:r>
+                    </a:p>
+                  </a:txBody>
+                  <a:tcPr>
+                    <a:solidFill>
+                      <a:srgbClr val="FFFFFF"/>
+                    </a:solidFill>
+                  </a:tcPr>
+                </a:tc>
+                <a:tc>
+                  <a:txBody>
+                    <a:bodyPr/>
+                    <a:lstStyle/>
+                    <a:p>
+                      <a:pPr algn="l"/>
+                      <a:r>
+                        <a:rPr sz="1100">
+                          <a:solidFill>
+                            <a:srgbClr val="1E293B"/>
+                          </a:solidFill>
+                          <a:latin typeface="Segoe UI"/>
+                        </a:rPr>
+                        <a:t>Automated scheduling system combined with direct Ghana WhatsApp integration</a:t>
+                      </a:r>
+                    </a:p>
+                  </a:txBody>
+                  <a:tcPr>
+                    <a:solidFill>
+                      <a:srgbClr val="FFFFFF"/>
+                    </a:solidFill>
+                  </a:tcPr>
+                </a:tc>
+              </a:tr>
+            </a:tbl>
+          </a:graphicData>
+        </a:graphic>
+      </p:graphicFrame>
+      <p:sp>
+        <p:nvSpPr>
+          <p:cNvPr id="7" name="Rounded Rectangle 6"/>
           <p:cNvSpPr/>
           <p:nvPr/>
         </p:nvSpPr>
         <p:spPr>
           <a:xfrm>
-            <a:off x="731520" y="1463040"/>
-            <a:ext cx="10698480" cy="1097280"/>
+            <a:off x="731520" y="5669280"/>
+            <a:ext cx="10728655" cy="731520"/>
           </a:xfrm>
           <a:prstGeom prst="roundRect">
             <a:avLst/>
           </a:prstGeom>
           <a:solidFill>
-            <a:srgbClr val="FFFFFF"/>
+            <a:srgbClr val="059669"/>
           </a:solidFill>
           <a:ln w="12700">
             <a:solidFill>
-              <a:srgbClr val="E2E8F0"/>
+              <a:srgbClr val="059669"/>
             </a:solidFill>
           </a:ln>
         </p:spPr>
@@ -9624,14 +10676,14 @@
       </p:sp>
       <p:sp>
         <p:nvSpPr>
-          <p:cNvPr id="6" name="TextBox 5"/>
+          <p:cNvPr id="8" name="TextBox 7"/>
           <p:cNvSpPr txBox="1"/>
           <p:nvPr/>
         </p:nvSpPr>
         <p:spPr>
           <a:xfrm>
-            <a:off x="1005840" y="1572768"/>
-            <a:ext cx="10149840" cy="868680"/>
+            <a:off x="914400" y="5760720"/>
+            <a:ext cx="10362895" cy="548640"/>
           </a:xfrm>
           <a:prstGeom prst="rect">
             <a:avLst/>
@@ -9639,328 +10691,19 @@
           <a:noFill/>
         </p:spPr>
         <p:txBody>
-          <a:bodyPr wrap="square">
+          <a:bodyPr wrap="none">
             <a:spAutoFit/>
           </a:bodyPr>
           <a:lstStyle/>
           <a:p>
             <a:r>
-              <a:rPr sz="1500" b="1">
-                <a:solidFill>
-                  <a:srgbClr val="4F46E5"/>
-                </a:solidFill>
-              </a:rPr>
-              <a:t>Two-Sided Market Economics  </a:t>
-            </a:r>
-            <a:r>
-              <a:rPr sz="1200" i="1">
-                <a:solidFill>
-                  <a:srgbClr val="64748B"/>
-                </a:solidFill>
-              </a:rPr>
-              <a:t>— Rochet &amp; Tirole (2003) / Armstrong (2006)
-</a:t>
-            </a:r>
-          </a:p>
-          <a:p>
-            <a:r>
-              <a:rPr sz="1150">
-                <a:solidFill>
-                  <a:srgbClr val="1E293B"/>
-                </a:solidFill>
-              </a:rPr>
-              <a:t>Platforms create economic surplus by intermediating buyers and sellers with indirect network externalities. Addressed the 'chicken-and-egg' dilemma by providing zero-barrier artisan self-onboarding and transparent customer search.</a:t>
-            </a:r>
-          </a:p>
-        </p:txBody>
-      </p:sp>
-      <p:sp>
-        <p:nvSpPr>
-          <p:cNvPr id="7" name="Rounded Rectangle 6"/>
-          <p:cNvSpPr/>
-          <p:nvPr/>
-        </p:nvSpPr>
-        <p:spPr>
-          <a:xfrm>
-            <a:off x="731520" y="2697480"/>
-            <a:ext cx="10698480" cy="1097280"/>
-          </a:xfrm>
-          <a:prstGeom prst="roundRect">
-            <a:avLst/>
-          </a:prstGeom>
-          <a:solidFill>
-            <a:srgbClr val="FFFFFF"/>
-          </a:solidFill>
-          <a:ln w="12700">
-            <a:solidFill>
-              <a:srgbClr val="E2E8F0"/>
-            </a:solidFill>
-          </a:ln>
-        </p:spPr>
-        <p:style>
-          <a:lnRef idx="1">
-            <a:schemeClr val="accent1"/>
-          </a:lnRef>
-          <a:fillRef idx="3">
-            <a:schemeClr val="accent1"/>
-          </a:fillRef>
-          <a:effectRef idx="2">
-            <a:schemeClr val="accent1"/>
-          </a:effectRef>
-          <a:fontRef idx="minor">
-            <a:schemeClr val="lt1"/>
-          </a:fontRef>
-        </p:style>
-        <p:txBody>
-          <a:bodyPr rtlCol="0" anchor="ctr"/>
-          <a:lstStyle/>
-          <a:p>
-            <a:pPr algn="ctr"/>
-          </a:p>
-        </p:txBody>
-      </p:sp>
-      <p:sp>
-        <p:nvSpPr>
-          <p:cNvPr id="8" name="TextBox 7"/>
-          <p:cNvSpPr txBox="1"/>
-          <p:nvPr/>
-        </p:nvSpPr>
-        <p:spPr>
-          <a:xfrm>
-            <a:off x="1005840" y="2807208"/>
-            <a:ext cx="10149840" cy="868680"/>
-          </a:xfrm>
-          <a:prstGeom prst="rect">
-            <a:avLst/>
-          </a:prstGeom>
-          <a:noFill/>
-        </p:spPr>
-        <p:txBody>
-          <a:bodyPr wrap="square">
-            <a:spAutoFit/>
-          </a:bodyPr>
-          <a:lstStyle/>
-          <a:p>
-            <a:r>
-              <a:rPr sz="1500" b="1">
-                <a:solidFill>
-                  <a:srgbClr val="4F46E5"/>
-                </a:solidFill>
-              </a:rPr>
-              <a:t>Information Asymmetry &amp; Lemons  </a:t>
-            </a:r>
-            <a:r>
-              <a:rPr sz="1200" i="1">
-                <a:solidFill>
-                  <a:srgbClr val="64748B"/>
-                </a:solidFill>
-              </a:rPr>
-              <a:t>— George Akerlof (1970)
-</a:t>
-            </a:r>
-          </a:p>
-          <a:p>
-            <a:r>
-              <a:rPr sz="1150">
-                <a:solidFill>
-                  <a:srgbClr val="1E293B"/>
-                </a:solidFill>
-              </a:rPr>
-              <a:t>Quality uncertainty causes adverse selection, driving skilled artisans out of the market as low-quality providers underbid. Fix It solves this by replacing quality ambiguity with verifiable digital reputation capital.</a:t>
-            </a:r>
-          </a:p>
-        </p:txBody>
-      </p:sp>
-      <p:sp>
-        <p:nvSpPr>
-          <p:cNvPr id="9" name="Rounded Rectangle 8"/>
-          <p:cNvSpPr/>
-          <p:nvPr/>
-        </p:nvSpPr>
-        <p:spPr>
-          <a:xfrm>
-            <a:off x="731520" y="3931920"/>
-            <a:ext cx="10698480" cy="1097280"/>
-          </a:xfrm>
-          <a:prstGeom prst="roundRect">
-            <a:avLst/>
-          </a:prstGeom>
-          <a:solidFill>
-            <a:srgbClr val="FFFFFF"/>
-          </a:solidFill>
-          <a:ln w="12700">
-            <a:solidFill>
-              <a:srgbClr val="E2E8F0"/>
-            </a:solidFill>
-          </a:ln>
-        </p:spPr>
-        <p:style>
-          <a:lnRef idx="1">
-            <a:schemeClr val="accent1"/>
-          </a:lnRef>
-          <a:fillRef idx="3">
-            <a:schemeClr val="accent1"/>
-          </a:fillRef>
-          <a:effectRef idx="2">
-            <a:schemeClr val="accent1"/>
-          </a:effectRef>
-          <a:fontRef idx="minor">
-            <a:schemeClr val="lt1"/>
-          </a:fontRef>
-        </p:style>
-        <p:txBody>
-          <a:bodyPr rtlCol="0" anchor="ctr"/>
-          <a:lstStyle/>
-          <a:p>
-            <a:pPr algn="ctr"/>
-          </a:p>
-        </p:txBody>
-      </p:sp>
-      <p:sp>
-        <p:nvSpPr>
-          <p:cNvPr id="10" name="TextBox 9"/>
-          <p:cNvSpPr txBox="1"/>
-          <p:nvPr/>
-        </p:nvSpPr>
-        <p:spPr>
-          <a:xfrm>
-            <a:off x="1005840" y="4041648"/>
-            <a:ext cx="10149840" cy="868680"/>
-          </a:xfrm>
-          <a:prstGeom prst="rect">
-            <a:avLst/>
-          </a:prstGeom>
-          <a:noFill/>
-        </p:spPr>
-        <p:txBody>
-          <a:bodyPr wrap="square">
-            <a:spAutoFit/>
-          </a:bodyPr>
-          <a:lstStyle/>
-          <a:p>
-            <a:r>
-              <a:rPr sz="1500" b="1">
-                <a:solidFill>
-                  <a:srgbClr val="4F46E5"/>
-                </a:solidFill>
-              </a:rPr>
-              <a:t>Signaling Theory in Digital Labor  </a:t>
-            </a:r>
-            <a:r>
-              <a:rPr sz="1200" i="1">
-                <a:solidFill>
-                  <a:srgbClr val="64748B"/>
-                </a:solidFill>
-              </a:rPr>
-              <a:t>— Michael Spence (1973)
-</a:t>
-            </a:r>
-          </a:p>
-          <a:p>
-            <a:r>
-              <a:rPr sz="1150">
-                <a:solidFill>
-                  <a:srgbClr val="1E293B"/>
-                </a:solidFill>
-              </a:rPr>
-              <a:t>High-quality providers must emit costly, verifiable signals that low-quality imitators cannot easily replicate. Operationalized through Clerk identity vetting, trade licensing badges, and authentic client reviews.</a:t>
-            </a:r>
-          </a:p>
-        </p:txBody>
-      </p:sp>
-      <p:sp>
-        <p:nvSpPr>
-          <p:cNvPr id="11" name="Rounded Rectangle 10"/>
-          <p:cNvSpPr/>
-          <p:nvPr/>
-        </p:nvSpPr>
-        <p:spPr>
-          <a:xfrm>
-            <a:off x="731520" y="5166360"/>
-            <a:ext cx="10698480" cy="1097280"/>
-          </a:xfrm>
-          <a:prstGeom prst="roundRect">
-            <a:avLst/>
-          </a:prstGeom>
-          <a:solidFill>
-            <a:srgbClr val="FFFFFF"/>
-          </a:solidFill>
-          <a:ln w="12700">
-            <a:solidFill>
-              <a:srgbClr val="E2E8F0"/>
-            </a:solidFill>
-          </a:ln>
-        </p:spPr>
-        <p:style>
-          <a:lnRef idx="1">
-            <a:schemeClr val="accent1"/>
-          </a:lnRef>
-          <a:fillRef idx="3">
-            <a:schemeClr val="accent1"/>
-          </a:fillRef>
-          <a:effectRef idx="2">
-            <a:schemeClr val="accent1"/>
-          </a:effectRef>
-          <a:fontRef idx="minor">
-            <a:schemeClr val="lt1"/>
-          </a:fontRef>
-        </p:style>
-        <p:txBody>
-          <a:bodyPr rtlCol="0" anchor="ctr"/>
-          <a:lstStyle/>
-          <a:p>
-            <a:pPr algn="ctr"/>
-          </a:p>
-        </p:txBody>
-      </p:sp>
-      <p:sp>
-        <p:nvSpPr>
-          <p:cNvPr id="12" name="TextBox 11"/>
-          <p:cNvSpPr txBox="1"/>
-          <p:nvPr/>
-        </p:nvSpPr>
-        <p:spPr>
-          <a:xfrm>
-            <a:off x="1005840" y="5276088"/>
-            <a:ext cx="10149840" cy="868680"/>
-          </a:xfrm>
-          <a:prstGeom prst="rect">
-            <a:avLst/>
-          </a:prstGeom>
-          <a:noFill/>
-        </p:spPr>
-        <p:txBody>
-          <a:bodyPr wrap="square">
-            <a:spAutoFit/>
-          </a:bodyPr>
-          <a:lstStyle/>
-          <a:p>
-            <a:r>
-              <a:rPr sz="1500" b="1">
-                <a:solidFill>
-                  <a:srgbClr val="4F46E5"/>
-                </a:solidFill>
-              </a:rPr>
-              <a:t>Technology Acceptance Model (TAM)  </a:t>
-            </a:r>
-            <a:r>
-              <a:rPr sz="1200" i="1">
-                <a:solidFill>
-                  <a:srgbClr val="64748B"/>
-                </a:solidFill>
-              </a:rPr>
-              <a:t>— Fred Davis (1989)
-</a:t>
-            </a:r>
-          </a:p>
-          <a:p>
-            <a:r>
-              <a:rPr sz="1150">
-                <a:solidFill>
-                  <a:srgbClr val="1E293B"/>
-                </a:solidFill>
-              </a:rPr>
-              <a:t>Adoption in emerging markets depends heavily on Perceived Ease of Use (PEOU) and Cultural Familiarity. Combining web automation with ubiquitous WhatsApp messaging satisfies Ghanaian consumer habits.</a:t>
+              <a:rPr sz="1250" b="1">
+                <a:solidFill>
+                  <a:srgbClr val="FFFFFF"/>
+                </a:solidFill>
+                <a:latin typeface="Segoe UI"/>
+              </a:rPr>
+              <a:t>Summary: Without an accountable digital intermediary, reliable artisans cannot build reputational capital, while consumers suffer financial losses and safety hazards.</a:t>
             </a:r>
           </a:p>
         </p:txBody>
@@ -10020,7 +10763,7 @@
                 </a:solidFill>
                 <a:latin typeface="Segoe UI"/>
               </a:rPr>
-              <a:t>CHAPTER II: INDUSTRY BENCHMARK</a:t>
+              <a:t>CHAPTER I: INTRODUCTION</a:t>
             </a:r>
           </a:p>
         </p:txBody>
@@ -10034,7 +10777,7 @@
         <p:spPr>
           <a:xfrm>
             <a:off x="731520" y="658368"/>
-            <a:ext cx="10698480" cy="548640"/>
+            <a:ext cx="10698480" cy="502920"/>
           </a:xfrm>
           <a:prstGeom prst="rect">
             <a:avLst/>
@@ -10048,13 +10791,13 @@
           <a:lstStyle/>
           <a:p>
             <a:r>
-              <a:rPr sz="2200" b="1">
+              <a:rPr sz="2100" b="1">
                 <a:solidFill>
                   <a:srgbClr val="0F172A"/>
                 </a:solidFill>
                 <a:latin typeface="Segoe UI"/>
               </a:rPr>
-              <a:t>Competitive Analysis: Global vs. Regional Platforms</a:t>
+              <a:t>1.4 Scope of Work &amp; 1.5 Thesis Outline</a:t>
             </a:r>
           </a:p>
         </p:txBody>
@@ -10067,7 +10810,7 @@
         </p:nvSpPr>
         <p:spPr>
           <a:xfrm>
-            <a:off x="731520" y="1234440"/>
+            <a:off x="731520" y="1207008"/>
             <a:ext cx="10728655" cy="18288"/>
           </a:xfrm>
           <a:prstGeom prst="rect">
@@ -10104,757 +10847,26 @@
           </a:p>
         </p:txBody>
       </p:sp>
-      <p:graphicFrame>
-        <p:nvGraphicFramePr>
-          <p:cNvPr id="5" name="Table 4"/>
-          <p:cNvGraphicFramePr>
-            <a:graphicFrameLocks noGrp="1"/>
-          </p:cNvGraphicFramePr>
-          <p:nvPr/>
-        </p:nvGraphicFramePr>
-        <p:xfrm>
-          <a:off x="731520" y="1463040"/>
-          <a:ext cx="10698480" cy="4389120"/>
-        </p:xfrm>
-        <a:graphic>
-          <a:graphicData uri="http://schemas.openxmlformats.org/drawingml/2006/table">
-            <a:tbl>
-              <a:tblPr firstRow="1" bandRow="1">
-                <a:tableStyleId>{5C22544A-7EE6-4342-B048-85BDC9FD1C3A}</a:tableStyleId>
-              </a:tblPr>
-              <a:tblGrid>
-                <a:gridCol w="2011680"/>
-                <a:gridCol w="2011680"/>
-                <a:gridCol w="2103120"/>
-                <a:gridCol w="2286000"/>
-                <a:gridCol w="2286000"/>
-              </a:tblGrid>
-              <a:tr h="731520">
-                <a:tc>
-                  <a:txBody>
-                    <a:bodyPr/>
-                    <a:lstStyle/>
-                    <a:p>
-                      <a:pPr algn="ctr"/>
-                      <a:r>
-                        <a:rPr sz="1200" b="1">
-                          <a:solidFill>
-                            <a:srgbClr val="FFFFFF"/>
-                          </a:solidFill>
-                          <a:latin typeface="Segoe UI"/>
-                        </a:rPr>
-                        <a:t>Platform</a:t>
-                      </a:r>
-                    </a:p>
-                  </a:txBody>
-                  <a:tcPr>
-                    <a:solidFill>
-                      <a:srgbClr val="0F172A"/>
-                    </a:solidFill>
-                  </a:tcPr>
-                </a:tc>
-                <a:tc>
-                  <a:txBody>
-                    <a:bodyPr/>
-                    <a:lstStyle/>
-                    <a:p>
-                      <a:pPr algn="ctr"/>
-                      <a:r>
-                        <a:rPr sz="1200" b="1">
-                          <a:solidFill>
-                            <a:srgbClr val="FFFFFF"/>
-                          </a:solidFill>
-                          <a:latin typeface="Segoe UI"/>
-                        </a:rPr>
-                        <a:t>Target Market</a:t>
-                      </a:r>
-                    </a:p>
-                  </a:txBody>
-                  <a:tcPr>
-                    <a:solidFill>
-                      <a:srgbClr val="0F172A"/>
-                    </a:solidFill>
-                  </a:tcPr>
-                </a:tc>
-                <a:tc>
-                  <a:txBody>
-                    <a:bodyPr/>
-                    <a:lstStyle/>
-                    <a:p>
-                      <a:pPr algn="ctr"/>
-                      <a:r>
-                        <a:rPr sz="1200" b="1">
-                          <a:solidFill>
-                            <a:srgbClr val="FFFFFF"/>
-                          </a:solidFill>
-                          <a:latin typeface="Segoe UI"/>
-                        </a:rPr>
-                        <a:t>Pricing Paradigm</a:t>
-                      </a:r>
-                    </a:p>
-                  </a:txBody>
-                  <a:tcPr>
-                    <a:solidFill>
-                      <a:srgbClr val="0F172A"/>
-                    </a:solidFill>
-                  </a:tcPr>
-                </a:tc>
-                <a:tc>
-                  <a:txBody>
-                    <a:bodyPr/>
-                    <a:lstStyle/>
-                    <a:p>
-                      <a:pPr algn="ctr"/>
-                      <a:r>
-                        <a:rPr sz="1200" b="1">
-                          <a:solidFill>
-                            <a:srgbClr val="FFFFFF"/>
-                          </a:solidFill>
-                          <a:latin typeface="Segoe UI"/>
-                        </a:rPr>
-                        <a:t>Trust &amp; Verification</a:t>
-                      </a:r>
-                    </a:p>
-                  </a:txBody>
-                  <a:tcPr>
-                    <a:solidFill>
-                      <a:srgbClr val="0F172A"/>
-                    </a:solidFill>
-                  </a:tcPr>
-                </a:tc>
-                <a:tc>
-                  <a:txBody>
-                    <a:bodyPr/>
-                    <a:lstStyle/>
-                    <a:p>
-                      <a:pPr algn="ctr"/>
-                      <a:r>
-                        <a:rPr sz="1200" b="1">
-                          <a:solidFill>
-                            <a:srgbClr val="FFFFFF"/>
-                          </a:solidFill>
-                          <a:latin typeface="Segoe UI"/>
-                        </a:rPr>
-                        <a:t>Communication Bridge</a:t>
-                      </a:r>
-                    </a:p>
-                  </a:txBody>
-                  <a:tcPr>
-                    <a:solidFill>
-                      <a:srgbClr val="0F172A"/>
-                    </a:solidFill>
-                  </a:tcPr>
-                </a:tc>
-              </a:tr>
-              <a:tr h="731520">
-                <a:tc>
-                  <a:txBody>
-                    <a:bodyPr/>
-                    <a:lstStyle/>
-                    <a:p>
-                      <a:pPr algn="ctr"/>
-                      <a:r>
-                        <a:rPr sz="1100">
-                          <a:solidFill>
-                            <a:srgbClr val="1E293B"/>
-                          </a:solidFill>
-                          <a:latin typeface="Segoe UI"/>
-                        </a:rPr>
-                        <a:t>TaskRabbit</a:t>
-                      </a:r>
-                    </a:p>
-                  </a:txBody>
-                  <a:tcPr>
-                    <a:solidFill>
-                      <a:srgbClr val="FFFFFF"/>
-                    </a:solidFill>
-                  </a:tcPr>
-                </a:tc>
-                <a:tc>
-                  <a:txBody>
-                    <a:bodyPr/>
-                    <a:lstStyle/>
-                    <a:p>
-                      <a:pPr algn="l"/>
-                      <a:r>
-                        <a:rPr sz="1100">
-                          <a:solidFill>
-                            <a:srgbClr val="1E293B"/>
-                          </a:solidFill>
-                          <a:latin typeface="Segoe UI"/>
-                        </a:rPr>
-                        <a:t>North America / EU</a:t>
-                      </a:r>
-                    </a:p>
-                  </a:txBody>
-                  <a:tcPr>
-                    <a:solidFill>
-                      <a:srgbClr val="FFFFFF"/>
-                    </a:solidFill>
-                  </a:tcPr>
-                </a:tc>
-                <a:tc>
-                  <a:txBody>
-                    <a:bodyPr/>
-                    <a:lstStyle/>
-                    <a:p>
-                      <a:pPr algn="l"/>
-                      <a:r>
-                        <a:rPr sz="1100">
-                          <a:solidFill>
-                            <a:srgbClr val="1E293B"/>
-                          </a:solidFill>
-                          <a:latin typeface="Segoe UI"/>
-                        </a:rPr>
-                        <a:t>Hourly rates (USD)</a:t>
-                      </a:r>
-                    </a:p>
-                  </a:txBody>
-                  <a:tcPr>
-                    <a:solidFill>
-                      <a:srgbClr val="FFFFFF"/>
-                    </a:solidFill>
-                  </a:tcPr>
-                </a:tc>
-                <a:tc>
-                  <a:txBody>
-                    <a:bodyPr/>
-                    <a:lstStyle/>
-                    <a:p>
-                      <a:pPr algn="l"/>
-                      <a:r>
-                        <a:rPr sz="1100">
-                          <a:solidFill>
-                            <a:srgbClr val="1E293B"/>
-                          </a:solidFill>
-                          <a:latin typeface="Segoe UI"/>
-                        </a:rPr>
-                        <a:t>Credit checks, formal insurance</a:t>
-                      </a:r>
-                    </a:p>
-                  </a:txBody>
-                  <a:tcPr>
-                    <a:solidFill>
-                      <a:srgbClr val="FFFFFF"/>
-                    </a:solidFill>
-                  </a:tcPr>
-                </a:tc>
-                <a:tc>
-                  <a:txBody>
-                    <a:bodyPr/>
-                    <a:lstStyle/>
-                    <a:p>
-                      <a:pPr algn="l"/>
-                      <a:r>
-                        <a:rPr sz="1100">
-                          <a:solidFill>
-                            <a:srgbClr val="1E293B"/>
-                          </a:solidFill>
-                          <a:latin typeface="Segoe UI"/>
-                        </a:rPr>
-                        <a:t>In-app proprietary chat only</a:t>
-                      </a:r>
-                    </a:p>
-                  </a:txBody>
-                  <a:tcPr>
-                    <a:solidFill>
-                      <a:srgbClr val="FFFFFF"/>
-                    </a:solidFill>
-                  </a:tcPr>
-                </a:tc>
-              </a:tr>
-              <a:tr h="731520">
-                <a:tc>
-                  <a:txBody>
-                    <a:bodyPr/>
-                    <a:lstStyle/>
-                    <a:p>
-                      <a:pPr algn="ctr"/>
-                      <a:r>
-                        <a:rPr sz="1100">
-                          <a:solidFill>
-                            <a:srgbClr val="1E293B"/>
-                          </a:solidFill>
-                          <a:latin typeface="Segoe UI"/>
-                        </a:rPr>
-                        <a:t>Urban Company</a:t>
-                      </a:r>
-                    </a:p>
-                  </a:txBody>
-                  <a:tcPr>
-                    <a:solidFill>
-                      <a:srgbClr val="FFFFFF"/>
-                    </a:solidFill>
-                  </a:tcPr>
-                </a:tc>
-                <a:tc>
-                  <a:txBody>
-                    <a:bodyPr/>
-                    <a:lstStyle/>
-                    <a:p>
-                      <a:pPr algn="l"/>
-                      <a:r>
-                        <a:rPr sz="1100">
-                          <a:solidFill>
-                            <a:srgbClr val="1E293B"/>
-                          </a:solidFill>
-                          <a:latin typeface="Segoe UI"/>
-                        </a:rPr>
-                        <a:t>India / UAE</a:t>
-                      </a:r>
-                    </a:p>
-                  </a:txBody>
-                  <a:tcPr>
-                    <a:solidFill>
-                      <a:srgbClr val="FFFFFF"/>
-                    </a:solidFill>
-                  </a:tcPr>
-                </a:tc>
-                <a:tc>
-                  <a:txBody>
-                    <a:bodyPr/>
-                    <a:lstStyle/>
-                    <a:p>
-                      <a:pPr algn="l"/>
-                      <a:r>
-                        <a:rPr sz="1100">
-                          <a:solidFill>
-                            <a:srgbClr val="1E293B"/>
-                          </a:solidFill>
-                          <a:latin typeface="Segoe UI"/>
-                        </a:rPr>
-                        <a:t>Fixed standardized tiers</a:t>
-                      </a:r>
-                    </a:p>
-                  </a:txBody>
-                  <a:tcPr>
-                    <a:solidFill>
-                      <a:srgbClr val="FFFFFF"/>
-                    </a:solidFill>
-                  </a:tcPr>
-                </a:tc>
-                <a:tc>
-                  <a:txBody>
-                    <a:bodyPr/>
-                    <a:lstStyle/>
-                    <a:p>
-                      <a:pPr algn="l"/>
-                      <a:r>
-                        <a:rPr sz="1100">
-                          <a:solidFill>
-                            <a:srgbClr val="1E293B"/>
-                          </a:solidFill>
-                          <a:latin typeface="Segoe UI"/>
-                        </a:rPr>
-                        <a:t>Comprehensive technical audits</a:t>
-                      </a:r>
-                    </a:p>
-                  </a:txBody>
-                  <a:tcPr>
-                    <a:solidFill>
-                      <a:srgbClr val="FFFFFF"/>
-                    </a:solidFill>
-                  </a:tcPr>
-                </a:tc>
-                <a:tc>
-                  <a:txBody>
-                    <a:bodyPr/>
-                    <a:lstStyle/>
-                    <a:p>
-                      <a:pPr algn="l"/>
-                      <a:r>
-                        <a:rPr sz="1100">
-                          <a:solidFill>
-                            <a:srgbClr val="1E293B"/>
-                          </a:solidFill>
-                          <a:latin typeface="Segoe UI"/>
-                        </a:rPr>
-                        <a:t>Telephony call masking</a:t>
-                      </a:r>
-                    </a:p>
-                  </a:txBody>
-                  <a:tcPr>
-                    <a:solidFill>
-                      <a:srgbClr val="FFFFFF"/>
-                    </a:solidFill>
-                  </a:tcPr>
-                </a:tc>
-              </a:tr>
-              <a:tr h="731520">
-                <a:tc>
-                  <a:txBody>
-                    <a:bodyPr/>
-                    <a:lstStyle/>
-                    <a:p>
-                      <a:pPr algn="ctr"/>
-                      <a:r>
-                        <a:rPr sz="1100">
-                          <a:solidFill>
-                            <a:srgbClr val="1E293B"/>
-                          </a:solidFill>
-                          <a:latin typeface="Segoe UI"/>
-                        </a:rPr>
-                        <a:t>Jiji Ghana</a:t>
-                      </a:r>
-                    </a:p>
-                  </a:txBody>
-                  <a:tcPr>
-                    <a:solidFill>
-                      <a:srgbClr val="FFFFFF"/>
-                    </a:solidFill>
-                  </a:tcPr>
-                </a:tc>
-                <a:tc>
-                  <a:txBody>
-                    <a:bodyPr/>
-                    <a:lstStyle/>
-                    <a:p>
-                      <a:pPr algn="l"/>
-                      <a:r>
-                        <a:rPr sz="1100">
-                          <a:solidFill>
-                            <a:srgbClr val="1E293B"/>
-                          </a:solidFill>
-                          <a:latin typeface="Segoe UI"/>
-                        </a:rPr>
-                        <a:t>Ghana / Nigeria</a:t>
-                      </a:r>
-                    </a:p>
-                  </a:txBody>
-                  <a:tcPr>
-                    <a:solidFill>
-                      <a:srgbClr val="FFFFFF"/>
-                    </a:solidFill>
-                  </a:tcPr>
-                </a:tc>
-                <a:tc>
-                  <a:txBody>
-                    <a:bodyPr/>
-                    <a:lstStyle/>
-                    <a:p>
-                      <a:pPr algn="l"/>
-                      <a:r>
-                        <a:rPr sz="1100">
-                          <a:solidFill>
-                            <a:srgbClr val="1E293B"/>
-                          </a:solidFill>
-                          <a:latin typeface="Segoe UI"/>
-                        </a:rPr>
-                        <a:t>Unregulated classifieds</a:t>
-                      </a:r>
-                    </a:p>
-                  </a:txBody>
-                  <a:tcPr>
-                    <a:solidFill>
-                      <a:srgbClr val="FFFFFF"/>
-                    </a:solidFill>
-                  </a:tcPr>
-                </a:tc>
-                <a:tc>
-                  <a:txBody>
-                    <a:bodyPr/>
-                    <a:lstStyle/>
-                    <a:p>
-                      <a:pPr algn="l"/>
-                      <a:r>
-                        <a:rPr sz="1100">
-                          <a:solidFill>
-                            <a:srgbClr val="1E293B"/>
-                          </a:solidFill>
-                          <a:latin typeface="Segoe UI"/>
-                        </a:rPr>
-                        <a:t>Basic SMS token (High fraud risk)</a:t>
-                      </a:r>
-                    </a:p>
-                  </a:txBody>
-                  <a:tcPr>
-                    <a:solidFill>
-                      <a:srgbClr val="FFFFFF"/>
-                    </a:solidFill>
-                  </a:tcPr>
-                </a:tc>
-                <a:tc>
-                  <a:txBody>
-                    <a:bodyPr/>
-                    <a:lstStyle/>
-                    <a:p>
-                      <a:pPr algn="l"/>
-                      <a:r>
-                        <a:rPr sz="1100">
-                          <a:solidFill>
-                            <a:srgbClr val="1E293B"/>
-                          </a:solidFill>
-                          <a:latin typeface="Segoe UI"/>
-                        </a:rPr>
-                        <a:t>Direct unregulated phone calls</a:t>
-                      </a:r>
-                    </a:p>
-                  </a:txBody>
-                  <a:tcPr>
-                    <a:solidFill>
-                      <a:srgbClr val="FFFFFF"/>
-                    </a:solidFill>
-                  </a:tcPr>
-                </a:tc>
-              </a:tr>
-              <a:tr h="731520">
-                <a:tc>
-                  <a:txBody>
-                    <a:bodyPr/>
-                    <a:lstStyle/>
-                    <a:p>
-                      <a:pPr algn="ctr"/>
-                      <a:r>
-                        <a:rPr sz="1100">
-                          <a:solidFill>
-                            <a:srgbClr val="1E293B"/>
-                          </a:solidFill>
-                          <a:latin typeface="Segoe UI"/>
-                        </a:rPr>
-                        <a:t>Lynk (Defunct)</a:t>
-                      </a:r>
-                    </a:p>
-                  </a:txBody>
-                  <a:tcPr>
-                    <a:solidFill>
-                      <a:srgbClr val="FFFFFF"/>
-                    </a:solidFill>
-                  </a:tcPr>
-                </a:tc>
-                <a:tc>
-                  <a:txBody>
-                    <a:bodyPr/>
-                    <a:lstStyle/>
-                    <a:p>
-                      <a:pPr algn="l"/>
-                      <a:r>
-                        <a:rPr sz="1100">
-                          <a:solidFill>
-                            <a:srgbClr val="1E293B"/>
-                          </a:solidFill>
-                          <a:latin typeface="Segoe UI"/>
-                        </a:rPr>
-                        <a:t>Kenya</a:t>
-                      </a:r>
-                    </a:p>
-                  </a:txBody>
-                  <a:tcPr>
-                    <a:solidFill>
-                      <a:srgbClr val="FFFFFF"/>
-                    </a:solidFill>
-                  </a:tcPr>
-                </a:tc>
-                <a:tc>
-                  <a:txBody>
-                    <a:bodyPr/>
-                    <a:lstStyle/>
-                    <a:p>
-                      <a:pPr algn="l"/>
-                      <a:r>
-                        <a:rPr sz="1100">
-                          <a:solidFill>
-                            <a:srgbClr val="1E293B"/>
-                          </a:solidFill>
-                          <a:latin typeface="Segoe UI"/>
-                        </a:rPr>
-                        <a:t>Job commission matching</a:t>
-                      </a:r>
-                    </a:p>
-                  </a:txBody>
-                  <a:tcPr>
-                    <a:solidFill>
-                      <a:srgbClr val="FFFFFF"/>
-                    </a:solidFill>
-                  </a:tcPr>
-                </a:tc>
-                <a:tc>
-                  <a:txBody>
-                    <a:bodyPr/>
-                    <a:lstStyle/>
-                    <a:p>
-                      <a:pPr algn="l"/>
-                      <a:r>
-                        <a:rPr sz="1100">
-                          <a:solidFill>
-                            <a:srgbClr val="1E293B"/>
-                          </a:solidFill>
-                          <a:latin typeface="Segoe UI"/>
-                        </a:rPr>
-                        <a:t>Trade test audits</a:t>
-                      </a:r>
-                    </a:p>
-                  </a:txBody>
-                  <a:tcPr>
-                    <a:solidFill>
-                      <a:srgbClr val="FFFFFF"/>
-                    </a:solidFill>
-                  </a:tcPr>
-                </a:tc>
-                <a:tc>
-                  <a:txBody>
-                    <a:bodyPr/>
-                    <a:lstStyle/>
-                    <a:p>
-                      <a:pPr algn="l"/>
-                      <a:r>
-                        <a:rPr sz="1100">
-                          <a:solidFill>
-                            <a:srgbClr val="1E293B"/>
-                          </a:solidFill>
-                          <a:latin typeface="Segoe UI"/>
-                        </a:rPr>
-                        <a:t>Manual call center dispatch</a:t>
-                      </a:r>
-                    </a:p>
-                  </a:txBody>
-                  <a:tcPr>
-                    <a:solidFill>
-                      <a:srgbClr val="FFFFFF"/>
-                    </a:solidFill>
-                  </a:tcPr>
-                </a:tc>
-              </a:tr>
-              <a:tr h="731520">
-                <a:tc>
-                  <a:txBody>
-                    <a:bodyPr/>
-                    <a:lstStyle/>
-                    <a:p>
-                      <a:pPr algn="ctr"/>
-                      <a:r>
-                        <a:rPr sz="1100" b="1">
-                          <a:solidFill>
-                            <a:srgbClr val="4F46E5"/>
-                          </a:solidFill>
-                          <a:latin typeface="Segoe UI"/>
-                        </a:rPr>
-                        <a:t>Fix it Marketplace</a:t>
-                      </a:r>
-                    </a:p>
-                  </a:txBody>
-                  <a:tcPr>
-                    <a:solidFill>
-                      <a:srgbClr val="EEF2FF"/>
-                    </a:solidFill>
-                  </a:tcPr>
-                </a:tc>
-                <a:tc>
-                  <a:txBody>
-                    <a:bodyPr/>
-                    <a:lstStyle/>
-                    <a:p>
-                      <a:pPr algn="l"/>
-                      <a:r>
-                        <a:rPr sz="1100" b="1">
-                          <a:solidFill>
-                            <a:srgbClr val="0F172A"/>
-                          </a:solidFill>
-                          <a:latin typeface="Segoe UI"/>
-                        </a:rPr>
-                        <a:t>Ghana (Accra/Kumasi)</a:t>
-                      </a:r>
-                    </a:p>
-                  </a:txBody>
-                  <a:tcPr>
-                    <a:solidFill>
-                      <a:srgbClr val="EEF2FF"/>
-                    </a:solidFill>
-                  </a:tcPr>
-                </a:tc>
-                <a:tc>
-                  <a:txBody>
-                    <a:bodyPr/>
-                    <a:lstStyle/>
-                    <a:p>
-                      <a:pPr algn="l"/>
-                      <a:r>
-                        <a:rPr sz="1100" b="1">
-                          <a:solidFill>
-                            <a:srgbClr val="0F172A"/>
-                          </a:solidFill>
-                          <a:latin typeface="Segoe UI"/>
-                        </a:rPr>
-                        <a:t>Standardized 3-tier GHS packages</a:t>
-                      </a:r>
-                    </a:p>
-                  </a:txBody>
-                  <a:tcPr>
-                    <a:solidFill>
-                      <a:srgbClr val="EEF2FF"/>
-                    </a:solidFill>
-                  </a:tcPr>
-                </a:tc>
-                <a:tc>
-                  <a:txBody>
-                    <a:bodyPr/>
-                    <a:lstStyle/>
-                    <a:p>
-                      <a:pPr algn="l"/>
-                      <a:r>
-                        <a:rPr sz="1100" b="1">
-                          <a:solidFill>
-                            <a:srgbClr val="0F172A"/>
-                          </a:solidFill>
-                          <a:latin typeface="Segoe UI"/>
-                        </a:rPr>
-                        <a:t>Clerk JWT, admin badge, reviews</a:t>
-                      </a:r>
-                    </a:p>
-                  </a:txBody>
-                  <a:tcPr>
-                    <a:solidFill>
-                      <a:srgbClr val="EEF2FF"/>
-                    </a:solidFill>
-                  </a:tcPr>
-                </a:tc>
-                <a:tc>
-                  <a:txBody>
-                    <a:bodyPr/>
-                    <a:lstStyle/>
-                    <a:p>
-                      <a:pPr algn="l"/>
-                      <a:r>
-                        <a:rPr sz="1100" b="1">
-                          <a:solidFill>
-                            <a:srgbClr val="0F172A"/>
-                          </a:solidFill>
-                          <a:latin typeface="Segoe UI"/>
-                        </a:rPr>
-                        <a:t>Centralized web ledger + WhatsApp</a:t>
-                      </a:r>
-                    </a:p>
-                  </a:txBody>
-                  <a:tcPr>
-                    <a:solidFill>
-                      <a:srgbClr val="EEF2FF"/>
-                    </a:solidFill>
-                  </a:tcPr>
-                </a:tc>
-              </a:tr>
-            </a:tbl>
-          </a:graphicData>
-        </a:graphic>
-      </p:graphicFrame>
-      <p:sp>
-        <p:nvSpPr>
-          <p:cNvPr id="6" name="Rounded Rectangle 5"/>
+      <p:sp>
+        <p:nvSpPr>
+          <p:cNvPr id="5" name="Rounded Rectangle 4"/>
           <p:cNvSpPr/>
           <p:nvPr/>
         </p:nvSpPr>
         <p:spPr>
           <a:xfrm>
-            <a:off x="731520" y="5943600"/>
-            <a:ext cx="10698480" cy="594360"/>
+            <a:off x="731520" y="1463040"/>
+            <a:ext cx="5212080" cy="4846320"/>
           </a:xfrm>
           <a:prstGeom prst="roundRect">
             <a:avLst/>
           </a:prstGeom>
           <a:solidFill>
-            <a:srgbClr val="059669"/>
+            <a:srgbClr val="FFFFFF"/>
           </a:solidFill>
           <a:ln w="12700">
             <a:solidFill>
-              <a:srgbClr val="059669"/>
+              <a:srgbClr val="E2E8F0"/>
             </a:solidFill>
           </a:ln>
         </p:spPr>
@@ -10882,14 +10894,14 @@
       </p:sp>
       <p:sp>
         <p:nvSpPr>
-          <p:cNvPr id="7" name="TextBox 6"/>
+          <p:cNvPr id="6" name="TextBox 5"/>
           <p:cNvSpPr txBox="1"/>
           <p:nvPr/>
         </p:nvSpPr>
         <p:spPr>
           <a:xfrm>
-            <a:off x="914400" y="5989320"/>
-            <a:ext cx="10332720" cy="457200"/>
+            <a:off x="1005840" y="1645920"/>
+            <a:ext cx="4663440" cy="4480560"/>
           </a:xfrm>
           <a:prstGeom prst="rect">
             <a:avLst/>
@@ -10897,19 +10909,305 @@
           <a:noFill/>
         </p:spPr>
         <p:txBody>
-          <a:bodyPr wrap="none">
+          <a:bodyPr wrap="square">
             <a:spAutoFit/>
           </a:bodyPr>
           <a:lstStyle/>
           <a:p>
             <a:r>
-              <a:rPr sz="1300" b="1">
-                <a:solidFill>
-                  <a:srgbClr val="FFFFFF"/>
-                </a:solidFill>
-                <a:latin typeface="Segoe UI"/>
-              </a:rPr>
-              <a:t>Key Takeaway: Fix It eliminates Western credit assumptions while closing the accountability vacuum of unregulated classifieds.</a:t>
+              <a:rPr sz="1600" b="1">
+                <a:solidFill>
+                  <a:srgbClr val="0F172A"/>
+                </a:solidFill>
+              </a:rPr>
+              <a:t>1.4 Scope &amp; Delimitation of Work
+</a:t>
+            </a:r>
+          </a:p>
+          <a:p>
+            <a:pPr>
+              <a:spcBef>
+                <a:spcPts val="800"/>
+              </a:spcBef>
+            </a:pPr>
+            <a:r>
+              <a:rPr b="1" sz="1150">
+                <a:solidFill>
+                  <a:srgbClr val="4F46E5"/>
+                </a:solidFill>
+              </a:rPr>
+              <a:t>Functional Scope: </a:t>
+            </a:r>
+            <a:r>
+              <a:rPr sz="1100">
+                <a:solidFill>
+                  <a:srgbClr val="1E293B"/>
+                </a:solidFill>
+              </a:rPr>
+              <a:t>End-to-end service discovery, multi-tier pricing in GHS, dual-persona onboarding, booking state machine, and real-time WhatsApp direct action.</a:t>
+            </a:r>
+          </a:p>
+          <a:p>
+            <a:pPr>
+              <a:spcBef>
+                <a:spcPts val="800"/>
+              </a:spcBef>
+            </a:pPr>
+            <a:r>
+              <a:rPr b="1" sz="1150">
+                <a:solidFill>
+                  <a:srgbClr val="4F46E5"/>
+                </a:solidFill>
+              </a:rPr>
+              <a:t>Geographic Scope: </a:t>
+            </a:r>
+            <a:r>
+              <a:rPr sz="1100">
+                <a:solidFill>
+                  <a:srgbClr val="1E293B"/>
+                </a:solidFill>
+              </a:rPr>
+              <a:t>Metropolitan hubs across Ghana, with initial seed listings focused on Greater Accra and Ashanti Regions.</a:t>
+            </a:r>
+          </a:p>
+          <a:p>
+            <a:pPr>
+              <a:spcBef>
+                <a:spcPts val="800"/>
+              </a:spcBef>
+            </a:pPr>
+            <a:r>
+              <a:rPr b="1" sz="1150">
+                <a:solidFill>
+                  <a:srgbClr val="4F46E5"/>
+                </a:solidFill>
+              </a:rPr>
+              <a:t>Architectural Scope: </a:t>
+            </a:r>
+            <a:r>
+              <a:rPr sz="1100">
+                <a:solidFill>
+                  <a:srgbClr val="1E293B"/>
+                </a:solidFill>
+              </a:rPr>
+              <a:t>Decoupled cloud stack combining Next.js 16 (App Router), Clerk Auth v7, Sanity Headless CMS, and Neon Serverless PostgreSQL.</a:t>
+            </a:r>
+          </a:p>
+          <a:p>
+            <a:pPr>
+              <a:spcBef>
+                <a:spcPts val="800"/>
+              </a:spcBef>
+            </a:pPr>
+            <a:r>
+              <a:rPr b="1" sz="1150">
+                <a:solidFill>
+                  <a:srgbClr val="4F46E5"/>
+                </a:solidFill>
+              </a:rPr>
+              <a:t>Delimitations: </a:t>
+            </a:r>
+            <a:r>
+              <a:rPr sz="1100">
+                <a:solidFill>
+                  <a:srgbClr val="1E293B"/>
+                </a:solidFill>
+              </a:rPr>
+              <a:t>Native mobile app compilation (iOS/Android), direct automated third-party escrow settlement gateways (Paystack/MoMo API), and background GPS geofencing are reserved for future enterprise iterations.</a:t>
+            </a:r>
+          </a:p>
+        </p:txBody>
+      </p:sp>
+      <p:sp>
+        <p:nvSpPr>
+          <p:cNvPr id="7" name="Rounded Rectangle 6"/>
+          <p:cNvSpPr/>
+          <p:nvPr/>
+        </p:nvSpPr>
+        <p:spPr>
+          <a:xfrm>
+            <a:off x="6217920" y="1463040"/>
+            <a:ext cx="5212080" cy="4846320"/>
+          </a:xfrm>
+          <a:prstGeom prst="roundRect">
+            <a:avLst/>
+          </a:prstGeom>
+          <a:solidFill>
+            <a:srgbClr val="FFFFFF"/>
+          </a:solidFill>
+          <a:ln w="12700">
+            <a:solidFill>
+              <a:srgbClr val="E2E8F0"/>
+            </a:solidFill>
+          </a:ln>
+        </p:spPr>
+        <p:style>
+          <a:lnRef idx="1">
+            <a:schemeClr val="accent1"/>
+          </a:lnRef>
+          <a:fillRef idx="3">
+            <a:schemeClr val="accent1"/>
+          </a:fillRef>
+          <a:effectRef idx="2">
+            <a:schemeClr val="accent1"/>
+          </a:effectRef>
+          <a:fontRef idx="minor">
+            <a:schemeClr val="lt1"/>
+          </a:fontRef>
+        </p:style>
+        <p:txBody>
+          <a:bodyPr rtlCol="0" anchor="ctr"/>
+          <a:lstStyle/>
+          <a:p>
+            <a:pPr algn="ctr"/>
+          </a:p>
+        </p:txBody>
+      </p:sp>
+      <p:sp>
+        <p:nvSpPr>
+          <p:cNvPr id="8" name="TextBox 7"/>
+          <p:cNvSpPr txBox="1"/>
+          <p:nvPr/>
+        </p:nvSpPr>
+        <p:spPr>
+          <a:xfrm>
+            <a:off x="6492240" y="1645920"/>
+            <a:ext cx="4663440" cy="4480560"/>
+          </a:xfrm>
+          <a:prstGeom prst="rect">
+            <a:avLst/>
+          </a:prstGeom>
+          <a:noFill/>
+        </p:spPr>
+        <p:txBody>
+          <a:bodyPr wrap="square">
+            <a:spAutoFit/>
+          </a:bodyPr>
+          <a:lstStyle/>
+          <a:p>
+            <a:r>
+              <a:rPr sz="1600" b="1">
+                <a:solidFill>
+                  <a:srgbClr val="0F172A"/>
+                </a:solidFill>
+              </a:rPr>
+              <a:t>1.5 Departmental Thesis Outline
+</a:t>
+            </a:r>
+          </a:p>
+          <a:p>
+            <a:pPr>
+              <a:spcBef>
+                <a:spcPts val="800"/>
+              </a:spcBef>
+            </a:pPr>
+            <a:r>
+              <a:rPr b="1" sz="1150">
+                <a:solidFill>
+                  <a:srgbClr val="059669"/>
+                </a:solidFill>
+              </a:rPr>
+              <a:t>CHAPTER I: </a:t>
+            </a:r>
+            <a:r>
+              <a:rPr sz="1100">
+                <a:solidFill>
+                  <a:srgbClr val="1E293B"/>
+                </a:solidFill>
+              </a:rPr>
+              <a:t>Introduction, Background, Objectives, Problem Statement, Scope, and Structural Organization.</a:t>
+            </a:r>
+          </a:p>
+          <a:p>
+            <a:pPr>
+              <a:spcBef>
+                <a:spcPts val="800"/>
+              </a:spcBef>
+            </a:pPr>
+            <a:r>
+              <a:rPr b="1" sz="1150">
+                <a:solidFill>
+                  <a:srgbClr val="059669"/>
+                </a:solidFill>
+              </a:rPr>
+              <a:t>CHAPTER II: </a:t>
+            </a:r>
+            <a:r>
+              <a:rPr sz="1100">
+                <a:solidFill>
+                  <a:srgbClr val="1E293B"/>
+                </a:solidFill>
+              </a:rPr>
+              <a:t>Literature Review: Relevant economic theories, past reported platforms, and brief introduction of Fix It.</a:t>
+            </a:r>
+          </a:p>
+          <a:p>
+            <a:pPr>
+              <a:spcBef>
+                <a:spcPts val="800"/>
+              </a:spcBef>
+            </a:pPr>
+            <a:r>
+              <a:rPr b="1" sz="1150">
+                <a:solidFill>
+                  <a:srgbClr val="059669"/>
+                </a:solidFill>
+              </a:rPr>
+              <a:t>CHAPTER III: </a:t>
+            </a:r>
+            <a:r>
+              <a:rPr sz="1100">
+                <a:solidFill>
+                  <a:srgbClr val="1E293B"/>
+                </a:solidFill>
+              </a:rPr>
+              <a:t>System Design: Conceptual model, block diagrams, module designs, and complete full-stack architecture.</a:t>
+            </a:r>
+          </a:p>
+          <a:p>
+            <a:pPr>
+              <a:spcBef>
+                <a:spcPts val="800"/>
+              </a:spcBef>
+            </a:pPr>
+            <a:r>
+              <a:rPr b="1" sz="1150">
+                <a:solidFill>
+                  <a:srgbClr val="059669"/>
+                </a:solidFill>
+              </a:rPr>
+              <a:t>CHAPTER IV: </a:t>
+            </a:r>
+            <a:r>
+              <a:rPr sz="1100">
+                <a:solidFill>
+                  <a:srgbClr val="1E293B"/>
+                </a:solidFill>
+              </a:rPr>
+              <a:t>Analysis &amp; Discussions / Construction &amp; Testing: Implementation walk-through, live UI demo, testing, and security.</a:t>
+            </a:r>
+          </a:p>
+          <a:p>
+            <a:pPr>
+              <a:spcBef>
+                <a:spcPts val="800"/>
+              </a:spcBef>
+            </a:pPr>
+            <a:r>
+              <a:rPr b="1" sz="1150">
+                <a:solidFill>
+                  <a:srgbClr val="059669"/>
+                </a:solidFill>
+              </a:rPr>
+              <a:t>CHAPTER V: </a:t>
+            </a:r>
+            <a:r>
+              <a:rPr sz="1100">
+                <a:solidFill>
+                  <a:srgbClr val="1E293B"/>
+                </a:solidFill>
+              </a:rPr>
+              <a:t>Conclusion &amp; Recommendation: Empirical findings, benchmark telemetry, SUS score, and future roadmap.</a:t>
             </a:r>
           </a:p>
         </p:txBody>
@@ -10969,7 +11267,7 @@
                 </a:solidFill>
                 <a:latin typeface="Segoe UI"/>
               </a:rPr>
-              <a:t>CHAPTER III: SYSTEM ARCHITECTURE</a:t>
+              <a:t>CHAPTER II: LITERATURE REVIEW</a:t>
             </a:r>
           </a:p>
         </p:txBody>
@@ -10983,7 +11281,7 @@
         <p:spPr>
           <a:xfrm>
             <a:off x="731520" y="658368"/>
-            <a:ext cx="10698480" cy="548640"/>
+            <a:ext cx="10698480" cy="502920"/>
           </a:xfrm>
           <a:prstGeom prst="rect">
             <a:avLst/>
@@ -10997,13 +11295,13 @@
           <a:lstStyle/>
           <a:p>
             <a:r>
-              <a:rPr sz="2200" b="1">
+              <a:rPr sz="2100" b="1">
                 <a:solidFill>
                   <a:srgbClr val="0F172A"/>
                 </a:solidFill>
                 <a:latin typeface="Segoe UI"/>
               </a:rPr>
-              <a:t>Decoupled Multi-Tier Cloud Architecture</a:t>
+              <a:t>2.1 Details of Relevant Theory</a:t>
             </a:r>
           </a:p>
         </p:txBody>
@@ -11016,7 +11314,7 @@
         </p:nvSpPr>
         <p:spPr>
           <a:xfrm>
-            <a:off x="731520" y="1234440"/>
+            <a:off x="731520" y="1207008"/>
             <a:ext cx="10728655" cy="18288"/>
           </a:xfrm>
           <a:prstGeom prst="rect">
@@ -11062,7 +11360,7 @@
         <p:spPr>
           <a:xfrm>
             <a:off x="731520" y="1463040"/>
-            <a:ext cx="5486400" cy="4846320"/>
+            <a:ext cx="10728655" cy="1097280"/>
           </a:xfrm>
           <a:prstGeom prst="roundRect">
             <a:avLst/>
@@ -11106,8 +11404,8 @@
         </p:nvSpPr>
         <p:spPr>
           <a:xfrm>
-            <a:off x="1005840" y="1645920"/>
-            <a:ext cx="4937760" cy="4480560"/>
+            <a:off x="1005840" y="1572768"/>
+            <a:ext cx="10149840" cy="868680"/>
           </a:xfrm>
           <a:prstGeom prst="rect">
             <a:avLst/>
@@ -11121,128 +11419,31 @@
           <a:lstStyle/>
           <a:p>
             <a:r>
-              <a:rPr sz="1600" b="1">
-                <a:solidFill>
-                  <a:srgbClr val="0F172A"/>
-                </a:solidFill>
-              </a:rPr>
-              <a:t>Architectural Layers &amp; Operational Roles
+              <a:rPr sz="1450" b="1">
+                <a:solidFill>
+                  <a:srgbClr val="4F46E5"/>
+                </a:solidFill>
+              </a:rPr>
+              <a:t>Two-Sided Platform Economics  </a:t>
+            </a:r>
+            <a:r>
+              <a:rPr sz="1150" i="1">
+                <a:solidFill>
+                  <a:srgbClr val="64748B"/>
+                </a:solidFill>
+              </a:rPr>
+              <a:t>— Rochet &amp; Tirole (2003) | Armstrong (2006)
 </a:t>
             </a:r>
           </a:p>
           <a:p>
-            <a:pPr>
-              <a:spcBef>
-                <a:spcPts val="800"/>
-              </a:spcBef>
-            </a:pPr>
-            <a:r>
-              <a:rPr b="1" sz="1150">
-                <a:solidFill>
-                  <a:srgbClr val="4F46E5"/>
-                </a:solidFill>
-              </a:rPr>
-              <a:t>Presentation Layer (Next.js 16 + React 19): </a:t>
-            </a:r>
             <a:r>
               <a:rPr sz="1100">
                 <a:solidFill>
                   <a:srgbClr val="1E293B"/>
                 </a:solidFill>
               </a:rPr>
-              <a:t>Renders Server Components with zero client-side bundle bloat. Tailwind CSS ensures responsive, mobile-first utility styling.</a:t>
-            </a:r>
-          </a:p>
-          <a:p>
-            <a:pPr>
-              <a:spcBef>
-                <a:spcPts val="800"/>
-              </a:spcBef>
-            </a:pPr>
-            <a:r>
-              <a:rPr b="1" sz="1150">
-                <a:solidFill>
-                  <a:srgbClr val="4F46E5"/>
-                </a:solidFill>
-              </a:rPr>
-              <a:t>Edge Routing &amp; Security (Clerk v7): </a:t>
-            </a:r>
-            <a:r>
-              <a:rPr sz="1100">
-                <a:solidFill>
-                  <a:srgbClr val="1E293B"/>
-                </a:solidFill>
-              </a:rPr>
-              <a:t>Intercepts requests at the network edge, validating JWT session tokens and enforcing Role-Based Access Control (Customer vs. Provider).</a:t>
-            </a:r>
-          </a:p>
-          <a:p>
-            <a:pPr>
-              <a:spcBef>
-                <a:spcPts val="800"/>
-              </a:spcBef>
-            </a:pPr>
-            <a:r>
-              <a:rPr b="1" sz="1150">
-                <a:solidFill>
-                  <a:srgbClr val="4F46E5"/>
-                </a:solidFill>
-              </a:rPr>
-              <a:t>Headless Content Lake (Sanity CMS + GROQ): </a:t>
-            </a:r>
-            <a:r>
-              <a:rPr sz="1100">
-                <a:solidFill>
-                  <a:srgbClr val="1E293B"/>
-                </a:solidFill>
-              </a:rPr>
-              <a:t>Houses flexible catalog schemas (services, categories, providers, images). Optimized GROQ queries prevent payload over-fetching.</a:t>
-            </a:r>
-          </a:p>
-          <a:p>
-            <a:pPr>
-              <a:spcBef>
-                <a:spcPts val="800"/>
-              </a:spcBef>
-            </a:pPr>
-            <a:r>
-              <a:rPr b="1" sz="1150">
-                <a:solidFill>
-                  <a:srgbClr val="4F46E5"/>
-                </a:solidFill>
-              </a:rPr>
-              <a:t>Transactional Database (Neon PostgreSQL): </a:t>
-            </a:r>
-            <a:r>
-              <a:rPr sz="1100">
-                <a:solidFill>
-                  <a:srgbClr val="1E293B"/>
-                </a:solidFill>
-              </a:rPr>
-              <a:t>Guarantees ACID transactional compliance for bookings, status transitions, and client cancellation audit logs.</a:t>
-            </a:r>
-          </a:p>
-          <a:p>
-            <a:pPr>
-              <a:spcBef>
-                <a:spcPts val="800"/>
-              </a:spcBef>
-            </a:pPr>
-            <a:r>
-              <a:rPr b="1" sz="1150">
-                <a:solidFill>
-                  <a:srgbClr val="4F46E5"/>
-                </a:solidFill>
-              </a:rPr>
-              <a:t>Real-Time WhatsApp Dispatch Engine: </a:t>
-            </a:r>
-            <a:r>
-              <a:rPr sz="1100">
-                <a:solidFill>
-                  <a:srgbClr val="1E293B"/>
-                </a:solidFill>
-              </a:rPr>
-              <a:t>Normalizes telephone numbers into Ghanaian international format (+233) and generates pre-filled URI context bridges.</a:t>
+              <a:t>Multi-sided platforms create economic surplus by intermediating distinct user cohorts. Indirect network externalities require solving the 'chicken-and-egg' dilemma through friction-free artisan onboarding and open consumer catalog browsing.</a:t>
             </a:r>
           </a:p>
         </p:txBody>
@@ -11255,18 +11456,18 @@
         </p:nvSpPr>
         <p:spPr>
           <a:xfrm>
-            <a:off x="6492240" y="1463040"/>
-            <a:ext cx="4937760" cy="4846320"/>
+            <a:off x="731520" y="2697480"/>
+            <a:ext cx="10728655" cy="1097280"/>
           </a:xfrm>
           <a:prstGeom prst="roundRect">
             <a:avLst/>
           </a:prstGeom>
           <a:solidFill>
-            <a:srgbClr val="0F172A"/>
+            <a:srgbClr val="FFFFFF"/>
           </a:solidFill>
           <a:ln w="12700">
             <a:solidFill>
-              <a:srgbClr val="0F172A"/>
+              <a:srgbClr val="E2E8F0"/>
             </a:solidFill>
           </a:ln>
         </p:spPr>
@@ -11300,8 +11501,8 @@
         </p:nvSpPr>
         <p:spPr>
           <a:xfrm>
-            <a:off x="6675120" y="1645920"/>
-            <a:ext cx="4572000" cy="4480560"/>
+            <a:off x="1005840" y="2807208"/>
+            <a:ext cx="10149840" cy="868680"/>
           </a:xfrm>
           <a:prstGeom prst="rect">
             <a:avLst/>
@@ -11315,37 +11516,225 @@
           <a:lstStyle/>
           <a:p>
             <a:r>
-              <a:rPr sz="1500" b="1">
-                <a:solidFill>
-                  <a:srgbClr val="059669"/>
-                </a:solidFill>
-              </a:rPr>
-              <a:t>Decoupled Data Flow Topology
+              <a:rPr sz="1450" b="1">
+                <a:solidFill>
+                  <a:srgbClr val="4F46E5"/>
+                </a:solidFill>
+              </a:rPr>
+              <a:t>Market for Lemons &amp; Adverse Selection  </a:t>
+            </a:r>
+            <a:r>
+              <a:rPr sz="1150" i="1">
+                <a:solidFill>
+                  <a:srgbClr val="64748B"/>
+                </a:solidFill>
+              </a:rPr>
+              <a:t>— George A. Akerlof (1970)
 </a:t>
             </a:r>
-            <a:r>
-              <a:rPr sz="1050">
-                <a:solidFill>
-                  <a:srgbClr val="FFFFFF"/>
-                </a:solidFill>
-                <a:latin typeface="Courier New"/>
-              </a:rPr>
-              <a:t>[Client Device (Mobile / Desktop)]
-             | (HTTPS / TLS 1.3)
-             v
-[Edge Router &amp; Clerk Middleware]
-       /                    \
- (Read Queries)       (Transactional Mutations)
-     v                          v
-[Sanity Content Lake]     [Neon PostgreSQL]
- - Services Catalog        - Bookings Ledger
- - Categories Directory    - State Transitions
- - Provider Badges         - Audit Logs
-       \                    /
-        +---------+--------+
-                  v
-[WhatsApp Universal Deep-Link (+233)]
- -&gt; Real-Time Artisan Customer Chat</a:t>
+          </a:p>
+          <a:p>
+            <a:r>
+              <a:rPr sz="1100">
+                <a:solidFill>
+                  <a:srgbClr val="1E293B"/>
+                </a:solidFill>
+              </a:rPr>
+              <a:t>Quality uncertainty causes buyers to expect poor service, depressing market prices and driving skilled artisans out of the informal trade market. Fix It replaces quality ambiguity with verifiable digital reputation capital.</a:t>
+            </a:r>
+          </a:p>
+        </p:txBody>
+      </p:sp>
+      <p:sp>
+        <p:nvSpPr>
+          <p:cNvPr id="9" name="Rounded Rectangle 8"/>
+          <p:cNvSpPr/>
+          <p:nvPr/>
+        </p:nvSpPr>
+        <p:spPr>
+          <a:xfrm>
+            <a:off x="731520" y="3931920"/>
+            <a:ext cx="10728655" cy="1097280"/>
+          </a:xfrm>
+          <a:prstGeom prst="roundRect">
+            <a:avLst/>
+          </a:prstGeom>
+          <a:solidFill>
+            <a:srgbClr val="FFFFFF"/>
+          </a:solidFill>
+          <a:ln w="12700">
+            <a:solidFill>
+              <a:srgbClr val="E2E8F0"/>
+            </a:solidFill>
+          </a:ln>
+        </p:spPr>
+        <p:style>
+          <a:lnRef idx="1">
+            <a:schemeClr val="accent1"/>
+          </a:lnRef>
+          <a:fillRef idx="3">
+            <a:schemeClr val="accent1"/>
+          </a:fillRef>
+          <a:effectRef idx="2">
+            <a:schemeClr val="accent1"/>
+          </a:effectRef>
+          <a:fontRef idx="minor">
+            <a:schemeClr val="lt1"/>
+          </a:fontRef>
+        </p:style>
+        <p:txBody>
+          <a:bodyPr rtlCol="0" anchor="ctr"/>
+          <a:lstStyle/>
+          <a:p>
+            <a:pPr algn="ctr"/>
+          </a:p>
+        </p:txBody>
+      </p:sp>
+      <p:sp>
+        <p:nvSpPr>
+          <p:cNvPr id="10" name="TextBox 9"/>
+          <p:cNvSpPr txBox="1"/>
+          <p:nvPr/>
+        </p:nvSpPr>
+        <p:spPr>
+          <a:xfrm>
+            <a:off x="1005840" y="4041648"/>
+            <a:ext cx="10149840" cy="868680"/>
+          </a:xfrm>
+          <a:prstGeom prst="rect">
+            <a:avLst/>
+          </a:prstGeom>
+          <a:noFill/>
+        </p:spPr>
+        <p:txBody>
+          <a:bodyPr wrap="square">
+            <a:spAutoFit/>
+          </a:bodyPr>
+          <a:lstStyle/>
+          <a:p>
+            <a:r>
+              <a:rPr sz="1450" b="1">
+                <a:solidFill>
+                  <a:srgbClr val="4F46E5"/>
+                </a:solidFill>
+              </a:rPr>
+              <a:t>Signaling Theory in Digital Labor  </a:t>
+            </a:r>
+            <a:r>
+              <a:rPr sz="1150" i="1">
+                <a:solidFill>
+                  <a:srgbClr val="64748B"/>
+                </a:solidFill>
+              </a:rPr>
+              <a:t>— Michael Spence (1973)
+</a:t>
+            </a:r>
+          </a:p>
+          <a:p>
+            <a:r>
+              <a:rPr sz="1100">
+                <a:solidFill>
+                  <a:srgbClr val="1E293B"/>
+                </a:solidFill>
+              </a:rPr>
+              <a:t>High-quality providers must emit costly, verifiable signals that low-quality imitators cannot easily mimic. Operationalized via Clerk identity vetting, trade licensing verification, and immutable customer reviews.</a:t>
+            </a:r>
+          </a:p>
+        </p:txBody>
+      </p:sp>
+      <p:sp>
+        <p:nvSpPr>
+          <p:cNvPr id="11" name="Rounded Rectangle 10"/>
+          <p:cNvSpPr/>
+          <p:nvPr/>
+        </p:nvSpPr>
+        <p:spPr>
+          <a:xfrm>
+            <a:off x="731520" y="5166360"/>
+            <a:ext cx="10728655" cy="1097280"/>
+          </a:xfrm>
+          <a:prstGeom prst="roundRect">
+            <a:avLst/>
+          </a:prstGeom>
+          <a:solidFill>
+            <a:srgbClr val="FFFFFF"/>
+          </a:solidFill>
+          <a:ln w="12700">
+            <a:solidFill>
+              <a:srgbClr val="E2E8F0"/>
+            </a:solidFill>
+          </a:ln>
+        </p:spPr>
+        <p:style>
+          <a:lnRef idx="1">
+            <a:schemeClr val="accent1"/>
+          </a:lnRef>
+          <a:fillRef idx="3">
+            <a:schemeClr val="accent1"/>
+          </a:fillRef>
+          <a:effectRef idx="2">
+            <a:schemeClr val="accent1"/>
+          </a:effectRef>
+          <a:fontRef idx="minor">
+            <a:schemeClr val="lt1"/>
+          </a:fontRef>
+        </p:style>
+        <p:txBody>
+          <a:bodyPr rtlCol="0" anchor="ctr"/>
+          <a:lstStyle/>
+          <a:p>
+            <a:pPr algn="ctr"/>
+          </a:p>
+        </p:txBody>
+      </p:sp>
+      <p:sp>
+        <p:nvSpPr>
+          <p:cNvPr id="12" name="TextBox 11"/>
+          <p:cNvSpPr txBox="1"/>
+          <p:nvPr/>
+        </p:nvSpPr>
+        <p:spPr>
+          <a:xfrm>
+            <a:off x="1005840" y="5276088"/>
+            <a:ext cx="10149840" cy="868680"/>
+          </a:xfrm>
+          <a:prstGeom prst="rect">
+            <a:avLst/>
+          </a:prstGeom>
+          <a:noFill/>
+        </p:spPr>
+        <p:txBody>
+          <a:bodyPr wrap="square">
+            <a:spAutoFit/>
+          </a:bodyPr>
+          <a:lstStyle/>
+          <a:p>
+            <a:r>
+              <a:rPr sz="1450" b="1">
+                <a:solidFill>
+                  <a:srgbClr val="4F46E5"/>
+                </a:solidFill>
+              </a:rPr>
+              <a:t>Technology Acceptance Model (TAM)  </a:t>
+            </a:r>
+            <a:r>
+              <a:rPr sz="1150" i="1">
+                <a:solidFill>
+                  <a:srgbClr val="64748B"/>
+                </a:solidFill>
+              </a:rPr>
+              <a:t>— Fred Davis (1989)
+</a:t>
+            </a:r>
+          </a:p>
+          <a:p>
+            <a:r>
+              <a:rPr sz="1100">
+                <a:solidFill>
+                  <a:srgbClr val="1E293B"/>
+                </a:solidFill>
+              </a:rPr>
+              <a:t>Perceived Usefulness (PU) and Perceived Ease of Use (PEOU) dictate adoption in West Africa. Rather than forcing complex Western workflows, Fix It pairs centralized web booking with familiar WhatsApp messaging.</a:t>
             </a:r>
           </a:p>
         </p:txBody>
@@ -11405,7 +11794,7 @@
                 </a:solidFill>
                 <a:latin typeface="Segoe UI"/>
               </a:rPr>
-              <a:t>CHAPTER III: UI/UX ENGINEERING</a:t>
+              <a:t>CHAPTER II: LITERATURE REVIEW</a:t>
             </a:r>
           </a:p>
         </p:txBody>
@@ -11419,7 +11808,7 @@
         <p:spPr>
           <a:xfrm>
             <a:off x="731520" y="658368"/>
-            <a:ext cx="10698480" cy="548640"/>
+            <a:ext cx="10698480" cy="502920"/>
           </a:xfrm>
           <a:prstGeom prst="rect">
             <a:avLst/>
@@ -11433,13 +11822,13 @@
           <a:lstStyle/>
           <a:p>
             <a:r>
-              <a:rPr sz="2200" b="1">
+              <a:rPr sz="2100" b="1">
                 <a:solidFill>
                   <a:srgbClr val="0F172A"/>
                 </a:solidFill>
                 <a:latin typeface="Segoe UI"/>
               </a:rPr>
-              <a:t>Fix-It Design System: Tokens, Components &amp; Accessibility</a:t>
+              <a:t>2.2 Review of Past Work &amp; 2.3 Proposed Solution</a:t>
             </a:r>
           </a:p>
         </p:txBody>
@@ -11452,7 +11841,7 @@
         </p:nvSpPr>
         <p:spPr>
           <a:xfrm>
-            <a:off x="731520" y="1234440"/>
+            <a:off x="731520" y="1207008"/>
             <a:ext cx="10728655" cy="18288"/>
           </a:xfrm>
           <a:prstGeom prst="rect">
@@ -11498,7 +11887,7 @@
         <p:spPr>
           <a:xfrm>
             <a:off x="731520" y="1463040"/>
-            <a:ext cx="4114800" cy="4846320"/>
+            <a:ext cx="5212080" cy="4846320"/>
           </a:xfrm>
           <a:prstGeom prst="roundRect">
             <a:avLst/>
@@ -11542,8 +11931,8 @@
         </p:nvSpPr>
         <p:spPr>
           <a:xfrm>
-            <a:off x="914400" y="1645920"/>
-            <a:ext cx="3749039" cy="4480560"/>
+            <a:off x="1005840" y="1645920"/>
+            <a:ext cx="4663440" cy="4480560"/>
           </a:xfrm>
           <a:prstGeom prst="rect">
             <a:avLst/>
@@ -11562,7 +11951,7 @@
                   <a:srgbClr val="0F172A"/>
                 </a:solidFill>
               </a:rPr>
-              <a:t>Design Tokens &amp; Visual Standards
+              <a:t>2.2 Review of Past/Reported Work
 </a:t>
             </a:r>
           </a:p>
@@ -11575,10 +11964,10 @@
             <a:r>
               <a:rPr b="1" sz="1150">
                 <a:solidFill>
-                  <a:srgbClr val="4F46E5"/>
-                </a:solidFill>
-              </a:rPr>
-              <a:t>Curated Palette: </a:t>
+                  <a:srgbClr val="E11D48"/>
+                </a:solidFill>
+              </a:rPr>
+              <a:t>TaskRabbit &amp; Urban Company (Global): </a:t>
             </a:r>
             <a:r>
               <a:rPr sz="1100">
@@ -11586,7 +11975,7 @@
                   <a:srgbClr val="1E293B"/>
                 </a:solidFill>
               </a:rPr>
-              <a:t>Deep Indigo (#1E1B4B) represents authority and stability; Emerald Green (#059669) signifies verified trust; Neutral Slate for legible text.</a:t>
+              <a:t>Western and Asian platforms rely on formal credit scoring, mandatory credit card payments, and proprietary in-app messaging, which alienate informal African participants.</a:t>
             </a:r>
           </a:p>
           <a:p>
@@ -11598,10 +11987,10 @@
             <a:r>
               <a:rPr b="1" sz="1150">
                 <a:solidFill>
-                  <a:srgbClr val="4F46E5"/>
-                </a:solidFill>
-              </a:rPr>
-              <a:t>Glassmorphism &amp; Elevation: </a:t>
+                  <a:srgbClr val="E11D48"/>
+                </a:solidFill>
+              </a:rPr>
+              <a:t>Jiji Ghana &amp; Tonaton (Regional Classifieds): </a:t>
             </a:r>
             <a:r>
               <a:rPr sz="1100">
@@ -11609,7 +11998,7 @@
                   <a:srgbClr val="1E293B"/>
                 </a:solidFill>
               </a:rPr>
-              <a:t>Subtle backdrop-filter blurs, micro-borders, and tailored shadows produce a state-of-the-art modern interface.</a:t>
+              <a:t>Function merely as unregulated digital billboards with zero identity verification, high scam rates, and no transaction recourse.</a:t>
             </a:r>
           </a:p>
           <a:p>
@@ -11621,10 +12010,10 @@
             <a:r>
               <a:rPr b="1" sz="1150">
                 <a:solidFill>
-                  <a:srgbClr val="4F46E5"/>
-                </a:solidFill>
-              </a:rPr>
-              <a:t>WCAG 2.1 AA Compliance: </a:t>
+                  <a:srgbClr val="E11D48"/>
+                </a:solidFill>
+              </a:rPr>
+              <a:t>Lynk Kenya (Regional Dedicated Platform): </a:t>
             </a:r>
             <a:r>
               <a:rPr sz="1100">
@@ -11632,30 +12021,7 @@
                   <a:srgbClr val="1E293B"/>
                 </a:solidFill>
               </a:rPr>
-              <a:t>Strict 4.5:1 text-to-background contrast ratios, full keyboard focus rings, and screen-reader accessible ARIA tags.</a:t>
-            </a:r>
-          </a:p>
-          <a:p>
-            <a:pPr>
-              <a:spcBef>
-                <a:spcPts val="800"/>
-              </a:spcBef>
-            </a:pPr>
-            <a:r>
-              <a:rPr b="1" sz="1150">
-                <a:solidFill>
-                  <a:srgbClr val="4F46E5"/>
-                </a:solidFill>
-              </a:rPr>
-              <a:t>Live Interactive Route: </a:t>
-            </a:r>
-            <a:r>
-              <a:rPr sz="1100">
-                <a:solidFill>
-                  <a:srgbClr val="1E293B"/>
-                </a:solidFill>
-              </a:rPr>
-              <a:t>Accessible live at `/design-system` for rapid component prototyping and consistent design token inheritance.</a:t>
+              <a:t>Achieved initial traction but failed due to unsustainable overhead from manual phone-dispatch operators.</a:t>
             </a:r>
           </a:p>
         </p:txBody>
@@ -11668,8 +12034,8 @@
         </p:nvSpPr>
         <p:spPr>
           <a:xfrm>
-            <a:off x="5120640" y="1463040"/>
-            <a:ext cx="6309360" cy="4846320"/>
+            <a:off x="6217920" y="1463040"/>
+            <a:ext cx="5212080" cy="4846320"/>
           </a:xfrm>
           <a:prstGeom prst="roundRect">
             <a:avLst/>
@@ -11705,60 +12071,128 @@
           </a:p>
         </p:txBody>
       </p:sp>
-      <p:pic>
-        <p:nvPicPr>
-          <p:cNvPr id="8" name="Picture 7" descr="live_figure_3_2_design_system.png"/>
-          <p:cNvPicPr>
-            <a:picLocks noChangeAspect="1"/>
-          </p:cNvPicPr>
-          <p:nvPr/>
-        </p:nvPicPr>
-        <p:blipFill>
-          <a:blip r:embed="rId2"/>
-          <a:stretch>
-            <a:fillRect/>
-          </a:stretch>
-        </p:blipFill>
-        <p:spPr>
-          <a:xfrm>
-            <a:off x="5303520" y="1645920"/>
-            <a:ext cx="5943600" cy="4206240"/>
+      <p:sp>
+        <p:nvSpPr>
+          <p:cNvPr id="8" name="TextBox 7"/>
+          <p:cNvSpPr txBox="1"/>
+          <p:nvPr/>
+        </p:nvSpPr>
+        <p:spPr>
+          <a:xfrm>
+            <a:off x="6492240" y="1645920"/>
+            <a:ext cx="4663440" cy="4480560"/>
           </a:xfrm>
           <a:prstGeom prst="rect">
             <a:avLst/>
           </a:prstGeom>
-        </p:spPr>
-      </p:pic>
-      <p:sp>
-        <p:nvSpPr>
-          <p:cNvPr id="9" name="TextBox 8"/>
-          <p:cNvSpPr txBox="1"/>
-          <p:nvPr/>
-        </p:nvSpPr>
-        <p:spPr>
-          <a:xfrm>
-            <a:off x="5303520" y="5897880"/>
-            <a:ext cx="5943600" cy="365760"/>
-          </a:xfrm>
-          <a:prstGeom prst="rect">
-            <a:avLst/>
-          </a:prstGeom>
           <a:noFill/>
         </p:spPr>
         <p:txBody>
-          <a:bodyPr wrap="none">
+          <a:bodyPr wrap="square">
             <a:spAutoFit/>
           </a:bodyPr>
           <a:lstStyle/>
           <a:p>
-            <a:pPr algn="ctr"/>
-            <a:r>
-              <a:rPr sz="1050" i="1">
-                <a:solidFill>
-                  <a:srgbClr val="64748B"/>
-                </a:solidFill>
-              </a:rPr>
-              <a:t>Figure 3-2: Live Fix-It Design System &amp; Interactive Tokens (/design-system)</a:t>
+            <a:r>
+              <a:rPr sz="1600" b="1">
+                <a:solidFill>
+                  <a:srgbClr val="0F172A"/>
+                </a:solidFill>
+              </a:rPr>
+              <a:t>2.3 Brief Intro of Proposed Solution
+</a:t>
+            </a:r>
+          </a:p>
+          <a:p>
+            <a:pPr>
+              <a:spcBef>
+                <a:spcPts val="800"/>
+              </a:spcBef>
+            </a:pPr>
+            <a:r>
+              <a:rPr b="1" sz="1150">
+                <a:solidFill>
+                  <a:srgbClr val="059669"/>
+                </a:solidFill>
+              </a:rPr>
+              <a:t>Fix It Marketplace: </a:t>
+            </a:r>
+            <a:r>
+              <a:rPr sz="1100">
+                <a:solidFill>
+                  <a:srgbClr val="1E293B"/>
+                </a:solidFill>
+              </a:rPr>
+              <a:t>A localized, trust-driven on-demand ecosystem bridging domestic consumers with verified Ghanaian tradespeople.</a:t>
+            </a:r>
+          </a:p>
+          <a:p>
+            <a:pPr>
+              <a:spcBef>
+                <a:spcPts val="800"/>
+              </a:spcBef>
+            </a:pPr>
+            <a:r>
+              <a:rPr b="1" sz="1150">
+                <a:solidFill>
+                  <a:srgbClr val="059669"/>
+                </a:solidFill>
+              </a:rPr>
+              <a:t>Decoupled Headless Jamstack: </a:t>
+            </a:r>
+            <a:r>
+              <a:rPr sz="1100">
+                <a:solidFill>
+                  <a:srgbClr val="1E293B"/>
+                </a:solidFill>
+              </a:rPr>
+              <a:t>Next.js 16 Server Components + Sanity CMS Content Lake deliver sub-1.2s page loads under mobile network constraints.</a:t>
+            </a:r>
+          </a:p>
+          <a:p>
+            <a:pPr>
+              <a:spcBef>
+                <a:spcPts val="800"/>
+              </a:spcBef>
+            </a:pPr>
+            <a:r>
+              <a:rPr b="1" sz="1150">
+                <a:solidFill>
+                  <a:srgbClr val="059669"/>
+                </a:solidFill>
+              </a:rPr>
+              <a:t>Transparent Tiered Packaging: </a:t>
+            </a:r>
+            <a:r>
+              <a:rPr sz="1100">
+                <a:solidFill>
+                  <a:srgbClr val="1E293B"/>
+                </a:solidFill>
+              </a:rPr>
+              <a:t>Standardized Basic, Standard, and Premium packages in Ghana Cedis (GHS) eliminate price haggling.</a:t>
+            </a:r>
+          </a:p>
+          <a:p>
+            <a:pPr>
+              <a:spcBef>
+                <a:spcPts val="800"/>
+              </a:spcBef>
+            </a:pPr>
+            <a:r>
+              <a:rPr b="1" sz="1150">
+                <a:solidFill>
+                  <a:srgbClr val="059669"/>
+                </a:solidFill>
+              </a:rPr>
+              <a:t>Localized WhatsApp Bridge: </a:t>
+            </a:r>
+            <a:r>
+              <a:rPr sz="1100">
+                <a:solidFill>
+                  <a:srgbClr val="1E293B"/>
+                </a:solidFill>
+              </a:rPr>
+              <a:t>Combines centralized database order tracking with direct WhatsApp messaging (+233) matching Ghanaian commerce habits.</a:t>
             </a:r>
           </a:p>
         </p:txBody>
@@ -11818,7 +12252,7 @@
                 </a:solidFill>
                 <a:latin typeface="Segoe UI"/>
               </a:rPr>
-              <a:t>CHAPTER IV: IMPLEMENTATION &amp; CONSTRUCTION</a:t>
+              <a:t>CHAPTER III: SYSTEM DESIGN</a:t>
             </a:r>
           </a:p>
         </p:txBody>
@@ -11832,7 +12266,7 @@
         <p:spPr>
           <a:xfrm>
             <a:off x="731520" y="658368"/>
-            <a:ext cx="10698480" cy="548640"/>
+            <a:ext cx="10698480" cy="502920"/>
           </a:xfrm>
           <a:prstGeom prst="rect">
             <a:avLst/>
@@ -11846,13 +12280,13 @@
           <a:lstStyle/>
           <a:p>
             <a:r>
-              <a:rPr sz="2200" b="1">
+              <a:rPr sz="2100" b="1">
                 <a:solidFill>
                   <a:srgbClr val="0F172A"/>
                 </a:solidFill>
                 <a:latin typeface="Segoe UI"/>
               </a:rPr>
-              <a:t>Customer Discovery: Live Marketplace &amp; Faceted Search</a:t>
+              <a:t>3.1 Concept &amp; 3.2 Block Diagram Description</a:t>
             </a:r>
           </a:p>
         </p:txBody>
@@ -11865,7 +12299,7 @@
         </p:nvSpPr>
         <p:spPr>
           <a:xfrm>
-            <a:off x="731520" y="1234440"/>
+            <a:off x="731520" y="1207008"/>
             <a:ext cx="10728655" cy="18288"/>
           </a:xfrm>
           <a:prstGeom prst="rect">
@@ -11911,7 +12345,7 @@
         <p:spPr>
           <a:xfrm>
             <a:off x="731520" y="1463040"/>
-            <a:ext cx="4114800" cy="4846320"/>
+            <a:ext cx="5212080" cy="4846320"/>
           </a:xfrm>
           <a:prstGeom prst="roundRect">
             <a:avLst/>
@@ -11955,8 +12389,8 @@
         </p:nvSpPr>
         <p:spPr>
           <a:xfrm>
-            <a:off x="914400" y="1645920"/>
-            <a:ext cx="3749039" cy="4480560"/>
+            <a:off x="1005840" y="1645920"/>
+            <a:ext cx="4663440" cy="4480560"/>
           </a:xfrm>
           <a:prstGeom prst="rect">
             <a:avLst/>
@@ -11975,7 +12409,7 @@
                   <a:srgbClr val="0F172A"/>
                 </a:solidFill>
               </a:rPr>
-              <a:t>Catalog Architecture Highlights
+              <a:t>3.1 System Concept
 </a:t>
             </a:r>
           </a:p>
@@ -11991,7 +12425,7 @@
                   <a:srgbClr val="4F46E5"/>
                 </a:solidFill>
               </a:rPr>
-              <a:t>Multi-Category Exploration: </a:t>
+              <a:t>Core Philosophy: </a:t>
             </a:r>
             <a:r>
               <a:rPr sz="1100">
@@ -11999,7 +12433,7 @@
                   <a:srgbClr val="1E293B"/>
                 </a:solidFill>
               </a:rPr>
-              <a:t>Browse plumbing, electrical, carpentry, moving, pop ceiling, masonry, and painting with instant filtering.</a:t>
+              <a:t>Fix It is engineered as a trust-driven, multi-sided marketplace that replaces chaotic informal referrals with verified institutional signaling.</a:t>
             </a:r>
           </a:p>
           <a:p>
@@ -12014,7 +12448,7 @@
                   <a:srgbClr val="4F46E5"/>
                 </a:solidFill>
               </a:rPr>
-              <a:t>Real-Time Debounced Search: </a:t>
+              <a:t>Dual-Persona Workflow: </a:t>
             </a:r>
             <a:r>
               <a:rPr sz="1100">
@@ -12022,7 +12456,7 @@
                   <a:srgbClr val="1E293B"/>
                 </a:solidFill>
               </a:rPr>
-              <a:t>Search input debouncing (300ms) minimizes server hits while providing responsive autocomplete querying.</a:t>
+              <a:t>Clients browse services, compare tiered scopes, and book verified artisans; artisans onboard credentials, manage orders, and coordinate dispatch.</a:t>
             </a:r>
           </a:p>
           <a:p>
@@ -12037,7 +12471,7 @@
                   <a:srgbClr val="4F46E5"/>
                 </a:solidFill>
               </a:rPr>
-              <a:t>Verified Provider Badges: </a:t>
+              <a:t>Cultural Usability Alignment: </a:t>
             </a:r>
             <a:r>
               <a:rPr sz="1100">
@@ -12045,7 +12479,7 @@
                   <a:srgbClr val="1E293B"/>
                 </a:solidFill>
               </a:rPr>
-              <a:t>Artisans with validated credentials display trust badges directly on listing cards to guide consumer decisions.</a:t>
+              <a:t>Marries stateful relational tracking with instant WhatsApp communication (+233) to eliminate friction.</a:t>
             </a:r>
           </a:p>
           <a:p>
@@ -12060,7 +12494,7 @@
                   <a:srgbClr val="4F46E5"/>
                 </a:solidFill>
               </a:rPr>
-              <a:t>Responsive Layout: </a:t>
+              <a:t>Edge Performance: </a:t>
             </a:r>
             <a:r>
               <a:rPr sz="1100">
@@ -12068,7 +12502,7 @@
                   <a:srgbClr val="1E293B"/>
                 </a:solidFill>
               </a:rPr>
-              <a:t>Adaptive CSS Grid reflows gracefully across mobile viewports, tablets, and wide desktop screens.</a:t>
+              <a:t>Utilizes server-side rendering to stream zero-bundle HTML, conserving user mobile cellular data.</a:t>
             </a:r>
           </a:p>
         </p:txBody>
@@ -12081,18 +12515,18 @@
         </p:nvSpPr>
         <p:spPr>
           <a:xfrm>
-            <a:off x="5120640" y="1463040"/>
-            <a:ext cx="6309360" cy="4846320"/>
+            <a:off x="6217920" y="1463040"/>
+            <a:ext cx="5212080" cy="4846320"/>
           </a:xfrm>
           <a:prstGeom prst="roundRect">
             <a:avLst/>
           </a:prstGeom>
           <a:solidFill>
-            <a:srgbClr val="FFFFFF"/>
+            <a:srgbClr val="0F172A"/>
           </a:solidFill>
           <a:ln w="12700">
             <a:solidFill>
-              <a:srgbClr val="E2E8F0"/>
+              <a:srgbClr val="0F172A"/>
             </a:solidFill>
           </a:ln>
         </p:spPr>
@@ -12118,60 +12552,67 @@
           </a:p>
         </p:txBody>
       </p:sp>
-      <p:pic>
-        <p:nvPicPr>
-          <p:cNvPr id="8" name="Picture 7" descr="live_figure_4_1_homepage_catalog.png"/>
-          <p:cNvPicPr>
-            <a:picLocks noChangeAspect="1"/>
-          </p:cNvPicPr>
-          <p:nvPr/>
-        </p:nvPicPr>
-        <p:blipFill>
-          <a:blip r:embed="rId2"/>
-          <a:stretch>
-            <a:fillRect/>
-          </a:stretch>
-        </p:blipFill>
-        <p:spPr>
-          <a:xfrm>
-            <a:off x="5303520" y="1645920"/>
-            <a:ext cx="5943600" cy="4206240"/>
+      <p:sp>
+        <p:nvSpPr>
+          <p:cNvPr id="8" name="TextBox 7"/>
+          <p:cNvSpPr txBox="1"/>
+          <p:nvPr/>
+        </p:nvSpPr>
+        <p:spPr>
+          <a:xfrm>
+            <a:off x="6400800" y="1645920"/>
+            <a:ext cx="4846320" cy="4480560"/>
           </a:xfrm>
           <a:prstGeom prst="rect">
             <a:avLst/>
           </a:prstGeom>
-        </p:spPr>
-      </p:pic>
-      <p:sp>
-        <p:nvSpPr>
-          <p:cNvPr id="9" name="TextBox 8"/>
-          <p:cNvSpPr txBox="1"/>
-          <p:nvPr/>
-        </p:nvSpPr>
-        <p:spPr>
-          <a:xfrm>
-            <a:off x="5303520" y="5897880"/>
-            <a:ext cx="5943600" cy="365760"/>
-          </a:xfrm>
-          <a:prstGeom prst="rect">
-            <a:avLst/>
-          </a:prstGeom>
           <a:noFill/>
         </p:spPr>
         <p:txBody>
-          <a:bodyPr wrap="none">
+          <a:bodyPr wrap="square">
             <a:spAutoFit/>
           </a:bodyPr>
           <a:lstStyle/>
           <a:p>
-            <a:pPr algn="ctr"/>
-            <a:r>
-              <a:rPr sz="1050" i="1">
-                <a:solidFill>
-                  <a:srgbClr val="64748B"/>
-                </a:solidFill>
-              </a:rPr>
-              <a:t>Figure 4-1: Live Marketplace Homepage &amp; Catalog Discovery Interface</a:t>
+            <a:r>
+              <a:rPr sz="1500" b="1">
+                <a:solidFill>
+                  <a:srgbClr val="059669"/>
+                </a:solidFill>
+              </a:rPr>
+              <a:t>3.2 Block Diagram Description
+</a:t>
+            </a:r>
+            <a:r>
+              <a:rPr sz="950">
+                <a:solidFill>
+                  <a:srgbClr val="FFFFFF"/>
+                </a:solidFill>
+                <a:latin typeface="Courier New"/>
+              </a:rPr>
+              <a:t>+-----------------------------------------------+
+|         BLOCK 1: CLIENT PRESENTATION          |
+| Next.js 16 Client Components / Tailwind CSS   |
++-----------------------+-----------------------+
+                        | HTTPS / TLS 1.3
+                        v
++-----------------------------------------------+
+|       BLOCK 2: EDGE ROUTER &amp; CLERK AUTH       |
+| Edge Middleware / Session Token Validation    |
++-----------+-----------------------+-----------+
+            |                       |
+    GROQ Read Queries       Transactional Writes
+            v                       v
++-----------------------+ +---------------------+
+|  BLOCK 3: CONTENT LAKE| | BLOCK 4: RELATIONAL |
+|  Sanity CMS (Services)| | Neon PostgreSQL (DB)|
++-----------+-----------+ +----------+----------+
+            |                        |
+            +-----------+------------+
+                        v
++-----------------------------------------------+
+|     BLOCK 5: WHATSAPP DISPATCH ENGINE (+233)  |
++-----------------------------------------------+</a:t>
             </a:r>
           </a:p>
         </p:txBody>
